--- a/10_Cowork예약작업_Code이전.pptx
+++ b/10_Cowork예약작업_Code이전.pptx
@@ -6,6 +6,8 @@
   </p:sldMasterIdLst>
   <p:sldIdLst>
     <p:sldId id="256" r:id="rId2"/>
+    <p:sldId id="278" r:id="rId29"/>
+    <p:sldId id="279" r:id="rId30"/>
     <p:sldId id="257" r:id="rId3"/>
     <p:sldId id="258" r:id="rId4"/>
     <p:sldId id="259" r:id="rId5"/>
@@ -1841,6 +1843,176 @@
         <p14:creationId xmlns:p14="http://schemas.microsoft.com/office/powerpoint/2010/main" val="1024086991"/>
       </p:ext>
     </p:extLst>
+  </p:cSld>
+  <p:clrMapOvr>
+    <a:masterClrMapping/>
+  </p:clrMapOvr>
+</p:notes>
+</file>
+
+<file path=ppt/notesSlides/notesSlide23.xml><?xml version="1.0" encoding="utf-8"?>
+<p:notes xmlns:a="http://schemas.openxmlformats.org/drawingml/2006/main" xmlns:p="http://schemas.openxmlformats.org/presentationml/2006/main" xmlns:r="http://schemas.openxmlformats.org/officeDocument/2006/relationships">
+  <p:cSld>
+    <p:spTree>
+      <p:nvGrpSpPr>
+        <p:cNvPr id="1" name=""/>
+        <p:cNvGrpSpPr/>
+        <p:nvPr/>
+      </p:nvGrpSpPr>
+      <p:grpSpPr>
+        <a:xfrm>
+          <a:off x="0" y="0"/>
+          <a:ext cx="0" cy="0"/>
+          <a:chOff x="0" y="0"/>
+          <a:chExt cx="0" cy="0"/>
+        </a:xfrm>
+      </p:grpSpPr>
+      <p:sp>
+        <p:nvSpPr>
+          <p:cNvPr id="2" name="Slide Image Placeholder 1"/>
+          <p:cNvSpPr>
+            <a:spLocks noGrp="1"/>
+          </p:cNvSpPr>
+          <p:nvPr>
+            <p:ph type="sldImg" idx="2"/>
+          </p:nvPr>
+        </p:nvSpPr>
+        <p:spPr/>
+      </p:sp>
+      <p:sp>
+        <p:nvSpPr>
+          <p:cNvPr id="3" name="Notes Placeholder 2"/>
+          <p:cNvSpPr>
+            <a:spLocks noGrp="1"/>
+          </p:cNvSpPr>
+          <p:nvPr>
+            <p:ph type="body" idx="3" sz="quarter"/>
+          </p:nvPr>
+        </p:nvSpPr>
+        <p:spPr/>
+        <p:txBody>
+          <a:bodyPr/>
+          <a:lstStyle/>
+          <a:p>
+            <a:r>
+              <a:t>[대사] 시작 전에 폴더부터 확인하겠습니다. C 드라이브 바로 아래 AI 폴더 하나면 오늘은 충분합니다. MCP 실습을 하실 분은 그 안에 mcp 폴더를, 스킬 실습은 스킬 폴더를 만듭니다. 그 안쪽 폴더는 실습할 때 Claude 가 만들어 주니 미리 만들지 않아도 됩니다.</a:t>
+            </a:r>
+          </a:p>
+          <a:p>
+            <a:r>
+              <a:t>[왜 같은 경로인가] 수강생 전원이 같은 경로를 써야 설정 파일을 그대로 복사해 쓸 수 있습니다. 다른 곳에 두면 경로를 일일이 고쳐야 하고 거기서 대부분 막힙니다.</a:t>
+            </a:r>
+          </a:p>
+          <a:p>
+            <a:r>
+              <a:t>[근거 — claude-guide-kr, 2026-10-17 확인] 03 사전준비 「폴더 하나를 먼저 만드세요」(C:\AI) · 05 MCP와 API kis 절 (C:\AI\mcp\kis-mcp-server) · 06 스킬 「폴더를 하나 연결합니다 (예: C:\AI\스킬)」.</a:t>
+            </a:r>
+          </a:p>
+          <a:p>
+            <a:r>
+              <a:t>[예상 질문] Q. OneDrive 바탕화면에 만들어도 되나요? → 안 됩니다. 경로가 길어지고 사람마다 달라져 설정 파일을 그대로 못 씁니다.</a:t>
+            </a:r>
+          </a:p>
+        </p:txBody>
+      </p:sp>
+      <p:sp>
+        <p:nvSpPr>
+          <p:cNvPr id="4" name="Slide Number Placeholder 3"/>
+          <p:cNvSpPr>
+            <a:spLocks noGrp="1"/>
+          </p:cNvSpPr>
+          <p:nvPr>
+            <p:ph type="sldNum" idx="5" sz="quarter"/>
+          </p:nvPr>
+        </p:nvSpPr>
+        <p:spPr/>
+      </p:sp>
+    </p:spTree>
+  </p:cSld>
+  <p:clrMapOvr>
+    <a:masterClrMapping/>
+  </p:clrMapOvr>
+</p:notes>
+</file>
+
+<file path=ppt/notesSlides/notesSlide24.xml><?xml version="1.0" encoding="utf-8"?>
+<p:notes xmlns:a="http://schemas.openxmlformats.org/drawingml/2006/main" xmlns:p="http://schemas.openxmlformats.org/presentationml/2006/main" xmlns:r="http://schemas.openxmlformats.org/officeDocument/2006/relationships">
+  <p:cSld>
+    <p:spTree>
+      <p:nvGrpSpPr>
+        <p:cNvPr id="1" name=""/>
+        <p:cNvGrpSpPr/>
+        <p:nvPr/>
+      </p:nvGrpSpPr>
+      <p:grpSpPr>
+        <a:xfrm>
+          <a:off x="0" y="0"/>
+          <a:ext cx="0" cy="0"/>
+          <a:chOff x="0" y="0"/>
+          <a:chExt cx="0" cy="0"/>
+        </a:xfrm>
+      </p:grpSpPr>
+      <p:sp>
+        <p:nvSpPr>
+          <p:cNvPr id="2" name="Slide Image Placeholder 1"/>
+          <p:cNvSpPr>
+            <a:spLocks noGrp="1"/>
+          </p:cNvSpPr>
+          <p:nvPr>
+            <p:ph type="sldImg" idx="2"/>
+          </p:nvPr>
+        </p:nvSpPr>
+        <p:spPr/>
+      </p:sp>
+      <p:sp>
+        <p:nvSpPr>
+          <p:cNvPr id="3" name="Notes Placeholder 2"/>
+          <p:cNvSpPr>
+            <a:spLocks noGrp="1"/>
+          </p:cNvSpPr>
+          <p:nvPr>
+            <p:ph type="body" idx="3" sz="quarter"/>
+          </p:nvPr>
+        </p:nvSpPr>
+        <p:spPr/>
+        <p:txBody>
+          <a:bodyPr/>
+          <a:lstStyle/>
+          <a:p>
+            <a:r>
+              <a:t>[대사] 제가 실제로 연결해 둔 커넥터입니다. 아홉 개인데 쓰임새로 묶으면 넷입니다. 해외 주식은 Alpha Vantage, FMP, Bigdata.com 세 개를 같이 씁니다. 숫자가 서로 다르면 둘 다 적고 차이를 봅니다. 한국 쪽은 PlayMCP 하나만 붙이면 그 안에 카카오톡 나에게 보내기, 카카오맵, 한국 주식, DART, 실거래가, 전세안심, 법률 도구가 같이 들어옵니다. 오늘 카톡 보고 블록이 이걸 씁니다. 나머지는 메일·일정·문서용 구글 세 개와 노션, 그리고 디자인용 Figma 입니다.</a:t>
+            </a:r>
+          </a:p>
+          <a:p>
+            <a:r>
+              <a:t>[강조] 커넥터는 계정에 붙는 것이고, 엑셀이나 DuckDB처럼 내 PC에 설치한 MCP는 따로입니다. 화면 목록도 따로 보입니다.</a:t>
+            </a:r>
+          </a:p>
+          <a:p>
+            <a:r>
+              <a:t>[예상 질문] 다 연결해야 하나요? → 아닙니다. 내 업무에 쓰는 것 하나부터. 카톡 보고를 받고 싶으면 PlayMCP 하나면 됩니다.</a:t>
+            </a:r>
+          </a:p>
+          <a:p>
+            <a:r>
+              <a:t>[주의] 연결된 목록은 버전·계정에 따라 다를 수 있습니다(2026-10-17 기준).</a:t>
+            </a:r>
+          </a:p>
+        </p:txBody>
+      </p:sp>
+      <p:sp>
+        <p:nvSpPr>
+          <p:cNvPr id="4" name="Slide Number Placeholder 3"/>
+          <p:cNvSpPr>
+            <a:spLocks noGrp="1"/>
+          </p:cNvSpPr>
+          <p:nvPr>
+            <p:ph type="sldNum" idx="5" sz="quarter"/>
+          </p:nvPr>
+        </p:nvSpPr>
+        <p:spPr/>
+      </p:sp>
+    </p:spTree>
   </p:cSld>
   <p:clrMapOvr>
     <a:masterClrMapping/>
@@ -3324,6 +3496,2372 @@
 
 <file path=ppt/slides/slide10.xml><?xml version="1.0" encoding="utf-8"?>
 <p:sld xmlns:a="http://schemas.openxmlformats.org/drawingml/2006/main" xmlns:r="http://schemas.openxmlformats.org/officeDocument/2006/relationships" xmlns:p="http://schemas.openxmlformats.org/presentationml/2006/main">
+  <p:cSld name="Slide 8">
+    <p:spTree>
+      <p:nvGrpSpPr>
+        <p:cNvPr id="1" name=""/>
+        <p:cNvGrpSpPr/>
+        <p:nvPr/>
+      </p:nvGrpSpPr>
+      <p:grpSpPr>
+        <a:xfrm>
+          <a:off x="0" y="0"/>
+          <a:ext cx="0" cy="0"/>
+          <a:chOff x="0" y="0"/>
+          <a:chExt cx="0" cy="0"/>
+        </a:xfrm>
+      </p:grpSpPr>
+      <p:sp>
+        <p:nvSpPr>
+          <p:cNvPr id="2" name="Text 0"/>
+          <p:cNvSpPr/>
+          <p:nvPr>
+            <p:ph idx="100" type="title" hasCustomPrompt="1"/>
+          </p:nvPr>
+        </p:nvSpPr>
+        <p:spPr>
+          <a:xfrm>
+            <a:off x="548640" y="320040"/>
+            <a:ext cx="11064240" cy="822960"/>
+          </a:xfrm>
+          <a:prstGeom prst="rect">
+            <a:avLst/>
+          </a:prstGeom>
+          <a:noFill/>
+          <a:ln/>
+        </p:spPr>
+        <p:txBody>
+          <a:bodyPr wrap="square" rtlCol="0" anchor="ctr"/>
+          <a:lstStyle/>
+          <a:p>
+            <a:pPr indent="0" marL="0">
+              <a:buNone/>
+            </a:pPr>
+            <a:r>
+              <a:rPr lang="en-US" sz="2800" b="1" dirty="0">
+                <a:solidFill>
+                  <a:srgbClr val="1C2333"/>
+                </a:solidFill>
+                <a:latin typeface="맑은 고딕" pitchFamily="34" charset="0"/>
+                <a:ea typeface="맑은 고딕" pitchFamily="34" charset="-122"/>
+                <a:cs typeface="맑은 고딕" pitchFamily="34" charset="-120"/>
+              </a:rPr>
+              <a:t>PC 앱이 꺼지면 「반쪽 실행」</a:t>
+            </a:r>
+            <a:endParaRPr lang="en-US" sz="2800" dirty="0"/>
+          </a:p>
+        </p:txBody>
+      </p:sp>
+      <p:sp>
+        <p:nvSpPr>
+          <p:cNvPr id="3" name="Shape 1"/>
+          <p:cNvSpPr/>
+          <p:nvPr/>
+        </p:nvSpPr>
+        <p:spPr>
+          <a:xfrm>
+            <a:off x="548640" y="1325880"/>
+            <a:ext cx="548640" cy="548640"/>
+          </a:xfrm>
+          <a:prstGeom prst="ellipse">
+            <a:avLst/>
+          </a:prstGeom>
+          <a:solidFill>
+            <a:srgbClr val="D9534F"/>
+          </a:solidFill>
+          <a:ln w="12700">
+            <a:solidFill>
+              <a:srgbClr val="D9534F"/>
+            </a:solidFill>
+            <a:prstDash val="solid"/>
+          </a:ln>
+        </p:spPr>
+      </p:sp>
+      <p:sp>
+        <p:nvSpPr>
+          <p:cNvPr id="4" name="Text 2"/>
+          <p:cNvSpPr txBox="1"/>
+          <p:nvPr/>
+        </p:nvSpPr>
+        <p:spPr>
+          <a:xfrm>
+            <a:off x="548640" y="1325880"/>
+            <a:ext cx="548640" cy="548640"/>
+          </a:xfrm>
+          <a:prstGeom prst="rect">
+            <a:avLst/>
+          </a:prstGeom>
+          <a:noFill/>
+          <a:ln/>
+        </p:spPr>
+        <p:txBody>
+          <a:bodyPr wrap="square" lIns="0" tIns="0" rIns="0" bIns="0" rtlCol="0" anchor="ctr"/>
+          <a:lstStyle/>
+          <a:p>
+            <a:pPr algn="ctr" indent="0" marL="0">
+              <a:buNone/>
+            </a:pPr>
+            <a:r>
+              <a:rPr lang="en-US" sz="1600" b="1" dirty="0">
+                <a:solidFill>
+                  <a:srgbClr val="FFFFFF"/>
+                </a:solidFill>
+                <a:latin typeface="맑은 고딕" pitchFamily="34" charset="0"/>
+                <a:ea typeface="맑은 고딕" pitchFamily="34" charset="-122"/>
+                <a:cs typeface="맑은 고딕" pitchFamily="34" charset="-120"/>
+              </a:rPr>
+              <a:t>3</a:t>
+            </a:r>
+            <a:endParaRPr lang="en-US" sz="1600" dirty="0"/>
+          </a:p>
+        </p:txBody>
+      </p:sp>
+      <p:sp>
+        <p:nvSpPr>
+          <p:cNvPr id="5" name="card"/>
+          <p:cNvSpPr/>
+          <p:nvPr/>
+        </p:nvSpPr>
+        <p:spPr>
+          <a:xfrm>
+            <a:off x="548640" y="2103120"/>
+            <a:ext cx="3520440" cy="2743200"/>
+          </a:xfrm>
+          <a:prstGeom prst="roundRect">
+            <a:avLst>
+              <a:gd name="adj" fmla="val 2667"/>
+            </a:avLst>
+          </a:prstGeom>
+          <a:solidFill>
+            <a:srgbClr val="FBEAEA"/>
+          </a:solidFill>
+          <a:ln w="12700">
+            <a:solidFill>
+              <a:srgbClr val="FBEAEA"/>
+            </a:solidFill>
+            <a:prstDash val="solid"/>
+          </a:ln>
+        </p:spPr>
+      </p:sp>
+      <p:sp>
+        <p:nvSpPr>
+          <p:cNvPr id="6" name="Text 4"/>
+          <p:cNvSpPr txBox="1"/>
+          <p:nvPr/>
+        </p:nvSpPr>
+        <p:spPr>
+          <a:xfrm>
+            <a:off x="822960" y="2286000"/>
+            <a:ext cx="3017520" cy="411480"/>
+          </a:xfrm>
+          <a:prstGeom prst="rect">
+            <a:avLst/>
+          </a:prstGeom>
+          <a:noFill/>
+          <a:ln/>
+        </p:spPr>
+        <p:txBody>
+          <a:bodyPr wrap="square" lIns="0" tIns="0" rIns="0" bIns="0" rtlCol="0" anchor="t"/>
+          <a:lstStyle/>
+          <a:p>
+            <a:pPr indent="0" marL="0">
+              <a:buNone/>
+            </a:pPr>
+            <a:r>
+              <a:rPr lang="en-US" sz="1800" b="1" dirty="0">
+                <a:solidFill>
+                  <a:srgbClr val="D9534F"/>
+                </a:solidFill>
+                <a:latin typeface="맑은 고딕" pitchFamily="34" charset="0"/>
+                <a:ea typeface="맑은 고딕" pitchFamily="34" charset="-122"/>
+                <a:cs typeface="맑은 고딕" pitchFamily="34" charset="-120"/>
+              </a:rPr>
+              <a:t>증상</a:t>
+            </a:r>
+            <a:endParaRPr lang="en-US" sz="1800" dirty="0"/>
+          </a:p>
+        </p:txBody>
+      </p:sp>
+      <p:sp>
+        <p:nvSpPr>
+          <p:cNvPr id="7" name="Text 5"/>
+          <p:cNvSpPr txBox="1"/>
+          <p:nvPr/>
+        </p:nvSpPr>
+        <p:spPr>
+          <a:xfrm>
+            <a:off x="822960" y="2788920"/>
+            <a:ext cx="3017520" cy="1965960"/>
+          </a:xfrm>
+          <a:prstGeom prst="rect">
+            <a:avLst/>
+          </a:prstGeom>
+          <a:noFill/>
+          <a:ln/>
+        </p:spPr>
+        <p:txBody>
+          <a:bodyPr wrap="square" lIns="0" tIns="0" rIns="0" bIns="0" rtlCol="0" anchor="t"/>
+          <a:lstStyle/>
+          <a:p>
+            <a:pPr marL="342900" indent="-342900">
+              <a:spcAft>
+                <a:spcPts val="600"/>
+              </a:spcAft>
+              <a:buSzPct val="100000"/>
+              <a:buChar char="•"/>
+            </a:pPr>
+            <a:r>
+              <a:rPr lang="en-US" sz="1400" dirty="0">
+                <a:solidFill>
+                  <a:srgbClr val="1C2333"/>
+                </a:solidFill>
+                <a:latin typeface="맑은 고딕" pitchFamily="34" charset="0"/>
+                <a:ea typeface="맑은 고딕" pitchFamily="34" charset="-122"/>
+                <a:cs typeface="맑은 고딕" pitchFamily="34" charset="-120"/>
+              </a:rPr>
+              <a:t>일부 단계만 하고 끝난 회차</a:t>
+            </a:r>
+            <a:endParaRPr lang="en-US" sz="1400" dirty="0"/>
+          </a:p>
+          <a:p>
+            <a:pPr marL="342900" indent="-342900">
+              <a:spcAft>
+                <a:spcPts val="600"/>
+              </a:spcAft>
+              <a:buSzPct val="100000"/>
+              <a:buChar char="•"/>
+            </a:pPr>
+            <a:r>
+              <a:rPr lang="en-US" sz="1400" dirty="0">
+                <a:solidFill>
+                  <a:srgbClr val="1C2333"/>
+                </a:solidFill>
+                <a:latin typeface="맑은 고딕" pitchFamily="34" charset="0"/>
+                <a:ea typeface="맑은 고딕" pitchFamily="34" charset="-122"/>
+                <a:cs typeface="맑은 고딕" pitchFamily="34" charset="-120"/>
+              </a:rPr>
+              <a:t>주말에는 아무 작업도 결과가 없음</a:t>
+            </a:r>
+            <a:endParaRPr lang="en-US" sz="1400" dirty="0"/>
+          </a:p>
+          <a:p>
+            <a:pPr marL="342900" indent="-342900">
+              <a:spcAft>
+                <a:spcPts val="600"/>
+              </a:spcAft>
+              <a:buSzPct val="100000"/>
+              <a:buChar char="•"/>
+            </a:pPr>
+            <a:r>
+              <a:rPr lang="en-US" sz="1400" dirty="0">
+                <a:solidFill>
+                  <a:srgbClr val="1C2333"/>
+                </a:solidFill>
+                <a:latin typeface="맑은 고딕" pitchFamily="34" charset="0"/>
+                <a:ea typeface="맑은 고딕" pitchFamily="34" charset="-122"/>
+                <a:cs typeface="맑은 고딕" pitchFamily="34" charset="-120"/>
+              </a:rPr>
+              <a:t>「신규 0건」처럼 보고 — 실제로는 확인을 못 한 것</a:t>
+            </a:r>
+            <a:endParaRPr lang="en-US" sz="1400" dirty="0"/>
+          </a:p>
+        </p:txBody>
+      </p:sp>
+      <p:sp>
+        <p:nvSpPr>
+          <p:cNvPr id="8" name="card"/>
+          <p:cNvSpPr/>
+          <p:nvPr/>
+        </p:nvSpPr>
+        <p:spPr>
+          <a:xfrm>
+            <a:off x="4297680" y="2103120"/>
+            <a:ext cx="3520440" cy="2743200"/>
+          </a:xfrm>
+          <a:prstGeom prst="roundRect">
+            <a:avLst>
+              <a:gd name="adj" fmla="val 2667"/>
+            </a:avLst>
+          </a:prstGeom>
+          <a:solidFill>
+            <a:srgbClr val="FCF2E1"/>
+          </a:solidFill>
+          <a:ln w="12700">
+            <a:solidFill>
+              <a:srgbClr val="FCF2E1"/>
+            </a:solidFill>
+            <a:prstDash val="solid"/>
+          </a:ln>
+        </p:spPr>
+      </p:sp>
+      <p:sp>
+        <p:nvSpPr>
+          <p:cNvPr id="9" name="Text 7"/>
+          <p:cNvSpPr txBox="1"/>
+          <p:nvPr/>
+        </p:nvSpPr>
+        <p:spPr>
+          <a:xfrm>
+            <a:off x="4572000" y="2286000"/>
+            <a:ext cx="3017520" cy="411480"/>
+          </a:xfrm>
+          <a:prstGeom prst="rect">
+            <a:avLst/>
+          </a:prstGeom>
+          <a:noFill/>
+          <a:ln/>
+        </p:spPr>
+        <p:txBody>
+          <a:bodyPr wrap="square" lIns="0" tIns="0" rIns="0" bIns="0" rtlCol="0" anchor="t"/>
+          <a:lstStyle/>
+          <a:p>
+            <a:pPr indent="0" marL="0">
+              <a:buNone/>
+            </a:pPr>
+            <a:r>
+              <a:rPr lang="en-US" sz="1800" b="1" dirty="0">
+                <a:solidFill>
+                  <a:srgbClr val="B07316"/>
+                </a:solidFill>
+                <a:latin typeface="맑은 고딕" pitchFamily="34" charset="0"/>
+                <a:ea typeface="맑은 고딕" pitchFamily="34" charset="-122"/>
+                <a:cs typeface="맑은 고딕" pitchFamily="34" charset="-120"/>
+              </a:rPr>
+              <a:t>원인</a:t>
+            </a:r>
+            <a:endParaRPr lang="en-US" sz="1800" dirty="0"/>
+          </a:p>
+        </p:txBody>
+      </p:sp>
+      <p:sp>
+        <p:nvSpPr>
+          <p:cNvPr id="10" name="Text 8"/>
+          <p:cNvSpPr txBox="1"/>
+          <p:nvPr/>
+        </p:nvSpPr>
+        <p:spPr>
+          <a:xfrm>
+            <a:off x="4572000" y="2788920"/>
+            <a:ext cx="3017520" cy="1965960"/>
+          </a:xfrm>
+          <a:prstGeom prst="rect">
+            <a:avLst/>
+          </a:prstGeom>
+          <a:noFill/>
+          <a:ln/>
+        </p:spPr>
+        <p:txBody>
+          <a:bodyPr wrap="square" lIns="0" tIns="0" rIns="0" bIns="0" rtlCol="0" anchor="t"/>
+          <a:lstStyle/>
+          <a:p>
+            <a:pPr marL="342900" indent="-342900">
+              <a:spcAft>
+                <a:spcPts val="600"/>
+              </a:spcAft>
+              <a:buSzPct val="100000"/>
+              <a:buChar char="•"/>
+            </a:pPr>
+            <a:r>
+              <a:rPr lang="en-US" sz="1400" dirty="0">
+                <a:solidFill>
+                  <a:srgbClr val="1C2333"/>
+                </a:solidFill>
+                <a:latin typeface="맑은 고딕" pitchFamily="34" charset="0"/>
+                <a:ea typeface="맑은 고딕" pitchFamily="34" charset="-122"/>
+                <a:cs typeface="맑은 고딕" pitchFamily="34" charset="-120"/>
+              </a:rPr>
+              <a:t>클라우드 작업도 PC 도구·폴더·크롬은 데스크탑 앱을 거쳐야 닿음</a:t>
+            </a:r>
+            <a:endParaRPr lang="en-US" sz="1400" dirty="0"/>
+          </a:p>
+          <a:p>
+            <a:pPr marL="342900" indent="-342900">
+              <a:spcAft>
+                <a:spcPts val="600"/>
+              </a:spcAft>
+              <a:buSzPct val="100000"/>
+              <a:buChar char="•"/>
+            </a:pPr>
+            <a:r>
+              <a:rPr lang="en-US" sz="1400" dirty="0">
+                <a:solidFill>
+                  <a:srgbClr val="1C2333"/>
+                </a:solidFill>
+                <a:latin typeface="맑은 고딕" pitchFamily="34" charset="0"/>
+                <a:ea typeface="맑은 고딕" pitchFamily="34" charset="-122"/>
+                <a:cs typeface="맑은 고딕" pitchFamily="34" charset="-120"/>
+              </a:rPr>
+              <a:t>PC가 잠들거나 앱이 꺼지면 그 단계만 실패</a:t>
+            </a:r>
+            <a:endParaRPr lang="en-US" sz="1400" dirty="0"/>
+          </a:p>
+        </p:txBody>
+      </p:sp>
+      <p:sp>
+        <p:nvSpPr>
+          <p:cNvPr id="11" name="card"/>
+          <p:cNvSpPr/>
+          <p:nvPr/>
+        </p:nvSpPr>
+        <p:spPr>
+          <a:xfrm>
+            <a:off x="8046720" y="2103120"/>
+            <a:ext cx="3520440" cy="2743200"/>
+          </a:xfrm>
+          <a:prstGeom prst="roundRect">
+            <a:avLst>
+              <a:gd name="adj" fmla="val 2667"/>
+            </a:avLst>
+          </a:prstGeom>
+          <a:solidFill>
+            <a:srgbClr val="E4F3F1"/>
+          </a:solidFill>
+          <a:ln w="12700">
+            <a:solidFill>
+              <a:srgbClr val="E4F3F1"/>
+            </a:solidFill>
+            <a:prstDash val="solid"/>
+          </a:ln>
+        </p:spPr>
+      </p:sp>
+      <p:sp>
+        <p:nvSpPr>
+          <p:cNvPr id="12" name="Text 10"/>
+          <p:cNvSpPr txBox="1"/>
+          <p:nvPr/>
+        </p:nvSpPr>
+        <p:spPr>
+          <a:xfrm>
+            <a:off x="8321040" y="2286000"/>
+            <a:ext cx="3017520" cy="411480"/>
+          </a:xfrm>
+          <a:prstGeom prst="rect">
+            <a:avLst/>
+          </a:prstGeom>
+          <a:noFill/>
+          <a:ln/>
+        </p:spPr>
+        <p:txBody>
+          <a:bodyPr wrap="square" lIns="0" tIns="0" rIns="0" bIns="0" rtlCol="0" anchor="t"/>
+          <a:lstStyle/>
+          <a:p>
+            <a:pPr indent="0" marL="0">
+              <a:buNone/>
+            </a:pPr>
+            <a:r>
+              <a:rPr lang="en-US" sz="1800" b="1" dirty="0">
+                <a:solidFill>
+                  <a:srgbClr val="0F8C7E"/>
+                </a:solidFill>
+                <a:latin typeface="맑은 고딕" pitchFamily="34" charset="0"/>
+                <a:ea typeface="맑은 고딕" pitchFamily="34" charset="-122"/>
+                <a:cs typeface="맑은 고딕" pitchFamily="34" charset="-120"/>
+              </a:rPr>
+              <a:t>대응</a:t>
+            </a:r>
+            <a:endParaRPr lang="en-US" sz="1800" dirty="0"/>
+          </a:p>
+        </p:txBody>
+      </p:sp>
+      <p:sp>
+        <p:nvSpPr>
+          <p:cNvPr id="13" name="Text 11"/>
+          <p:cNvSpPr txBox="1"/>
+          <p:nvPr/>
+        </p:nvSpPr>
+        <p:spPr>
+          <a:xfrm>
+            <a:off x="8321040" y="2788920"/>
+            <a:ext cx="3017520" cy="1965960"/>
+          </a:xfrm>
+          <a:prstGeom prst="rect">
+            <a:avLst/>
+          </a:prstGeom>
+          <a:noFill/>
+          <a:ln/>
+        </p:spPr>
+        <p:txBody>
+          <a:bodyPr wrap="square" lIns="0" tIns="0" rIns="0" bIns="0" rtlCol="0" anchor="t"/>
+          <a:lstStyle/>
+          <a:p>
+            <a:pPr marL="342900" indent="-342900">
+              <a:spcAft>
+                <a:spcPts val="600"/>
+              </a:spcAft>
+              <a:buSzPct val="100000"/>
+              <a:buChar char="•"/>
+            </a:pPr>
+            <a:r>
+              <a:rPr lang="en-US" sz="1400" dirty="0">
+                <a:solidFill>
+                  <a:srgbClr val="1C2333"/>
+                </a:solidFill>
+                <a:latin typeface="맑은 고딕" pitchFamily="34" charset="0"/>
+                <a:ea typeface="맑은 고딕" pitchFamily="34" charset="-122"/>
+                <a:cs typeface="맑은 고딕" pitchFamily="34" charset="-120"/>
+              </a:rPr>
+              <a:t>시작 전 「사전 점검」: PC 도구를 하나씩 찔러 보고 실패하면 바로 중단</a:t>
+            </a:r>
+            <a:endParaRPr lang="en-US" sz="1400" dirty="0"/>
+          </a:p>
+          <a:p>
+            <a:pPr marL="342900" indent="-342900">
+              <a:spcAft>
+                <a:spcPts val="600"/>
+              </a:spcAft>
+              <a:buSzPct val="100000"/>
+              <a:buChar char="•"/>
+            </a:pPr>
+            <a:r>
+              <a:rPr lang="en-US" sz="1400" dirty="0">
+                <a:solidFill>
+                  <a:srgbClr val="1C2333"/>
+                </a:solidFill>
+                <a:latin typeface="맑은 고딕" pitchFamily="34" charset="0"/>
+                <a:ea typeface="맑은 고딕" pitchFamily="34" charset="-122"/>
+                <a:cs typeface="맑은 고딕" pitchFamily="34" charset="-120"/>
+              </a:rPr>
+              <a:t>중단하면 카톡으로 「PC 확인 필요」 알림</a:t>
+            </a:r>
+            <a:endParaRPr lang="en-US" sz="1400" dirty="0"/>
+          </a:p>
+          <a:p>
+            <a:pPr marL="342900" indent="-342900">
+              <a:spcAft>
+                <a:spcPts val="600"/>
+              </a:spcAft>
+              <a:buSzPct val="100000"/>
+              <a:buChar char="•"/>
+            </a:pPr>
+            <a:r>
+              <a:rPr lang="en-US" sz="1400" dirty="0">
+                <a:solidFill>
+                  <a:srgbClr val="1C2333"/>
+                </a:solidFill>
+                <a:latin typeface="맑은 고딕" pitchFamily="34" charset="0"/>
+                <a:ea typeface="맑은 고딕" pitchFamily="34" charset="-122"/>
+                <a:cs typeface="맑은 고딕" pitchFamily="34" charset="-120"/>
+              </a:rPr>
+              <a:t>「0건」과 「건너뜀」을 구분해 보고</a:t>
+            </a:r>
+            <a:endParaRPr lang="en-US" sz="1400" dirty="0"/>
+          </a:p>
+        </p:txBody>
+      </p:sp>
+      <p:sp>
+        <p:nvSpPr>
+          <p:cNvPr id="14" name="card"/>
+          <p:cNvSpPr/>
+          <p:nvPr/>
+        </p:nvSpPr>
+        <p:spPr>
+          <a:xfrm>
+            <a:off x="548640" y="5120640"/>
+            <a:ext cx="11064240" cy="868680"/>
+          </a:xfrm>
+          <a:prstGeom prst="roundRect">
+            <a:avLst>
+              <a:gd name="adj" fmla="val 8421"/>
+            </a:avLst>
+          </a:prstGeom>
+          <a:solidFill>
+            <a:srgbClr val="2B3A55"/>
+          </a:solidFill>
+          <a:ln w="12700">
+            <a:solidFill>
+              <a:srgbClr val="2B3A55"/>
+            </a:solidFill>
+            <a:prstDash val="solid"/>
+          </a:ln>
+        </p:spPr>
+      </p:sp>
+      <p:sp>
+        <p:nvSpPr>
+          <p:cNvPr id="15" name="Text 13"/>
+          <p:cNvSpPr txBox="1"/>
+          <p:nvPr/>
+        </p:nvSpPr>
+        <p:spPr>
+          <a:xfrm>
+            <a:off x="868680" y="5120640"/>
+            <a:ext cx="10515600" cy="868680"/>
+          </a:xfrm>
+          <a:prstGeom prst="rect">
+            <a:avLst/>
+          </a:prstGeom>
+          <a:noFill/>
+          <a:ln/>
+        </p:spPr>
+        <p:txBody>
+          <a:bodyPr wrap="square" lIns="0" tIns="0" rIns="0" bIns="0" rtlCol="0" anchor="ctr"/>
+          <a:lstStyle/>
+          <a:p>
+            <a:pPr indent="0" marL="0">
+              <a:buNone/>
+            </a:pPr>
+            <a:r>
+              <a:rPr lang="en-US" sz="1800" b="1" dirty="0">
+                <a:solidFill>
+                  <a:srgbClr val="FFFFFF"/>
+                </a:solidFill>
+                <a:latin typeface="맑은 고딕" pitchFamily="34" charset="0"/>
+                <a:ea typeface="맑은 고딕" pitchFamily="34" charset="-122"/>
+                <a:cs typeface="맑은 고딕" pitchFamily="34" charset="-120"/>
+              </a:rPr>
+              <a:t>교훈  클라우드 작업도 PC 도구를 쓰면 PC가 켜져 있어야 한다</a:t>
+            </a:r>
+            <a:endParaRPr lang="en-US" sz="1800" dirty="0"/>
+          </a:p>
+        </p:txBody>
+      </p:sp>
+      <p:sp>
+        <p:nvSpPr>
+          <p:cNvPr id="25" name="Slide Number Placeholder 0"/>
+          <p:cNvSpPr>
+            <a:spLocks noGrp="1"/>
+          </p:cNvSpPr>
+          <p:nvPr>
+            <p:ph type="sldNum" sz="quarter" idx="4294967295"/>
+          </p:nvPr>
+        </p:nvSpPr>
+        <p:spPr>
+          <a:xfrm>
+            <a:off x="11247120" y="6400800"/>
+            <a:ext cx="548640" cy="274320"/>
+          </a:xfrm>
+          <a:prstGeom prst="rect">
+            <a:avLst/>
+          </a:prstGeom>
+          <a:extLst>
+            <a:ext uri="{C572A759-6A51-4108-AA02-DFA0A04FC94B}">
+              <ma14:wrappingTextBoxFlag xmlns:ma14="http://schemas.microsoft.com/office/mac/drawingml/2011/main" val="0"/>
+            </a:ext>
+          </a:extLst>
+        </p:spPr>
+        <p:txBody>
+          <a:bodyPr/>
+          <a:lstStyle>
+            <a:lvl1pPr>
+              <a:defRPr sz="1000">
+                <a:solidFill>
+                  <a:srgbClr val="6B7A90"/>
+                </a:solidFill>
+                <a:latin typeface="맑은 고딕"/>
+                <a:ea typeface="맑은 고딕"/>
+                <a:cs typeface="맑은 고딕"/>
+              </a:defRPr>
+            </a:lvl1pPr>
+          </a:lstStyle>
+          <a:p>
+            <a:pPr algn="l"/>
+            <a:fld id="{F7021451-1387-4CA6-816F-3879F97B5CBC}" type="slidenum">
+              <a:rPr b="0" lang="en-US"/>
+              <a:t>10</a:t>
+            </a:fld>
+            <a:endParaRPr lang="en-US"/>
+          </a:p>
+        </p:txBody>
+      </p:sp>
+    </p:spTree>
+  </p:cSld>
+  <p:clrMapOvr>
+    <a:masterClrMapping/>
+  </p:clrMapOvr>
+</p:sld>
+</file>
+
+<file path=ppt/slides/slide11.xml><?xml version="1.0" encoding="utf-8"?>
+<p:sld xmlns:a="http://schemas.openxmlformats.org/drawingml/2006/main" xmlns:r="http://schemas.openxmlformats.org/officeDocument/2006/relationships" xmlns:p="http://schemas.openxmlformats.org/presentationml/2006/main">
+  <p:cSld name="Slide 9">
+    <p:spTree>
+      <p:nvGrpSpPr>
+        <p:cNvPr id="1" name=""/>
+        <p:cNvGrpSpPr/>
+        <p:nvPr/>
+      </p:nvGrpSpPr>
+      <p:grpSpPr>
+        <a:xfrm>
+          <a:off x="0" y="0"/>
+          <a:ext cx="0" cy="0"/>
+          <a:chOff x="0" y="0"/>
+          <a:chExt cx="0" cy="0"/>
+        </a:xfrm>
+      </p:grpSpPr>
+      <p:sp>
+        <p:nvSpPr>
+          <p:cNvPr id="2" name="Text 0"/>
+          <p:cNvSpPr/>
+          <p:nvPr>
+            <p:ph idx="100" type="title" hasCustomPrompt="1"/>
+          </p:nvPr>
+        </p:nvSpPr>
+        <p:spPr>
+          <a:xfrm>
+            <a:off x="548640" y="320040"/>
+            <a:ext cx="11064240" cy="822960"/>
+          </a:xfrm>
+          <a:prstGeom prst="rect">
+            <a:avLst/>
+          </a:prstGeom>
+          <a:noFill/>
+          <a:ln/>
+        </p:spPr>
+        <p:txBody>
+          <a:bodyPr wrap="square" rtlCol="0" anchor="ctr"/>
+          <a:lstStyle/>
+          <a:p>
+            <a:pPr indent="0" marL="0">
+              <a:buNone/>
+            </a:pPr>
+            <a:r>
+              <a:rPr lang="en-US" sz="2800" b="1" dirty="0">
+                <a:solidFill>
+                  <a:srgbClr val="1C2333"/>
+                </a:solidFill>
+                <a:latin typeface="맑은 고딕" pitchFamily="34" charset="0"/>
+                <a:ea typeface="맑은 고딕" pitchFamily="34" charset="-122"/>
+                <a:cs typeface="맑은 고딕" pitchFamily="34" charset="-120"/>
+              </a:rPr>
+              <a:t>문제 ④ 도구가 사라지거나 이름·경로가 바뀌었다</a:t>
+            </a:r>
+            <a:endParaRPr lang="en-US" sz="2800" dirty="0"/>
+          </a:p>
+        </p:txBody>
+      </p:sp>
+      <p:sp>
+        <p:nvSpPr>
+          <p:cNvPr id="3" name="Shape 1"/>
+          <p:cNvSpPr/>
+          <p:nvPr/>
+        </p:nvSpPr>
+        <p:spPr>
+          <a:xfrm>
+            <a:off x="548640" y="1325880"/>
+            <a:ext cx="548640" cy="548640"/>
+          </a:xfrm>
+          <a:prstGeom prst="ellipse">
+            <a:avLst/>
+          </a:prstGeom>
+          <a:solidFill>
+            <a:srgbClr val="D9534F"/>
+          </a:solidFill>
+          <a:ln w="12700">
+            <a:solidFill>
+              <a:srgbClr val="D9534F"/>
+            </a:solidFill>
+            <a:prstDash val="solid"/>
+          </a:ln>
+        </p:spPr>
+      </p:sp>
+      <p:sp>
+        <p:nvSpPr>
+          <p:cNvPr id="4" name="Text 2"/>
+          <p:cNvSpPr txBox="1"/>
+          <p:nvPr/>
+        </p:nvSpPr>
+        <p:spPr>
+          <a:xfrm>
+            <a:off x="548640" y="1325880"/>
+            <a:ext cx="548640" cy="548640"/>
+          </a:xfrm>
+          <a:prstGeom prst="rect">
+            <a:avLst/>
+          </a:prstGeom>
+          <a:noFill/>
+          <a:ln/>
+        </p:spPr>
+        <p:txBody>
+          <a:bodyPr wrap="square" lIns="0" tIns="0" rIns="0" bIns="0" rtlCol="0" anchor="ctr"/>
+          <a:lstStyle/>
+          <a:p>
+            <a:pPr algn="ctr" indent="0" marL="0">
+              <a:buNone/>
+            </a:pPr>
+            <a:r>
+              <a:rPr lang="en-US" sz="1600" b="1" dirty="0">
+                <a:solidFill>
+                  <a:srgbClr val="FFFFFF"/>
+                </a:solidFill>
+                <a:latin typeface="맑은 고딕" pitchFamily="34" charset="0"/>
+                <a:ea typeface="맑은 고딕" pitchFamily="34" charset="-122"/>
+                <a:cs typeface="맑은 고딕" pitchFamily="34" charset="-120"/>
+              </a:rPr>
+              <a:t>4</a:t>
+            </a:r>
+            <a:endParaRPr lang="en-US" sz="1600" dirty="0"/>
+          </a:p>
+        </p:txBody>
+      </p:sp>
+      <p:graphicFrame>
+        <p:nvGraphicFramePr>
+          <p:cNvPr id="10" name="Table 0"/>
+          <p:cNvGraphicFramePr>
+            <a:graphicFrameLocks noGrp="1"/>
+          </p:cNvGraphicFramePr>
+          <p:nvPr>
+            <p:extLst>
+              <p:ext uri="{D42A27DB-BD31-4B8C-83A1-F6EECF244321}">
+                <p14:modId xmlns:p14="http://schemas.microsoft.com/office/powerpoint/2010/main" val="1579011935"/>
+              </p:ext>
+            </p:extLst>
+          </p:nvPr>
+        </p:nvGraphicFramePr>
+        <p:xfrm>
+          <a:off x="1280160" y="1325880"/>
+          <a:ext cx="10332720" cy="914400"/>
+        </p:xfrm>
+        <a:graphic>
+          <a:graphicData uri="http://schemas.openxmlformats.org/drawingml/2006/table">
+            <a:tbl>
+              <a:tblPr/>
+              <a:tblGrid>
+                <a:gridCol w="2926080"/>
+                <a:gridCol w="3291840"/>
+                <a:gridCol w="4114800"/>
+              </a:tblGrid>
+              <a:tr h="566928">
+                <a:tc>
+                  <a:txBody>
+                    <a:bodyPr/>
+                    <a:lstStyle/>
+                    <a:p>
+                      <a:pPr indent="0" marL="0">
+                        <a:buNone/>
+                      </a:pPr>
+                      <a:r>
+                        <a:rPr lang="en-US" sz="1400" b="1" dirty="0">
+                          <a:solidFill>
+                            <a:srgbClr val="FFFFFF"/>
+                          </a:solidFill>
+                          <a:latin typeface="맑은 고딕" pitchFamily="34" charset="0"/>
+                          <a:ea typeface="맑은 고딕" pitchFamily="34" charset="-122"/>
+                          <a:cs typeface="맑은 고딕" pitchFamily="34" charset="-120"/>
+                        </a:rPr>
+                        <a:t>기능</a:t>
+                      </a:r>
+                      <a:endParaRPr lang="en-US" sz="1400" dirty="0">
+                        <a:latin typeface="맑은 고딕" charset="0"/>
+                        <a:ea typeface="맑은 고딕" charset="0"/>
+                        <a:cs typeface="맑은 고딕" charset="0"/>
+                      </a:endParaRPr>
+                    </a:p>
+                  </a:txBody>
+                  <a:tcPr marL="101600" marR="101600" marT="50800" marB="50800" anchor="ctr">
+                    <a:lnL w="6350" cap="flat" cmpd="sng" algn="ctr">
+                      <a:solidFill>
+                        <a:srgbClr val="D5DCE6"/>
+                      </a:solidFill>
+                      <a:prstDash val="solid"/>
+                      <a:round/>
+                      <a:headEnd type="none" w="med" len="med"/>
+                      <a:tailEnd type="none" w="med" len="med"/>
+                    </a:lnL>
+                    <a:lnR w="6350" cap="flat" cmpd="sng" algn="ctr">
+                      <a:solidFill>
+                        <a:srgbClr val="D5DCE6"/>
+                      </a:solidFill>
+                      <a:prstDash val="solid"/>
+                      <a:round/>
+                      <a:headEnd type="none" w="med" len="med"/>
+                      <a:tailEnd type="none" w="med" len="med"/>
+                    </a:lnR>
+                    <a:lnT w="6350" cap="flat" cmpd="sng" algn="ctr">
+                      <a:solidFill>
+                        <a:srgbClr val="D5DCE6"/>
+                      </a:solidFill>
+                      <a:prstDash val="solid"/>
+                      <a:round/>
+                      <a:headEnd type="none" w="med" len="med"/>
+                      <a:tailEnd type="none" w="med" len="med"/>
+                    </a:lnT>
+                    <a:lnB w="6350" cap="flat" cmpd="sng" algn="ctr">
+                      <a:solidFill>
+                        <a:srgbClr val="D5DCE6"/>
+                      </a:solidFill>
+                      <a:prstDash val="solid"/>
+                      <a:round/>
+                      <a:headEnd type="none" w="med" len="med"/>
+                      <a:tailEnd type="none" w="med" len="med"/>
+                    </a:lnB>
+                    <a:solidFill>
+                      <a:srgbClr val="2B3A55"/>
+                    </a:solidFill>
+                  </a:tcPr>
+                </a:tc>
+                <a:tc>
+                  <a:txBody>
+                    <a:bodyPr/>
+                    <a:lstStyle/>
+                    <a:p>
+                      <a:pPr indent="0" marL="0">
+                        <a:buNone/>
+                      </a:pPr>
+                      <a:r>
+                        <a:rPr lang="en-US" sz="1400" b="1" dirty="0">
+                          <a:solidFill>
+                            <a:srgbClr val="FFFFFF"/>
+                          </a:solidFill>
+                          <a:latin typeface="맑은 고딕" pitchFamily="34" charset="0"/>
+                          <a:ea typeface="맑은 고딕" pitchFamily="34" charset="-122"/>
+                          <a:cs typeface="맑은 고딕" pitchFamily="34" charset="-120"/>
+                        </a:rPr>
+                        <a:t>클라우드에서 실제로 본 것</a:t>
+                      </a:r>
+                      <a:endParaRPr lang="en-US" sz="1400" dirty="0">
+                        <a:latin typeface="맑은 고딕" charset="0"/>
+                        <a:ea typeface="맑은 고딕" charset="0"/>
+                        <a:cs typeface="맑은 고딕" charset="0"/>
+                      </a:endParaRPr>
+                    </a:p>
+                  </a:txBody>
+                  <a:tcPr marL="101600" marR="101600" marT="50800" marB="50800" anchor="ctr">
+                    <a:lnL w="6350" cap="flat" cmpd="sng" algn="ctr">
+                      <a:solidFill>
+                        <a:srgbClr val="D5DCE6"/>
+                      </a:solidFill>
+                      <a:prstDash val="solid"/>
+                      <a:round/>
+                      <a:headEnd type="none" w="med" len="med"/>
+                      <a:tailEnd type="none" w="med" len="med"/>
+                    </a:lnL>
+                    <a:lnR w="6350" cap="flat" cmpd="sng" algn="ctr">
+                      <a:solidFill>
+                        <a:srgbClr val="D5DCE6"/>
+                      </a:solidFill>
+                      <a:prstDash val="solid"/>
+                      <a:round/>
+                      <a:headEnd type="none" w="med" len="med"/>
+                      <a:tailEnd type="none" w="med" len="med"/>
+                    </a:lnR>
+                    <a:lnT w="6350" cap="flat" cmpd="sng" algn="ctr">
+                      <a:solidFill>
+                        <a:srgbClr val="D5DCE6"/>
+                      </a:solidFill>
+                      <a:prstDash val="solid"/>
+                      <a:round/>
+                      <a:headEnd type="none" w="med" len="med"/>
+                      <a:tailEnd type="none" w="med" len="med"/>
+                    </a:lnT>
+                    <a:lnB w="6350" cap="flat" cmpd="sng" algn="ctr">
+                      <a:solidFill>
+                        <a:srgbClr val="D5DCE6"/>
+                      </a:solidFill>
+                      <a:prstDash val="solid"/>
+                      <a:round/>
+                      <a:headEnd type="none" w="med" len="med"/>
+                      <a:tailEnd type="none" w="med" len="med"/>
+                    </a:lnB>
+                    <a:solidFill>
+                      <a:srgbClr val="2B3A55"/>
+                    </a:solidFill>
+                  </a:tcPr>
+                </a:tc>
+                <a:tc>
+                  <a:txBody>
+                    <a:bodyPr/>
+                    <a:lstStyle/>
+                    <a:p>
+                      <a:pPr indent="0" marL="0">
+                        <a:buNone/>
+                      </a:pPr>
+                      <a:r>
+                        <a:rPr lang="en-US" sz="1400" b="1" dirty="0">
+                          <a:solidFill>
+                            <a:srgbClr val="FFFFFF"/>
+                          </a:solidFill>
+                          <a:latin typeface="맑은 고딕" pitchFamily="34" charset="0"/>
+                          <a:ea typeface="맑은 고딕" pitchFamily="34" charset="-122"/>
+                          <a:cs typeface="맑은 고딕" pitchFamily="34" charset="-120"/>
+                        </a:rPr>
+                        <a:t>그래서 생긴 일</a:t>
+                      </a:r>
+                      <a:endParaRPr lang="en-US" sz="1400" dirty="0">
+                        <a:latin typeface="맑은 고딕" charset="0"/>
+                        <a:ea typeface="맑은 고딕" charset="0"/>
+                        <a:cs typeface="맑은 고딕" charset="0"/>
+                      </a:endParaRPr>
+                    </a:p>
+                  </a:txBody>
+                  <a:tcPr marL="101600" marR="101600" marT="50800" marB="50800" anchor="ctr">
+                    <a:lnL w="6350" cap="flat" cmpd="sng" algn="ctr">
+                      <a:solidFill>
+                        <a:srgbClr val="D5DCE6"/>
+                      </a:solidFill>
+                      <a:prstDash val="solid"/>
+                      <a:round/>
+                      <a:headEnd type="none" w="med" len="med"/>
+                      <a:tailEnd type="none" w="med" len="med"/>
+                    </a:lnL>
+                    <a:lnR w="6350" cap="flat" cmpd="sng" algn="ctr">
+                      <a:solidFill>
+                        <a:srgbClr val="D5DCE6"/>
+                      </a:solidFill>
+                      <a:prstDash val="solid"/>
+                      <a:round/>
+                      <a:headEnd type="none" w="med" len="med"/>
+                      <a:tailEnd type="none" w="med" len="med"/>
+                    </a:lnR>
+                    <a:lnT w="6350" cap="flat" cmpd="sng" algn="ctr">
+                      <a:solidFill>
+                        <a:srgbClr val="D5DCE6"/>
+                      </a:solidFill>
+                      <a:prstDash val="solid"/>
+                      <a:round/>
+                      <a:headEnd type="none" w="med" len="med"/>
+                      <a:tailEnd type="none" w="med" len="med"/>
+                    </a:lnT>
+                    <a:lnB w="6350" cap="flat" cmpd="sng" algn="ctr">
+                      <a:solidFill>
+                        <a:srgbClr val="D5DCE6"/>
+                      </a:solidFill>
+                      <a:prstDash val="solid"/>
+                      <a:round/>
+                      <a:headEnd type="none" w="med" len="med"/>
+                      <a:tailEnd type="none" w="med" len="med"/>
+                    </a:lnB>
+                    <a:solidFill>
+                      <a:srgbClr val="2B3A55"/>
+                    </a:solidFill>
+                  </a:tcPr>
+                </a:tc>
+              </a:tr>
+              <a:tr h="566928">
+                <a:tc>
+                  <a:txBody>
+                    <a:bodyPr/>
+                    <a:lstStyle/>
+                    <a:p>
+                      <a:pPr indent="0" marL="0">
+                        <a:buNone/>
+                      </a:pPr>
+                      <a:r>
+                        <a:rPr lang="en-US" sz="1400" dirty="0">
+                          <a:solidFill>
+                            <a:srgbClr val="1C2333"/>
+                          </a:solidFill>
+                          <a:latin typeface="맑은 고딕" pitchFamily="34" charset="0"/>
+                          <a:ea typeface="맑은 고딕" pitchFamily="34" charset="-122"/>
+                          <a:cs typeface="맑은 고딕" pitchFamily="34" charset="-120"/>
+                        </a:rPr>
+                        <a:t>스킬 저장(save_skill)</a:t>
+                      </a:r>
+                      <a:endParaRPr lang="en-US" sz="1400" dirty="0">
+                        <a:latin typeface="맑은 고딕" charset="0"/>
+                        <a:ea typeface="맑은 고딕" charset="0"/>
+                        <a:cs typeface="맑은 고딕" charset="0"/>
+                      </a:endParaRPr>
+                    </a:p>
+                  </a:txBody>
+                  <a:tcPr marL="101600" marR="101600" marT="50800" marB="50800" anchor="ctr">
+                    <a:lnL w="6350" cap="flat" cmpd="sng" algn="ctr">
+                      <a:solidFill>
+                        <a:srgbClr val="D5DCE6"/>
+                      </a:solidFill>
+                      <a:prstDash val="solid"/>
+                      <a:round/>
+                      <a:headEnd type="none" w="med" len="med"/>
+                      <a:tailEnd type="none" w="med" len="med"/>
+                    </a:lnL>
+                    <a:lnR w="6350" cap="flat" cmpd="sng" algn="ctr">
+                      <a:solidFill>
+                        <a:srgbClr val="D5DCE6"/>
+                      </a:solidFill>
+                      <a:prstDash val="solid"/>
+                      <a:round/>
+                      <a:headEnd type="none" w="med" len="med"/>
+                      <a:tailEnd type="none" w="med" len="med"/>
+                    </a:lnR>
+                    <a:lnT w="6350" cap="flat" cmpd="sng" algn="ctr">
+                      <a:solidFill>
+                        <a:srgbClr val="D5DCE6"/>
+                      </a:solidFill>
+                      <a:prstDash val="solid"/>
+                      <a:round/>
+                      <a:headEnd type="none" w="med" len="med"/>
+                      <a:tailEnd type="none" w="med" len="med"/>
+                    </a:lnT>
+                    <a:lnB w="6350" cap="flat" cmpd="sng" algn="ctr">
+                      <a:solidFill>
+                        <a:srgbClr val="D5DCE6"/>
+                      </a:solidFill>
+                      <a:prstDash val="solid"/>
+                      <a:round/>
+                      <a:headEnd type="none" w="med" len="med"/>
+                      <a:tailEnd type="none" w="med" len="med"/>
+                    </a:lnB>
+                    <a:solidFill>
+                      <a:srgbClr val="FFFFFF"/>
+                    </a:solidFill>
+                  </a:tcPr>
+                </a:tc>
+                <a:tc>
+                  <a:txBody>
+                    <a:bodyPr/>
+                    <a:lstStyle/>
+                    <a:p>
+                      <a:pPr indent="0" marL="0">
+                        <a:buNone/>
+                      </a:pPr>
+                      <a:r>
+                        <a:rPr lang="en-US" sz="1400" dirty="0">
+                          <a:solidFill>
+                            <a:srgbClr val="1C2333"/>
+                          </a:solidFill>
+                          <a:latin typeface="맑은 고딕" pitchFamily="34" charset="0"/>
+                          <a:ea typeface="맑은 고딕" pitchFamily="34" charset="-122"/>
+                          <a:cs typeface="맑은 고딕" pitchFamily="34" charset="-120"/>
+                        </a:rPr>
+                        <a:t>도구 자체가 없음</a:t>
+                      </a:r>
+                      <a:endParaRPr lang="en-US" sz="1400" dirty="0">
+                        <a:latin typeface="맑은 고딕" charset="0"/>
+                        <a:ea typeface="맑은 고딕" charset="0"/>
+                        <a:cs typeface="맑은 고딕" charset="0"/>
+                      </a:endParaRPr>
+                    </a:p>
+                  </a:txBody>
+                  <a:tcPr marL="101600" marR="101600" marT="50800" marB="50800" anchor="ctr">
+                    <a:lnL w="6350" cap="flat" cmpd="sng" algn="ctr">
+                      <a:solidFill>
+                        <a:srgbClr val="D5DCE6"/>
+                      </a:solidFill>
+                      <a:prstDash val="solid"/>
+                      <a:round/>
+                      <a:headEnd type="none" w="med" len="med"/>
+                      <a:tailEnd type="none" w="med" len="med"/>
+                    </a:lnL>
+                    <a:lnR w="6350" cap="flat" cmpd="sng" algn="ctr">
+                      <a:solidFill>
+                        <a:srgbClr val="D5DCE6"/>
+                      </a:solidFill>
+                      <a:prstDash val="solid"/>
+                      <a:round/>
+                      <a:headEnd type="none" w="med" len="med"/>
+                      <a:tailEnd type="none" w="med" len="med"/>
+                    </a:lnR>
+                    <a:lnT w="6350" cap="flat" cmpd="sng" algn="ctr">
+                      <a:solidFill>
+                        <a:srgbClr val="D5DCE6"/>
+                      </a:solidFill>
+                      <a:prstDash val="solid"/>
+                      <a:round/>
+                      <a:headEnd type="none" w="med" len="med"/>
+                      <a:tailEnd type="none" w="med" len="med"/>
+                    </a:lnT>
+                    <a:lnB w="6350" cap="flat" cmpd="sng" algn="ctr">
+                      <a:solidFill>
+                        <a:srgbClr val="D5DCE6"/>
+                      </a:solidFill>
+                      <a:prstDash val="solid"/>
+                      <a:round/>
+                      <a:headEnd type="none" w="med" len="med"/>
+                      <a:tailEnd type="none" w="med" len="med"/>
+                    </a:lnB>
+                    <a:solidFill>
+                      <a:srgbClr val="FFFFFF"/>
+                    </a:solidFill>
+                  </a:tcPr>
+                </a:tc>
+                <a:tc>
+                  <a:txBody>
+                    <a:bodyPr/>
+                    <a:lstStyle/>
+                    <a:p>
+                      <a:pPr indent="0" marL="0">
+                        <a:buNone/>
+                      </a:pPr>
+                      <a:r>
+                        <a:rPr lang="en-US" sz="1400" dirty="0">
+                          <a:solidFill>
+                            <a:srgbClr val="1C2333"/>
+                          </a:solidFill>
+                          <a:latin typeface="맑은 고딕" pitchFamily="34" charset="0"/>
+                          <a:ea typeface="맑은 고딕" pitchFamily="34" charset="-122"/>
+                          <a:cs typeface="맑은 고딕" pitchFamily="34" charset="-120"/>
+                        </a:rPr>
+                        <a:t>계수 자동 반영이 멈춰 사람이 파일을 직접 저장</a:t>
+                      </a:r>
+                      <a:endParaRPr lang="en-US" sz="1400" dirty="0">
+                        <a:latin typeface="맑은 고딕" charset="0"/>
+                        <a:ea typeface="맑은 고딕" charset="0"/>
+                        <a:cs typeface="맑은 고딕" charset="0"/>
+                      </a:endParaRPr>
+                    </a:p>
+                  </a:txBody>
+                  <a:tcPr marL="101600" marR="101600" marT="50800" marB="50800" anchor="ctr">
+                    <a:lnL w="6350" cap="flat" cmpd="sng" algn="ctr">
+                      <a:solidFill>
+                        <a:srgbClr val="D5DCE6"/>
+                      </a:solidFill>
+                      <a:prstDash val="solid"/>
+                      <a:round/>
+                      <a:headEnd type="none" w="med" len="med"/>
+                      <a:tailEnd type="none" w="med" len="med"/>
+                    </a:lnL>
+                    <a:lnR w="6350" cap="flat" cmpd="sng" algn="ctr">
+                      <a:solidFill>
+                        <a:srgbClr val="D5DCE6"/>
+                      </a:solidFill>
+                      <a:prstDash val="solid"/>
+                      <a:round/>
+                      <a:headEnd type="none" w="med" len="med"/>
+                      <a:tailEnd type="none" w="med" len="med"/>
+                    </a:lnR>
+                    <a:lnT w="6350" cap="flat" cmpd="sng" algn="ctr">
+                      <a:solidFill>
+                        <a:srgbClr val="D5DCE6"/>
+                      </a:solidFill>
+                      <a:prstDash val="solid"/>
+                      <a:round/>
+                      <a:headEnd type="none" w="med" len="med"/>
+                      <a:tailEnd type="none" w="med" len="med"/>
+                    </a:lnT>
+                    <a:lnB w="6350" cap="flat" cmpd="sng" algn="ctr">
+                      <a:solidFill>
+                        <a:srgbClr val="D5DCE6"/>
+                      </a:solidFill>
+                      <a:prstDash val="solid"/>
+                      <a:round/>
+                      <a:headEnd type="none" w="med" len="med"/>
+                      <a:tailEnd type="none" w="med" len="med"/>
+                    </a:lnB>
+                    <a:solidFill>
+                      <a:srgbClr val="FFFFFF"/>
+                    </a:solidFill>
+                  </a:tcPr>
+                </a:tc>
+              </a:tr>
+              <a:tr h="566928">
+                <a:tc>
+                  <a:txBody>
+                    <a:bodyPr/>
+                    <a:lstStyle/>
+                    <a:p>
+                      <a:pPr indent="0" marL="0">
+                        <a:buNone/>
+                      </a:pPr>
+                      <a:r>
+                        <a:rPr lang="en-US" sz="1400" dirty="0">
+                          <a:solidFill>
+                            <a:srgbClr val="1C2333"/>
+                          </a:solidFill>
+                          <a:latin typeface="맑은 고딕" pitchFamily="34" charset="0"/>
+                          <a:ea typeface="맑은 고딕" pitchFamily="34" charset="-122"/>
+                          <a:cs typeface="맑은 고딕" pitchFamily="34" charset="-120"/>
+                        </a:rPr>
+                        <a:t>다른 세션 보고 읽기</a:t>
+                      </a:r>
+                      <a:endParaRPr lang="en-US" sz="1400" dirty="0">
+                        <a:latin typeface="맑은 고딕" charset="0"/>
+                        <a:ea typeface="맑은 고딕" charset="0"/>
+                        <a:cs typeface="맑은 고딕" charset="0"/>
+                      </a:endParaRPr>
+                    </a:p>
+                  </a:txBody>
+                  <a:tcPr marL="101600" marR="101600" marT="50800" marB="50800" anchor="ctr">
+                    <a:lnL w="6350" cap="flat" cmpd="sng" algn="ctr">
+                      <a:solidFill>
+                        <a:srgbClr val="D5DCE6"/>
+                      </a:solidFill>
+                      <a:prstDash val="solid"/>
+                      <a:round/>
+                      <a:headEnd type="none" w="med" len="med"/>
+                      <a:tailEnd type="none" w="med" len="med"/>
+                    </a:lnL>
+                    <a:lnR w="6350" cap="flat" cmpd="sng" algn="ctr">
+                      <a:solidFill>
+                        <a:srgbClr val="D5DCE6"/>
+                      </a:solidFill>
+                      <a:prstDash val="solid"/>
+                      <a:round/>
+                      <a:headEnd type="none" w="med" len="med"/>
+                      <a:tailEnd type="none" w="med" len="med"/>
+                    </a:lnR>
+                    <a:lnT w="6350" cap="flat" cmpd="sng" algn="ctr">
+                      <a:solidFill>
+                        <a:srgbClr val="D5DCE6"/>
+                      </a:solidFill>
+                      <a:prstDash val="solid"/>
+                      <a:round/>
+                      <a:headEnd type="none" w="med" len="med"/>
+                      <a:tailEnd type="none" w="med" len="med"/>
+                    </a:lnT>
+                    <a:lnB w="6350" cap="flat" cmpd="sng" algn="ctr">
+                      <a:solidFill>
+                        <a:srgbClr val="D5DCE6"/>
+                      </a:solidFill>
+                      <a:prstDash val="solid"/>
+                      <a:round/>
+                      <a:headEnd type="none" w="med" len="med"/>
+                      <a:tailEnd type="none" w="med" len="med"/>
+                    </a:lnB>
+                    <a:solidFill>
+                      <a:srgbClr val="EEF2F7"/>
+                    </a:solidFill>
+                  </a:tcPr>
+                </a:tc>
+                <a:tc>
+                  <a:txBody>
+                    <a:bodyPr/>
+                    <a:lstStyle/>
+                    <a:p>
+                      <a:pPr indent="0" marL="0">
+                        <a:buNone/>
+                      </a:pPr>
+                      <a:r>
+                        <a:rPr lang="en-US" sz="1400" dirty="0">
+                          <a:solidFill>
+                            <a:srgbClr val="1C2333"/>
+                          </a:solidFill>
+                          <a:latin typeface="맑은 고딕" pitchFamily="34" charset="0"/>
+                          <a:ea typeface="맑은 고딕" pitchFamily="34" charset="-122"/>
+                          <a:cs typeface="맑은 고딕" pitchFamily="34" charset="-120"/>
+                        </a:rPr>
+                        <a:t>도구 없음</a:t>
+                      </a:r>
+                      <a:endParaRPr lang="en-US" sz="1400" dirty="0">
+                        <a:latin typeface="맑은 고딕" charset="0"/>
+                        <a:ea typeface="맑은 고딕" charset="0"/>
+                        <a:cs typeface="맑은 고딕" charset="0"/>
+                      </a:endParaRPr>
+                    </a:p>
+                  </a:txBody>
+                  <a:tcPr marL="101600" marR="101600" marT="50800" marB="50800" anchor="ctr">
+                    <a:lnL w="6350" cap="flat" cmpd="sng" algn="ctr">
+                      <a:solidFill>
+                        <a:srgbClr val="D5DCE6"/>
+                      </a:solidFill>
+                      <a:prstDash val="solid"/>
+                      <a:round/>
+                      <a:headEnd type="none" w="med" len="med"/>
+                      <a:tailEnd type="none" w="med" len="med"/>
+                    </a:lnL>
+                    <a:lnR w="6350" cap="flat" cmpd="sng" algn="ctr">
+                      <a:solidFill>
+                        <a:srgbClr val="D5DCE6"/>
+                      </a:solidFill>
+                      <a:prstDash val="solid"/>
+                      <a:round/>
+                      <a:headEnd type="none" w="med" len="med"/>
+                      <a:tailEnd type="none" w="med" len="med"/>
+                    </a:lnR>
+                    <a:lnT w="6350" cap="flat" cmpd="sng" algn="ctr">
+                      <a:solidFill>
+                        <a:srgbClr val="D5DCE6"/>
+                      </a:solidFill>
+                      <a:prstDash val="solid"/>
+                      <a:round/>
+                      <a:headEnd type="none" w="med" len="med"/>
+                      <a:tailEnd type="none" w="med" len="med"/>
+                    </a:lnT>
+                    <a:lnB w="6350" cap="flat" cmpd="sng" algn="ctr">
+                      <a:solidFill>
+                        <a:srgbClr val="D5DCE6"/>
+                      </a:solidFill>
+                      <a:prstDash val="solid"/>
+                      <a:round/>
+                      <a:headEnd type="none" w="med" len="med"/>
+                      <a:tailEnd type="none" w="med" len="med"/>
+                    </a:lnB>
+                    <a:solidFill>
+                      <a:srgbClr val="EEF2F7"/>
+                    </a:solidFill>
+                  </a:tcPr>
+                </a:tc>
+                <a:tc>
+                  <a:txBody>
+                    <a:bodyPr/>
+                    <a:lstStyle/>
+                    <a:p>
+                      <a:pPr indent="0" marL="0">
+                        <a:buNone/>
+                      </a:pPr>
+                      <a:r>
+                        <a:rPr lang="en-US" sz="1400" dirty="0">
+                          <a:solidFill>
+                            <a:srgbClr val="1C2333"/>
+                          </a:solidFill>
+                          <a:latin typeface="맑은 고딕" pitchFamily="34" charset="0"/>
+                          <a:ea typeface="맑은 고딕" pitchFamily="34" charset="-122"/>
+                          <a:cs typeface="맑은 고딕" pitchFamily="34" charset="-120"/>
+                        </a:rPr>
+                        <a:t>주간 점검이 각 작업 보고를 못 읽음</a:t>
+                      </a:r>
+                      <a:endParaRPr lang="en-US" sz="1400" dirty="0">
+                        <a:latin typeface="맑은 고딕" charset="0"/>
+                        <a:ea typeface="맑은 고딕" charset="0"/>
+                        <a:cs typeface="맑은 고딕" charset="0"/>
+                      </a:endParaRPr>
+                    </a:p>
+                  </a:txBody>
+                  <a:tcPr marL="101600" marR="101600" marT="50800" marB="50800" anchor="ctr">
+                    <a:lnL w="6350" cap="flat" cmpd="sng" algn="ctr">
+                      <a:solidFill>
+                        <a:srgbClr val="D5DCE6"/>
+                      </a:solidFill>
+                      <a:prstDash val="solid"/>
+                      <a:round/>
+                      <a:headEnd type="none" w="med" len="med"/>
+                      <a:tailEnd type="none" w="med" len="med"/>
+                    </a:lnL>
+                    <a:lnR w="6350" cap="flat" cmpd="sng" algn="ctr">
+                      <a:solidFill>
+                        <a:srgbClr val="D5DCE6"/>
+                      </a:solidFill>
+                      <a:prstDash val="solid"/>
+                      <a:round/>
+                      <a:headEnd type="none" w="med" len="med"/>
+                      <a:tailEnd type="none" w="med" len="med"/>
+                    </a:lnR>
+                    <a:lnT w="6350" cap="flat" cmpd="sng" algn="ctr">
+                      <a:solidFill>
+                        <a:srgbClr val="D5DCE6"/>
+                      </a:solidFill>
+                      <a:prstDash val="solid"/>
+                      <a:round/>
+                      <a:headEnd type="none" w="med" len="med"/>
+                      <a:tailEnd type="none" w="med" len="med"/>
+                    </a:lnT>
+                    <a:lnB w="6350" cap="flat" cmpd="sng" algn="ctr">
+                      <a:solidFill>
+                        <a:srgbClr val="D5DCE6"/>
+                      </a:solidFill>
+                      <a:prstDash val="solid"/>
+                      <a:round/>
+                      <a:headEnd type="none" w="med" len="med"/>
+                      <a:tailEnd type="none" w="med" len="med"/>
+                    </a:lnB>
+                    <a:solidFill>
+                      <a:srgbClr val="EEF2F7"/>
+                    </a:solidFill>
+                  </a:tcPr>
+                </a:tc>
+              </a:tr>
+              <a:tr h="566928">
+                <a:tc>
+                  <a:txBody>
+                    <a:bodyPr/>
+                    <a:lstStyle/>
+                    <a:p>
+                      <a:pPr indent="0" marL="0">
+                        <a:buNone/>
+                      </a:pPr>
+                      <a:r>
+                        <a:rPr lang="en-US" sz="1400" dirty="0">
+                          <a:solidFill>
+                            <a:srgbClr val="1C2333"/>
+                          </a:solidFill>
+                          <a:latin typeface="맑은 고딕" pitchFamily="34" charset="0"/>
+                          <a:ea typeface="맑은 고딕" pitchFamily="34" charset="-122"/>
+                          <a:cs typeface="맑은 고딕" pitchFamily="34" charset="-120"/>
+                        </a:rPr>
+                        <a:t>대시보드(라이브 아티팩트) 수정</a:t>
+                      </a:r>
+                      <a:endParaRPr lang="en-US" sz="1400" dirty="0">
+                        <a:latin typeface="맑은 고딕" charset="0"/>
+                        <a:ea typeface="맑은 고딕" charset="0"/>
+                        <a:cs typeface="맑은 고딕" charset="0"/>
+                      </a:endParaRPr>
+                    </a:p>
+                  </a:txBody>
+                  <a:tcPr marL="101600" marR="101600" marT="50800" marB="50800" anchor="ctr">
+                    <a:lnL w="6350" cap="flat" cmpd="sng" algn="ctr">
+                      <a:solidFill>
+                        <a:srgbClr val="D5DCE6"/>
+                      </a:solidFill>
+                      <a:prstDash val="solid"/>
+                      <a:round/>
+                      <a:headEnd type="none" w="med" len="med"/>
+                      <a:tailEnd type="none" w="med" len="med"/>
+                    </a:lnL>
+                    <a:lnR w="6350" cap="flat" cmpd="sng" algn="ctr">
+                      <a:solidFill>
+                        <a:srgbClr val="D5DCE6"/>
+                      </a:solidFill>
+                      <a:prstDash val="solid"/>
+                      <a:round/>
+                      <a:headEnd type="none" w="med" len="med"/>
+                      <a:tailEnd type="none" w="med" len="med"/>
+                    </a:lnR>
+                    <a:lnT w="6350" cap="flat" cmpd="sng" algn="ctr">
+                      <a:solidFill>
+                        <a:srgbClr val="D5DCE6"/>
+                      </a:solidFill>
+                      <a:prstDash val="solid"/>
+                      <a:round/>
+                      <a:headEnd type="none" w="med" len="med"/>
+                      <a:tailEnd type="none" w="med" len="med"/>
+                    </a:lnT>
+                    <a:lnB w="6350" cap="flat" cmpd="sng" algn="ctr">
+                      <a:solidFill>
+                        <a:srgbClr val="D5DCE6"/>
+                      </a:solidFill>
+                      <a:prstDash val="solid"/>
+                      <a:round/>
+                      <a:headEnd type="none" w="med" len="med"/>
+                      <a:tailEnd type="none" w="med" len="med"/>
+                    </a:lnB>
+                    <a:solidFill>
+                      <a:srgbClr val="FFFFFF"/>
+                    </a:solidFill>
+                  </a:tcPr>
+                </a:tc>
+                <a:tc>
+                  <a:txBody>
+                    <a:bodyPr/>
+                    <a:lstStyle/>
+                    <a:p>
+                      <a:pPr indent="0" marL="0">
+                        <a:buNone/>
+                      </a:pPr>
+                      <a:r>
+                        <a:rPr lang="en-US" sz="1400" dirty="0">
+                          <a:solidFill>
+                            <a:srgbClr val="1C2333"/>
+                          </a:solidFill>
+                          <a:latin typeface="맑은 고딕" pitchFamily="34" charset="0"/>
+                          <a:ea typeface="맑은 고딕" pitchFamily="34" charset="-122"/>
+                          <a:cs typeface="맑은 고딕" pitchFamily="34" charset="-120"/>
+                        </a:rPr>
+                        <a:t>수정 불가</a:t>
+                      </a:r>
+                      <a:endParaRPr lang="en-US" sz="1400" dirty="0">
+                        <a:latin typeface="맑은 고딕" charset="0"/>
+                        <a:ea typeface="맑은 고딕" charset="0"/>
+                        <a:cs typeface="맑은 고딕" charset="0"/>
+                      </a:endParaRPr>
+                    </a:p>
+                  </a:txBody>
+                  <a:tcPr marL="101600" marR="101600" marT="50800" marB="50800" anchor="ctr">
+                    <a:lnL w="6350" cap="flat" cmpd="sng" algn="ctr">
+                      <a:solidFill>
+                        <a:srgbClr val="D5DCE6"/>
+                      </a:solidFill>
+                      <a:prstDash val="solid"/>
+                      <a:round/>
+                      <a:headEnd type="none" w="med" len="med"/>
+                      <a:tailEnd type="none" w="med" len="med"/>
+                    </a:lnL>
+                    <a:lnR w="6350" cap="flat" cmpd="sng" algn="ctr">
+                      <a:solidFill>
+                        <a:srgbClr val="D5DCE6"/>
+                      </a:solidFill>
+                      <a:prstDash val="solid"/>
+                      <a:round/>
+                      <a:headEnd type="none" w="med" len="med"/>
+                      <a:tailEnd type="none" w="med" len="med"/>
+                    </a:lnR>
+                    <a:lnT w="6350" cap="flat" cmpd="sng" algn="ctr">
+                      <a:solidFill>
+                        <a:srgbClr val="D5DCE6"/>
+                      </a:solidFill>
+                      <a:prstDash val="solid"/>
+                      <a:round/>
+                      <a:headEnd type="none" w="med" len="med"/>
+                      <a:tailEnd type="none" w="med" len="med"/>
+                    </a:lnT>
+                    <a:lnB w="6350" cap="flat" cmpd="sng" algn="ctr">
+                      <a:solidFill>
+                        <a:srgbClr val="D5DCE6"/>
+                      </a:solidFill>
+                      <a:prstDash val="solid"/>
+                      <a:round/>
+                      <a:headEnd type="none" w="med" len="med"/>
+                      <a:tailEnd type="none" w="med" len="med"/>
+                    </a:lnB>
+                    <a:solidFill>
+                      <a:srgbClr val="FFFFFF"/>
+                    </a:solidFill>
+                  </a:tcPr>
+                </a:tc>
+                <a:tc>
+                  <a:txBody>
+                    <a:bodyPr/>
+                    <a:lstStyle/>
+                    <a:p>
+                      <a:pPr indent="0" marL="0">
+                        <a:buNone/>
+                      </a:pPr>
+                      <a:r>
+                        <a:rPr lang="en-US" sz="1400" dirty="0">
+                          <a:solidFill>
+                            <a:srgbClr val="1C2333"/>
+                          </a:solidFill>
+                          <a:latin typeface="맑은 고딕" pitchFamily="34" charset="0"/>
+                          <a:ea typeface="맑은 고딕" pitchFamily="34" charset="-122"/>
+                          <a:cs typeface="맑은 고딕" pitchFamily="34" charset="-120"/>
+                        </a:rPr>
+                        <a:t>대시보드를 PC 로컬 HTML로 옮김</a:t>
+                      </a:r>
+                      <a:endParaRPr lang="en-US" sz="1400" dirty="0">
+                        <a:latin typeface="맑은 고딕" charset="0"/>
+                        <a:ea typeface="맑은 고딕" charset="0"/>
+                        <a:cs typeface="맑은 고딕" charset="0"/>
+                      </a:endParaRPr>
+                    </a:p>
+                  </a:txBody>
+                  <a:tcPr marL="101600" marR="101600" marT="50800" marB="50800" anchor="ctr">
+                    <a:lnL w="6350" cap="flat" cmpd="sng" algn="ctr">
+                      <a:solidFill>
+                        <a:srgbClr val="D5DCE6"/>
+                      </a:solidFill>
+                      <a:prstDash val="solid"/>
+                      <a:round/>
+                      <a:headEnd type="none" w="med" len="med"/>
+                      <a:tailEnd type="none" w="med" len="med"/>
+                    </a:lnL>
+                    <a:lnR w="6350" cap="flat" cmpd="sng" algn="ctr">
+                      <a:solidFill>
+                        <a:srgbClr val="D5DCE6"/>
+                      </a:solidFill>
+                      <a:prstDash val="solid"/>
+                      <a:round/>
+                      <a:headEnd type="none" w="med" len="med"/>
+                      <a:tailEnd type="none" w="med" len="med"/>
+                    </a:lnR>
+                    <a:lnT w="6350" cap="flat" cmpd="sng" algn="ctr">
+                      <a:solidFill>
+                        <a:srgbClr val="D5DCE6"/>
+                      </a:solidFill>
+                      <a:prstDash val="solid"/>
+                      <a:round/>
+                      <a:headEnd type="none" w="med" len="med"/>
+                      <a:tailEnd type="none" w="med" len="med"/>
+                    </a:lnT>
+                    <a:lnB w="6350" cap="flat" cmpd="sng" algn="ctr">
+                      <a:solidFill>
+                        <a:srgbClr val="D5DCE6"/>
+                      </a:solidFill>
+                      <a:prstDash val="solid"/>
+                      <a:round/>
+                      <a:headEnd type="none" w="med" len="med"/>
+                      <a:tailEnd type="none" w="med" len="med"/>
+                    </a:lnB>
+                    <a:solidFill>
+                      <a:srgbClr val="FFFFFF"/>
+                    </a:solidFill>
+                  </a:tcPr>
+                </a:tc>
+              </a:tr>
+              <a:tr h="566928">
+                <a:tc>
+                  <a:txBody>
+                    <a:bodyPr/>
+                    <a:lstStyle/>
+                    <a:p>
+                      <a:pPr indent="0" marL="0">
+                        <a:buNone/>
+                      </a:pPr>
+                      <a:r>
+                        <a:rPr lang="en-US" sz="1400" dirty="0">
+                          <a:solidFill>
+                            <a:srgbClr val="1C2333"/>
+                          </a:solidFill>
+                          <a:latin typeface="맑은 고딕" pitchFamily="34" charset="0"/>
+                          <a:ea typeface="맑은 고딕" pitchFamily="34" charset="-122"/>
+                          <a:cs typeface="맑은 고딕" pitchFamily="34" charset="-120"/>
+                        </a:rPr>
+                        <a:t>PC의 로컬 서버(localhost)</a:t>
+                      </a:r>
+                      <a:endParaRPr lang="en-US" sz="1400" dirty="0">
+                        <a:latin typeface="맑은 고딕" charset="0"/>
+                        <a:ea typeface="맑은 고딕" charset="0"/>
+                        <a:cs typeface="맑은 고딕" charset="0"/>
+                      </a:endParaRPr>
+                    </a:p>
+                  </a:txBody>
+                  <a:tcPr marL="101600" marR="101600" marT="50800" marB="50800" anchor="ctr">
+                    <a:lnL w="6350" cap="flat" cmpd="sng" algn="ctr">
+                      <a:solidFill>
+                        <a:srgbClr val="D5DCE6"/>
+                      </a:solidFill>
+                      <a:prstDash val="solid"/>
+                      <a:round/>
+                      <a:headEnd type="none" w="med" len="med"/>
+                      <a:tailEnd type="none" w="med" len="med"/>
+                    </a:lnL>
+                    <a:lnR w="6350" cap="flat" cmpd="sng" algn="ctr">
+                      <a:solidFill>
+                        <a:srgbClr val="D5DCE6"/>
+                      </a:solidFill>
+                      <a:prstDash val="solid"/>
+                      <a:round/>
+                      <a:headEnd type="none" w="med" len="med"/>
+                      <a:tailEnd type="none" w="med" len="med"/>
+                    </a:lnR>
+                    <a:lnT w="6350" cap="flat" cmpd="sng" algn="ctr">
+                      <a:solidFill>
+                        <a:srgbClr val="D5DCE6"/>
+                      </a:solidFill>
+                      <a:prstDash val="solid"/>
+                      <a:round/>
+                      <a:headEnd type="none" w="med" len="med"/>
+                      <a:tailEnd type="none" w="med" len="med"/>
+                    </a:lnT>
+                    <a:lnB w="6350" cap="flat" cmpd="sng" algn="ctr">
+                      <a:solidFill>
+                        <a:srgbClr val="D5DCE6"/>
+                      </a:solidFill>
+                      <a:prstDash val="solid"/>
+                      <a:round/>
+                      <a:headEnd type="none" w="med" len="med"/>
+                      <a:tailEnd type="none" w="med" len="med"/>
+                    </a:lnB>
+                    <a:solidFill>
+                      <a:srgbClr val="EEF2F7"/>
+                    </a:solidFill>
+                  </a:tcPr>
+                </a:tc>
+                <a:tc>
+                  <a:txBody>
+                    <a:bodyPr/>
+                    <a:lstStyle/>
+                    <a:p>
+                      <a:pPr indent="0" marL="0">
+                        <a:buNone/>
+                      </a:pPr>
+                      <a:r>
+                        <a:rPr lang="en-US" sz="1400" dirty="0">
+                          <a:solidFill>
+                            <a:srgbClr val="1C2333"/>
+                          </a:solidFill>
+                          <a:latin typeface="맑은 고딕" pitchFamily="34" charset="0"/>
+                          <a:ea typeface="맑은 고딕" pitchFamily="34" charset="-122"/>
+                          <a:cs typeface="맑은 고딕" pitchFamily="34" charset="-120"/>
+                        </a:rPr>
+                        <a:t>클라우드 셸에서 접속 안 됨</a:t>
+                      </a:r>
+                      <a:endParaRPr lang="en-US" sz="1400" dirty="0">
+                        <a:latin typeface="맑은 고딕" charset="0"/>
+                        <a:ea typeface="맑은 고딕" charset="0"/>
+                        <a:cs typeface="맑은 고딕" charset="0"/>
+                      </a:endParaRPr>
+                    </a:p>
+                  </a:txBody>
+                  <a:tcPr marL="101600" marR="101600" marT="50800" marB="50800" anchor="ctr">
+                    <a:lnL w="6350" cap="flat" cmpd="sng" algn="ctr">
+                      <a:solidFill>
+                        <a:srgbClr val="D5DCE6"/>
+                      </a:solidFill>
+                      <a:prstDash val="solid"/>
+                      <a:round/>
+                      <a:headEnd type="none" w="med" len="med"/>
+                      <a:tailEnd type="none" w="med" len="med"/>
+                    </a:lnL>
+                    <a:lnR w="6350" cap="flat" cmpd="sng" algn="ctr">
+                      <a:solidFill>
+                        <a:srgbClr val="D5DCE6"/>
+                      </a:solidFill>
+                      <a:prstDash val="solid"/>
+                      <a:round/>
+                      <a:headEnd type="none" w="med" len="med"/>
+                      <a:tailEnd type="none" w="med" len="med"/>
+                    </a:lnR>
+                    <a:lnT w="6350" cap="flat" cmpd="sng" algn="ctr">
+                      <a:solidFill>
+                        <a:srgbClr val="D5DCE6"/>
+                      </a:solidFill>
+                      <a:prstDash val="solid"/>
+                      <a:round/>
+                      <a:headEnd type="none" w="med" len="med"/>
+                      <a:tailEnd type="none" w="med" len="med"/>
+                    </a:lnT>
+                    <a:lnB w="6350" cap="flat" cmpd="sng" algn="ctr">
+                      <a:solidFill>
+                        <a:srgbClr val="D5DCE6"/>
+                      </a:solidFill>
+                      <a:prstDash val="solid"/>
+                      <a:round/>
+                      <a:headEnd type="none" w="med" len="med"/>
+                      <a:tailEnd type="none" w="med" len="med"/>
+                    </a:lnB>
+                    <a:solidFill>
+                      <a:srgbClr val="EEF2F7"/>
+                    </a:solidFill>
+                  </a:tcPr>
+                </a:tc>
+                <a:tc>
+                  <a:txBody>
+                    <a:bodyPr/>
+                    <a:lstStyle/>
+                    <a:p>
+                      <a:pPr indent="0" marL="0">
+                        <a:buNone/>
+                      </a:pPr>
+                      <a:r>
+                        <a:rPr lang="en-US" sz="1400" dirty="0">
+                          <a:solidFill>
+                            <a:srgbClr val="1C2333"/>
+                          </a:solidFill>
+                          <a:latin typeface="맑은 고딕" pitchFamily="34" charset="0"/>
+                          <a:ea typeface="맑은 고딕" pitchFamily="34" charset="-122"/>
+                          <a:cs typeface="맑은 고딕" pitchFamily="34" charset="-120"/>
+                        </a:rPr>
+                        <a:t>화면 확인 단계를 다른 도구로 우회</a:t>
+                      </a:r>
+                      <a:endParaRPr lang="en-US" sz="1400" dirty="0">
+                        <a:latin typeface="맑은 고딕" charset="0"/>
+                        <a:ea typeface="맑은 고딕" charset="0"/>
+                        <a:cs typeface="맑은 고딕" charset="0"/>
+                      </a:endParaRPr>
+                    </a:p>
+                  </a:txBody>
+                  <a:tcPr marL="101600" marR="101600" marT="50800" marB="50800" anchor="ctr">
+                    <a:lnL w="6350" cap="flat" cmpd="sng" algn="ctr">
+                      <a:solidFill>
+                        <a:srgbClr val="D5DCE6"/>
+                      </a:solidFill>
+                      <a:prstDash val="solid"/>
+                      <a:round/>
+                      <a:headEnd type="none" w="med" len="med"/>
+                      <a:tailEnd type="none" w="med" len="med"/>
+                    </a:lnL>
+                    <a:lnR w="6350" cap="flat" cmpd="sng" algn="ctr">
+                      <a:solidFill>
+                        <a:srgbClr val="D5DCE6"/>
+                      </a:solidFill>
+                      <a:prstDash val="solid"/>
+                      <a:round/>
+                      <a:headEnd type="none" w="med" len="med"/>
+                      <a:tailEnd type="none" w="med" len="med"/>
+                    </a:lnR>
+                    <a:lnT w="6350" cap="flat" cmpd="sng" algn="ctr">
+                      <a:solidFill>
+                        <a:srgbClr val="D5DCE6"/>
+                      </a:solidFill>
+                      <a:prstDash val="solid"/>
+                      <a:round/>
+                      <a:headEnd type="none" w="med" len="med"/>
+                      <a:tailEnd type="none" w="med" len="med"/>
+                    </a:lnT>
+                    <a:lnB w="6350" cap="flat" cmpd="sng" algn="ctr">
+                      <a:solidFill>
+                        <a:srgbClr val="D5DCE6"/>
+                      </a:solidFill>
+                      <a:prstDash val="solid"/>
+                      <a:round/>
+                      <a:headEnd type="none" w="med" len="med"/>
+                      <a:tailEnd type="none" w="med" len="med"/>
+                    </a:lnB>
+                    <a:solidFill>
+                      <a:srgbClr val="EEF2F7"/>
+                    </a:solidFill>
+                  </a:tcPr>
+                </a:tc>
+              </a:tr>
+              <a:tr h="566928">
+                <a:tc>
+                  <a:txBody>
+                    <a:bodyPr/>
+                    <a:lstStyle/>
+                    <a:p>
+                      <a:pPr indent="0" marL="0">
+                        <a:buNone/>
+                      </a:pPr>
+                      <a:r>
+                        <a:rPr lang="en-US" sz="1400" dirty="0">
+                          <a:solidFill>
+                            <a:srgbClr val="1C2333"/>
+                          </a:solidFill>
+                          <a:latin typeface="맑은 고딕" pitchFamily="34" charset="0"/>
+                          <a:ea typeface="맑은 고딕" pitchFamily="34" charset="-122"/>
+                          <a:cs typeface="맑은 고딕" pitchFamily="34" charset="-120"/>
+                        </a:rPr>
+                        <a:t>폴더 경로</a:t>
+                      </a:r>
+                      <a:endParaRPr lang="en-US" sz="1400" dirty="0">
+                        <a:latin typeface="맑은 고딕" charset="0"/>
+                        <a:ea typeface="맑은 고딕" charset="0"/>
+                        <a:cs typeface="맑은 고딕" charset="0"/>
+                      </a:endParaRPr>
+                    </a:p>
+                  </a:txBody>
+                  <a:tcPr marL="101600" marR="101600" marT="50800" marB="50800" anchor="ctr">
+                    <a:lnL w="6350" cap="flat" cmpd="sng" algn="ctr">
+                      <a:solidFill>
+                        <a:srgbClr val="D5DCE6"/>
+                      </a:solidFill>
+                      <a:prstDash val="solid"/>
+                      <a:round/>
+                      <a:headEnd type="none" w="med" len="med"/>
+                      <a:tailEnd type="none" w="med" len="med"/>
+                    </a:lnL>
+                    <a:lnR w="6350" cap="flat" cmpd="sng" algn="ctr">
+                      <a:solidFill>
+                        <a:srgbClr val="D5DCE6"/>
+                      </a:solidFill>
+                      <a:prstDash val="solid"/>
+                      <a:round/>
+                      <a:headEnd type="none" w="med" len="med"/>
+                      <a:tailEnd type="none" w="med" len="med"/>
+                    </a:lnR>
+                    <a:lnT w="6350" cap="flat" cmpd="sng" algn="ctr">
+                      <a:solidFill>
+                        <a:srgbClr val="D5DCE6"/>
+                      </a:solidFill>
+                      <a:prstDash val="solid"/>
+                      <a:round/>
+                      <a:headEnd type="none" w="med" len="med"/>
+                      <a:tailEnd type="none" w="med" len="med"/>
+                    </a:lnT>
+                    <a:lnB w="6350" cap="flat" cmpd="sng" algn="ctr">
+                      <a:solidFill>
+                        <a:srgbClr val="D5DCE6"/>
+                      </a:solidFill>
+                      <a:prstDash val="solid"/>
+                      <a:round/>
+                      <a:headEnd type="none" w="med" len="med"/>
+                      <a:tailEnd type="none" w="med" len="med"/>
+                    </a:lnB>
+                    <a:solidFill>
+                      <a:srgbClr val="FFFFFF"/>
+                    </a:solidFill>
+                  </a:tcPr>
+                </a:tc>
+                <a:tc>
+                  <a:txBody>
+                    <a:bodyPr/>
+                    <a:lstStyle/>
+                    <a:p>
+                      <a:pPr indent="0" marL="0">
+                        <a:buNone/>
+                      </a:pPr>
+                      <a:r>
+                        <a:rPr lang="en-US" sz="1400" dirty="0">
+                          <a:solidFill>
+                            <a:srgbClr val="1C2333"/>
+                          </a:solidFill>
+                          <a:latin typeface="맑은 고딕" pitchFamily="34" charset="0"/>
+                          <a:ea typeface="맑은 고딕" pitchFamily="34" charset="-122"/>
+                          <a:cs typeface="맑은 고딕" pitchFamily="34" charset="-120"/>
+                        </a:rPr>
+                        <a:t>/sessions/… → $HOME/mnt/…</a:t>
+                      </a:r>
+                      <a:endParaRPr lang="en-US" sz="1400" dirty="0">
+                        <a:latin typeface="맑은 고딕" charset="0"/>
+                        <a:ea typeface="맑은 고딕" charset="0"/>
+                        <a:cs typeface="맑은 고딕" charset="0"/>
+                      </a:endParaRPr>
+                    </a:p>
+                  </a:txBody>
+                  <a:tcPr marL="101600" marR="101600" marT="50800" marB="50800" anchor="ctr">
+                    <a:lnL w="6350" cap="flat" cmpd="sng" algn="ctr">
+                      <a:solidFill>
+                        <a:srgbClr val="D5DCE6"/>
+                      </a:solidFill>
+                      <a:prstDash val="solid"/>
+                      <a:round/>
+                      <a:headEnd type="none" w="med" len="med"/>
+                      <a:tailEnd type="none" w="med" len="med"/>
+                    </a:lnL>
+                    <a:lnR w="6350" cap="flat" cmpd="sng" algn="ctr">
+                      <a:solidFill>
+                        <a:srgbClr val="D5DCE6"/>
+                      </a:solidFill>
+                      <a:prstDash val="solid"/>
+                      <a:round/>
+                      <a:headEnd type="none" w="med" len="med"/>
+                      <a:tailEnd type="none" w="med" len="med"/>
+                    </a:lnR>
+                    <a:lnT w="6350" cap="flat" cmpd="sng" algn="ctr">
+                      <a:solidFill>
+                        <a:srgbClr val="D5DCE6"/>
+                      </a:solidFill>
+                      <a:prstDash val="solid"/>
+                      <a:round/>
+                      <a:headEnd type="none" w="med" len="med"/>
+                      <a:tailEnd type="none" w="med" len="med"/>
+                    </a:lnT>
+                    <a:lnB w="6350" cap="flat" cmpd="sng" algn="ctr">
+                      <a:solidFill>
+                        <a:srgbClr val="D5DCE6"/>
+                      </a:solidFill>
+                      <a:prstDash val="solid"/>
+                      <a:round/>
+                      <a:headEnd type="none" w="med" len="med"/>
+                      <a:tailEnd type="none" w="med" len="med"/>
+                    </a:lnB>
+                    <a:solidFill>
+                      <a:srgbClr val="FFFFFF"/>
+                    </a:solidFill>
+                  </a:tcPr>
+                </a:tc>
+                <a:tc>
+                  <a:txBody>
+                    <a:bodyPr/>
+                    <a:lstStyle/>
+                    <a:p>
+                      <a:pPr indent="0" marL="0">
+                        <a:buNone/>
+                      </a:pPr>
+                      <a:r>
+                        <a:rPr lang="en-US" sz="1400" dirty="0">
+                          <a:solidFill>
+                            <a:srgbClr val="1C2333"/>
+                          </a:solidFill>
+                          <a:latin typeface="맑은 고딕" pitchFamily="34" charset="0"/>
+                          <a:ea typeface="맑은 고딕" pitchFamily="34" charset="-122"/>
+                          <a:cs typeface="맑은 고딕" pitchFamily="34" charset="-120"/>
+                        </a:rPr>
+                        <a:t>옛 경로를 쓴 단계가 「파일 없음」</a:t>
+                      </a:r>
+                      <a:endParaRPr lang="en-US" sz="1400" dirty="0">
+                        <a:latin typeface="맑은 고딕" charset="0"/>
+                        <a:ea typeface="맑은 고딕" charset="0"/>
+                        <a:cs typeface="맑은 고딕" charset="0"/>
+                      </a:endParaRPr>
+                    </a:p>
+                  </a:txBody>
+                  <a:tcPr marL="101600" marR="101600" marT="50800" marB="50800" anchor="ctr">
+                    <a:lnL w="6350" cap="flat" cmpd="sng" algn="ctr">
+                      <a:solidFill>
+                        <a:srgbClr val="D5DCE6"/>
+                      </a:solidFill>
+                      <a:prstDash val="solid"/>
+                      <a:round/>
+                      <a:headEnd type="none" w="med" len="med"/>
+                      <a:tailEnd type="none" w="med" len="med"/>
+                    </a:lnL>
+                    <a:lnR w="6350" cap="flat" cmpd="sng" algn="ctr">
+                      <a:solidFill>
+                        <a:srgbClr val="D5DCE6"/>
+                      </a:solidFill>
+                      <a:prstDash val="solid"/>
+                      <a:round/>
+                      <a:headEnd type="none" w="med" len="med"/>
+                      <a:tailEnd type="none" w="med" len="med"/>
+                    </a:lnR>
+                    <a:lnT w="6350" cap="flat" cmpd="sng" algn="ctr">
+                      <a:solidFill>
+                        <a:srgbClr val="D5DCE6"/>
+                      </a:solidFill>
+                      <a:prstDash val="solid"/>
+                      <a:round/>
+                      <a:headEnd type="none" w="med" len="med"/>
+                      <a:tailEnd type="none" w="med" len="med"/>
+                    </a:lnT>
+                    <a:lnB w="6350" cap="flat" cmpd="sng" algn="ctr">
+                      <a:solidFill>
+                        <a:srgbClr val="D5DCE6"/>
+                      </a:solidFill>
+                      <a:prstDash val="solid"/>
+                      <a:round/>
+                      <a:headEnd type="none" w="med" len="med"/>
+                      <a:tailEnd type="none" w="med" len="med"/>
+                    </a:lnB>
+                    <a:solidFill>
+                      <a:srgbClr val="FFFFFF"/>
+                    </a:solidFill>
+                  </a:tcPr>
+                </a:tc>
+              </a:tr>
+              <a:tr h="566928">
+                <a:tc>
+                  <a:txBody>
+                    <a:bodyPr/>
+                    <a:lstStyle/>
+                    <a:p>
+                      <a:pPr indent="0" marL="0">
+                        <a:buNone/>
+                      </a:pPr>
+                      <a:r>
+                        <a:rPr lang="en-US" sz="1400" dirty="0">
+                          <a:solidFill>
+                            <a:srgbClr val="1C2333"/>
+                          </a:solidFill>
+                          <a:latin typeface="맑은 고딕" pitchFamily="34" charset="0"/>
+                          <a:ea typeface="맑은 고딕" pitchFamily="34" charset="-122"/>
+                          <a:cs typeface="맑은 고딕" pitchFamily="34" charset="-120"/>
+                        </a:rPr>
+                        <a:t>같은 이름 파일 재전송</a:t>
+                      </a:r>
+                      <a:endParaRPr lang="en-US" sz="1400" dirty="0">
+                        <a:latin typeface="맑은 고딕" charset="0"/>
+                        <a:ea typeface="맑은 고딕" charset="0"/>
+                        <a:cs typeface="맑은 고딕" charset="0"/>
+                      </a:endParaRPr>
+                    </a:p>
+                  </a:txBody>
+                  <a:tcPr marL="101600" marR="101600" marT="50800" marB="50800" anchor="ctr">
+                    <a:lnL w="6350" cap="flat" cmpd="sng" algn="ctr">
+                      <a:solidFill>
+                        <a:srgbClr val="D5DCE6"/>
+                      </a:solidFill>
+                      <a:prstDash val="solid"/>
+                      <a:round/>
+                      <a:headEnd type="none" w="med" len="med"/>
+                      <a:tailEnd type="none" w="med" len="med"/>
+                    </a:lnL>
+                    <a:lnR w="6350" cap="flat" cmpd="sng" algn="ctr">
+                      <a:solidFill>
+                        <a:srgbClr val="D5DCE6"/>
+                      </a:solidFill>
+                      <a:prstDash val="solid"/>
+                      <a:round/>
+                      <a:headEnd type="none" w="med" len="med"/>
+                      <a:tailEnd type="none" w="med" len="med"/>
+                    </a:lnR>
+                    <a:lnT w="6350" cap="flat" cmpd="sng" algn="ctr">
+                      <a:solidFill>
+                        <a:srgbClr val="D5DCE6"/>
+                      </a:solidFill>
+                      <a:prstDash val="solid"/>
+                      <a:round/>
+                      <a:headEnd type="none" w="med" len="med"/>
+                      <a:tailEnd type="none" w="med" len="med"/>
+                    </a:lnT>
+                    <a:lnB w="6350" cap="flat" cmpd="sng" algn="ctr">
+                      <a:solidFill>
+                        <a:srgbClr val="D5DCE6"/>
+                      </a:solidFill>
+                      <a:prstDash val="solid"/>
+                      <a:round/>
+                      <a:headEnd type="none" w="med" len="med"/>
+                      <a:tailEnd type="none" w="med" len="med"/>
+                    </a:lnB>
+                    <a:solidFill>
+                      <a:srgbClr val="EEF2F7"/>
+                    </a:solidFill>
+                  </a:tcPr>
+                </a:tc>
+                <a:tc>
+                  <a:txBody>
+                    <a:bodyPr/>
+                    <a:lstStyle/>
+                    <a:p>
+                      <a:pPr indent="0" marL="0">
+                        <a:buNone/>
+                      </a:pPr>
+                      <a:r>
+                        <a:rPr lang="en-US" sz="1400" dirty="0">
+                          <a:solidFill>
+                            <a:srgbClr val="1C2333"/>
+                          </a:solidFill>
+                          <a:latin typeface="맑은 고딕" pitchFamily="34" charset="0"/>
+                          <a:ea typeface="맑은 고딕" pitchFamily="34" charset="-122"/>
+                          <a:cs typeface="맑은 고딕" pitchFamily="34" charset="-120"/>
+                        </a:rPr>
+                        <a:t>옛 내용이 그대로 써짐</a:t>
+                      </a:r>
+                      <a:endParaRPr lang="en-US" sz="1400" dirty="0">
+                        <a:latin typeface="맑은 고딕" charset="0"/>
+                        <a:ea typeface="맑은 고딕" charset="0"/>
+                        <a:cs typeface="맑은 고딕" charset="0"/>
+                      </a:endParaRPr>
+                    </a:p>
+                  </a:txBody>
+                  <a:tcPr marL="101600" marR="101600" marT="50800" marB="50800" anchor="ctr">
+                    <a:lnL w="6350" cap="flat" cmpd="sng" algn="ctr">
+                      <a:solidFill>
+                        <a:srgbClr val="D5DCE6"/>
+                      </a:solidFill>
+                      <a:prstDash val="solid"/>
+                      <a:round/>
+                      <a:headEnd type="none" w="med" len="med"/>
+                      <a:tailEnd type="none" w="med" len="med"/>
+                    </a:lnL>
+                    <a:lnR w="6350" cap="flat" cmpd="sng" algn="ctr">
+                      <a:solidFill>
+                        <a:srgbClr val="D5DCE6"/>
+                      </a:solidFill>
+                      <a:prstDash val="solid"/>
+                      <a:round/>
+                      <a:headEnd type="none" w="med" len="med"/>
+                      <a:tailEnd type="none" w="med" len="med"/>
+                    </a:lnR>
+                    <a:lnT w="6350" cap="flat" cmpd="sng" algn="ctr">
+                      <a:solidFill>
+                        <a:srgbClr val="D5DCE6"/>
+                      </a:solidFill>
+                      <a:prstDash val="solid"/>
+                      <a:round/>
+                      <a:headEnd type="none" w="med" len="med"/>
+                      <a:tailEnd type="none" w="med" len="med"/>
+                    </a:lnT>
+                    <a:lnB w="6350" cap="flat" cmpd="sng" algn="ctr">
+                      <a:solidFill>
+                        <a:srgbClr val="D5DCE6"/>
+                      </a:solidFill>
+                      <a:prstDash val="solid"/>
+                      <a:round/>
+                      <a:headEnd type="none" w="med" len="med"/>
+                      <a:tailEnd type="none" w="med" len="med"/>
+                    </a:lnB>
+                    <a:solidFill>
+                      <a:srgbClr val="EEF2F7"/>
+                    </a:solidFill>
+                  </a:tcPr>
+                </a:tc>
+                <a:tc>
+                  <a:txBody>
+                    <a:bodyPr/>
+                    <a:lstStyle/>
+                    <a:p>
+                      <a:pPr indent="0" marL="0">
+                        <a:buNone/>
+                      </a:pPr>
+                      <a:r>
+                        <a:rPr lang="en-US" sz="1400" dirty="0">
+                          <a:solidFill>
+                            <a:srgbClr val="1C2333"/>
+                          </a:solidFill>
+                          <a:latin typeface="맑은 고딕" pitchFamily="34" charset="0"/>
+                          <a:ea typeface="맑은 고딕" pitchFamily="34" charset="-122"/>
+                          <a:cs typeface="맑은 고딕" pitchFamily="34" charset="-120"/>
+                        </a:rPr>
+                        <a:t>보낼 때마다 시각을 붙인 새 이름 + 대조</a:t>
+                      </a:r>
+                      <a:endParaRPr lang="en-US" sz="1400" dirty="0">
+                        <a:latin typeface="맑은 고딕" charset="0"/>
+                        <a:ea typeface="맑은 고딕" charset="0"/>
+                        <a:cs typeface="맑은 고딕" charset="0"/>
+                      </a:endParaRPr>
+                    </a:p>
+                  </a:txBody>
+                  <a:tcPr marL="101600" marR="101600" marT="50800" marB="50800" anchor="ctr">
+                    <a:lnL w="6350" cap="flat" cmpd="sng" algn="ctr">
+                      <a:solidFill>
+                        <a:srgbClr val="D5DCE6"/>
+                      </a:solidFill>
+                      <a:prstDash val="solid"/>
+                      <a:round/>
+                      <a:headEnd type="none" w="med" len="med"/>
+                      <a:tailEnd type="none" w="med" len="med"/>
+                    </a:lnL>
+                    <a:lnR w="6350" cap="flat" cmpd="sng" algn="ctr">
+                      <a:solidFill>
+                        <a:srgbClr val="D5DCE6"/>
+                      </a:solidFill>
+                      <a:prstDash val="solid"/>
+                      <a:round/>
+                      <a:headEnd type="none" w="med" len="med"/>
+                      <a:tailEnd type="none" w="med" len="med"/>
+                    </a:lnR>
+                    <a:lnT w="6350" cap="flat" cmpd="sng" algn="ctr">
+                      <a:solidFill>
+                        <a:srgbClr val="D5DCE6"/>
+                      </a:solidFill>
+                      <a:prstDash val="solid"/>
+                      <a:round/>
+                      <a:headEnd type="none" w="med" len="med"/>
+                      <a:tailEnd type="none" w="med" len="med"/>
+                    </a:lnT>
+                    <a:lnB w="6350" cap="flat" cmpd="sng" algn="ctr">
+                      <a:solidFill>
+                        <a:srgbClr val="D5DCE6"/>
+                      </a:solidFill>
+                      <a:prstDash val="solid"/>
+                      <a:round/>
+                      <a:headEnd type="none" w="med" len="med"/>
+                      <a:tailEnd type="none" w="med" len="med"/>
+                    </a:lnB>
+                    <a:solidFill>
+                      <a:srgbClr val="EEF2F7"/>
+                    </a:solidFill>
+                  </a:tcPr>
+                </a:tc>
+              </a:tr>
+            </a:tbl>
+          </a:graphicData>
+        </a:graphic>
+      </p:graphicFrame>
+      <p:sp>
+        <p:nvSpPr>
+          <p:cNvPr id="6" name="Text 3"/>
+          <p:cNvSpPr txBox="1"/>
+          <p:nvPr/>
+        </p:nvSpPr>
+        <p:spPr>
+          <a:xfrm>
+            <a:off x="548640" y="6263640"/>
+            <a:ext cx="10424160" cy="320040"/>
+          </a:xfrm>
+          <a:prstGeom prst="rect">
+            <a:avLst/>
+          </a:prstGeom>
+          <a:noFill/>
+          <a:ln/>
+        </p:spPr>
+        <p:txBody>
+          <a:bodyPr wrap="square" lIns="0" tIns="0" rIns="0" bIns="0" rtlCol="0" anchor="t"/>
+          <a:lstStyle/>
+          <a:p>
+            <a:pPr indent="0" marL="0">
+              <a:buNone/>
+            </a:pPr>
+            <a:r>
+              <a:rPr lang="en-US" sz="1100" dirty="0">
+                <a:solidFill>
+                  <a:srgbClr val="6B7A90"/>
+                </a:solidFill>
+                <a:latin typeface="맑은 고딕" pitchFamily="34" charset="0"/>
+                <a:ea typeface="맑은 고딕" pitchFamily="34" charset="-122"/>
+                <a:cs typeface="맑은 고딕" pitchFamily="34" charset="-120"/>
+              </a:rPr>
+              <a:t>설명문이 「이 도구를 써라」라고 적혀 있으면, 그 도구가 없는 곳에서는 그 단계가 조용히 빠지거나 멈춘다</a:t>
+            </a:r>
+            <a:endParaRPr lang="en-US" sz="1100" dirty="0"/>
+          </a:p>
+        </p:txBody>
+      </p:sp>
+      <p:sp>
+        <p:nvSpPr>
+          <p:cNvPr id="25" name="Slide Number Placeholder 0"/>
+          <p:cNvSpPr>
+            <a:spLocks noGrp="1"/>
+          </p:cNvSpPr>
+          <p:nvPr>
+            <p:ph type="sldNum" sz="quarter" idx="4294967295"/>
+          </p:nvPr>
+        </p:nvSpPr>
+        <p:spPr>
+          <a:xfrm>
+            <a:off x="11247120" y="6400800"/>
+            <a:ext cx="548640" cy="274320"/>
+          </a:xfrm>
+          <a:prstGeom prst="rect">
+            <a:avLst/>
+          </a:prstGeom>
+          <a:extLst>
+            <a:ext uri="{C572A759-6A51-4108-AA02-DFA0A04FC94B}">
+              <ma14:wrappingTextBoxFlag xmlns:ma14="http://schemas.microsoft.com/office/mac/drawingml/2011/main" val="0"/>
+            </a:ext>
+          </a:extLst>
+        </p:spPr>
+        <p:txBody>
+          <a:bodyPr/>
+          <a:lstStyle>
+            <a:lvl1pPr>
+              <a:defRPr sz="1000">
+                <a:solidFill>
+                  <a:srgbClr val="6B7A90"/>
+                </a:solidFill>
+                <a:latin typeface="맑은 고딕"/>
+                <a:ea typeface="맑은 고딕"/>
+                <a:cs typeface="맑은 고딕"/>
+              </a:defRPr>
+            </a:lvl1pPr>
+          </a:lstStyle>
+          <a:p>
+            <a:pPr algn="l"/>
+            <a:fld id="{F7021451-1387-4CA6-816F-3879F97B5CBC}" type="slidenum">
+              <a:rPr b="0" lang="en-US"/>
+              <a:t>11</a:t>
+            </a:fld>
+            <a:endParaRPr lang="en-US"/>
+          </a:p>
+        </p:txBody>
+      </p:sp>
+    </p:spTree>
+  </p:cSld>
+  <p:clrMapOvr>
+    <a:masterClrMapping/>
+  </p:clrMapOvr>
+</p:sld>
+</file>
+
+<file path=ppt/slides/slide12.xml><?xml version="1.0" encoding="utf-8"?>
+<p:sld xmlns:a="http://schemas.openxmlformats.org/drawingml/2006/main" xmlns:r="http://schemas.openxmlformats.org/officeDocument/2006/relationships" xmlns:p="http://schemas.openxmlformats.org/presentationml/2006/main">
   <p:cSld name="Slide 10">
     <p:spTree>
       <p:nvGrpSpPr>
@@ -4005,7 +6543,7 @@
             <a:pPr algn="l"/>
             <a:fld id="{F7021451-1387-4CA6-816F-3879F97B5CBC}" type="slidenum">
               <a:rPr b="0" lang="en-US"/>
-              <a:t>10</a:t>
+              <a:t>12</a:t>
             </a:fld>
             <a:endParaRPr lang="en-US"/>
           </a:p>
@@ -4019,7 +6557,7 @@
 </p:sld>
 </file>
 
-<file path=ppt/slides/slide11.xml><?xml version="1.0" encoding="utf-8"?>
+<file path=ppt/slides/slide13.xml><?xml version="1.0" encoding="utf-8"?>
 <p:sld xmlns:a="http://schemas.openxmlformats.org/drawingml/2006/main" xmlns:r="http://schemas.openxmlformats.org/officeDocument/2006/relationships" xmlns:p="http://schemas.openxmlformats.org/presentationml/2006/main">
   <p:cSld name="Slide 11">
     <p:spTree>
@@ -4702,7 +7240,7 @@
             <a:pPr algn="l"/>
             <a:fld id="{F7021451-1387-4CA6-816F-3879F97B5CBC}" type="slidenum">
               <a:rPr b="0" lang="en-US"/>
-              <a:t>11</a:t>
+              <a:t>13</a:t>
             </a:fld>
             <a:endParaRPr lang="en-US"/>
           </a:p>
@@ -4716,7 +7254,7 @@
 </p:sld>
 </file>
 
-<file path=ppt/slides/slide12.xml><?xml version="1.0" encoding="utf-8"?>
+<file path=ppt/slides/slide14.xml><?xml version="1.0" encoding="utf-8"?>
 <p:sld xmlns:a="http://schemas.openxmlformats.org/drawingml/2006/main" xmlns:r="http://schemas.openxmlformats.org/officeDocument/2006/relationships" xmlns:p="http://schemas.openxmlformats.org/presentationml/2006/main">
   <p:cSld name="Slide 12">
     <p:spTree>
@@ -4823,7 +7361,7 @@
 </p:sld>
 </file>
 
-<file path=ppt/slides/slide13.xml><?xml version="1.0" encoding="utf-8"?>
+<file path=ppt/slides/slide15.xml><?xml version="1.0" encoding="utf-8"?>
 <p:sld xmlns:a="http://schemas.openxmlformats.org/drawingml/2006/main" xmlns:r="http://schemas.openxmlformats.org/officeDocument/2006/relationships" xmlns:p="http://schemas.openxmlformats.org/presentationml/2006/main">
   <p:cSld name="Slide 13">
     <p:spTree>
@@ -5593,7 +8131,7 @@
             <a:pPr algn="l"/>
             <a:fld id="{F7021451-1387-4CA6-816F-3879F97B5CBC}" type="slidenum">
               <a:rPr b="0" lang="en-US"/>
-              <a:t>13</a:t>
+              <a:t>15</a:t>
             </a:fld>
             <a:endParaRPr lang="en-US"/>
           </a:p>
@@ -5607,7 +8145,7 @@
 </p:sld>
 </file>
 
-<file path=ppt/slides/slide14.xml><?xml version="1.0" encoding="utf-8"?>
+<file path=ppt/slides/slide16.xml><?xml version="1.0" encoding="utf-8"?>
 <p:sld xmlns:a="http://schemas.openxmlformats.org/drawingml/2006/main" xmlns:r="http://schemas.openxmlformats.org/officeDocument/2006/relationships" xmlns:p="http://schemas.openxmlformats.org/presentationml/2006/main">
   <p:cSld name="Slide 14">
     <p:spTree>
@@ -7414,7 +9952,7 @@
             <a:pPr algn="l"/>
             <a:fld id="{F7021451-1387-4CA6-816F-3879F97B5CBC}" type="slidenum">
               <a:rPr b="0" lang="en-US"/>
-              <a:t>14</a:t>
+              <a:t>16</a:t>
             </a:fld>
             <a:endParaRPr lang="en-US"/>
           </a:p>
@@ -7428,7 +9966,7 @@
 </p:sld>
 </file>
 
-<file path=ppt/slides/slide15.xml><?xml version="1.0" encoding="utf-8"?>
+<file path=ppt/slides/slide17.xml><?xml version="1.0" encoding="utf-8"?>
 <p:sld xmlns:a="http://schemas.openxmlformats.org/drawingml/2006/main" xmlns:r="http://schemas.openxmlformats.org/officeDocument/2006/relationships" xmlns:p="http://schemas.openxmlformats.org/presentationml/2006/main">
   <p:cSld name="Slide 15">
     <p:spTree>
@@ -7932,7 +10470,7 @@
             <a:pPr algn="l"/>
             <a:fld id="{F7021451-1387-4CA6-816F-3879F97B5CBC}" type="slidenum">
               <a:rPr b="0" lang="en-US"/>
-              <a:t>15</a:t>
+              <a:t>17</a:t>
             </a:fld>
             <a:endParaRPr lang="en-US"/>
           </a:p>
@@ -7946,7 +10484,7 @@
 </p:sld>
 </file>
 
-<file path=ppt/slides/slide16.xml><?xml version="1.0" encoding="utf-8"?>
+<file path=ppt/slides/slide18.xml><?xml version="1.0" encoding="utf-8"?>
 <p:sld xmlns:a="http://schemas.openxmlformats.org/drawingml/2006/main" xmlns:r="http://schemas.openxmlformats.org/officeDocument/2006/relationships" xmlns:p="http://schemas.openxmlformats.org/presentationml/2006/main">
   <p:cSld name="Slide 16">
     <p:spTree>
@@ -8053,7 +10591,7 @@
 </p:sld>
 </file>
 
-<file path=ppt/slides/slide17.xml><?xml version="1.0" encoding="utf-8"?>
+<file path=ppt/slides/slide19.xml><?xml version="1.0" encoding="utf-8"?>
 <p:sld xmlns:a="http://schemas.openxmlformats.org/drawingml/2006/main" xmlns:r="http://schemas.openxmlformats.org/officeDocument/2006/relationships" xmlns:p="http://schemas.openxmlformats.org/presentationml/2006/main">
   <p:cSld name="Slide 17">
     <p:spTree>
@@ -9336,7 +11874,7 @@
             <a:pPr algn="l"/>
             <a:fld id="{F7021451-1387-4CA6-816F-3879F97B5CBC}" type="slidenum">
               <a:rPr b="0" lang="en-US"/>
-              <a:t>17</a:t>
+              <a:t>19</a:t>
             </a:fld>
             <a:endParaRPr lang="en-US"/>
           </a:p>
@@ -9350,7 +11888,758 @@
 </p:sld>
 </file>
 
-<file path=ppt/slides/slide18.xml><?xml version="1.0" encoding="utf-8"?>
+<file path=ppt/slides/slide2.xml><?xml version="1.0" encoding="utf-8"?>
+<p:sld xmlns:a="http://schemas.openxmlformats.org/drawingml/2006/main" xmlns:p="http://schemas.openxmlformats.org/presentationml/2006/main" xmlns:r="http://schemas.openxmlformats.org/officeDocument/2006/relationships">
+  <p:cSld>
+    <p:spTree>
+      <p:nvGrpSpPr>
+        <p:cNvPr id="1" name=""/>
+        <p:cNvGrpSpPr/>
+        <p:nvPr/>
+      </p:nvGrpSpPr>
+      <p:grpSpPr/>
+      <p:sp>
+        <p:nvSpPr>
+          <p:cNvPr id="2" name="Title 1"/>
+          <p:cNvSpPr>
+            <a:spLocks noGrp="1"/>
+          </p:cNvSpPr>
+          <p:nvPr>
+            <p:ph type="title" idx="100"/>
+          </p:nvPr>
+        </p:nvSpPr>
+        <p:spPr/>
+        <p:txBody>
+          <a:bodyPr/>
+          <a:lstStyle/>
+          <a:p>
+            <a:r>
+              <a:t>수업 전에 만들어 둘 폴더 — C:\AI 하나에서 시작합니다</a:t>
+            </a:r>
+          </a:p>
+        </p:txBody>
+      </p:sp>
+      <p:sp>
+        <p:nvSpPr>
+          <p:cNvPr id="3" name="Rounded Rectangle 2"/>
+          <p:cNvSpPr/>
+          <p:nvPr/>
+        </p:nvSpPr>
+        <p:spPr>
+          <a:xfrm>
+            <a:off x="822960" y="1600000"/>
+            <a:ext cx="10546080" cy="720000"/>
+          </a:xfrm>
+          <a:prstGeom prst="roundRect">
+            <a:avLst>
+              <a:gd name="adj" fmla="val 12000"/>
+            </a:avLst>
+          </a:prstGeom>
+          <a:solidFill>
+            <a:schemeClr val="bg2"/>
+          </a:solidFill>
+          <a:ln>
+            <a:noFill/>
+          </a:ln>
+          <a:effectLst/>
+        </p:spPr>
+        <p:style>
+          <a:lnRef idx="1">
+            <a:schemeClr val="accent1"/>
+          </a:lnRef>
+          <a:fillRef idx="3">
+            <a:schemeClr val="accent1"/>
+          </a:fillRef>
+          <a:effectRef idx="2">
+            <a:schemeClr val="accent1"/>
+          </a:effectRef>
+          <a:fontRef idx="minor">
+            <a:schemeClr val="lt1"/>
+          </a:fontRef>
+        </p:style>
+        <p:txBody>
+          <a:bodyPr rtlCol="0" anchor="ctr"/>
+          <a:lstStyle/>
+          <a:p>
+            <a:pPr algn="ctr"/>
+            <a:endParaRPr/>
+          </a:p>
+        </p:txBody>
+      </p:sp>
+      <p:sp>
+        <p:nvSpPr>
+          <p:cNvPr id="4" name="Rounded Rectangle 3"/>
+          <p:cNvSpPr/>
+          <p:nvPr/>
+        </p:nvSpPr>
+        <p:spPr>
+          <a:xfrm>
+            <a:off x="1002960" y="1750000"/>
+            <a:ext cx="2600000" cy="420000"/>
+          </a:xfrm>
+          <a:prstGeom prst="roundRect">
+            <a:avLst>
+              <a:gd name="adj" fmla="val 12000"/>
+            </a:avLst>
+          </a:prstGeom>
+          <a:solidFill>
+            <a:schemeClr val="accent1"/>
+          </a:solidFill>
+          <a:ln>
+            <a:noFill/>
+          </a:ln>
+          <a:effectLst/>
+        </p:spPr>
+        <p:style>
+          <a:lnRef idx="1">
+            <a:schemeClr val="accent1"/>
+          </a:lnRef>
+          <a:fillRef idx="3">
+            <a:schemeClr val="accent1"/>
+          </a:fillRef>
+          <a:effectRef idx="2">
+            <a:schemeClr val="accent1"/>
+          </a:effectRef>
+          <a:fontRef idx="minor">
+            <a:schemeClr val="lt1"/>
+          </a:fontRef>
+        </p:style>
+        <p:txBody>
+          <a:bodyPr lIns="0" rIns="0" rtlCol="0" anchor="ctr"/>
+          <a:lstStyle/>
+          <a:p>
+            <a:pPr algn="ctr"/>
+            <a:r>
+              <a:rPr sz="1800" b="1">
+                <a:solidFill>
+                  <a:schemeClr val="bg1"/>
+                </a:solidFill>
+                <a:latin typeface="Consolas"/>
+              </a:rPr>
+              <a:t>C:\AI</a:t>
+            </a:r>
+          </a:p>
+        </p:txBody>
+      </p:sp>
+      <p:sp>
+        <p:nvSpPr>
+          <p:cNvPr id="5" name="TextBox 4"/>
+          <p:cNvSpPr txBox="1"/>
+          <p:nvPr/>
+        </p:nvSpPr>
+        <p:spPr>
+          <a:xfrm>
+            <a:off x="3822960" y="1680000"/>
+            <a:ext cx="4600000" cy="560000"/>
+          </a:xfrm>
+          <a:prstGeom prst="rect">
+            <a:avLst/>
+          </a:prstGeom>
+          <a:noFill/>
+        </p:spPr>
+        <p:txBody>
+          <a:bodyPr wrap="square" lIns="0" tIns="0" rIns="0" bIns="0" anchor="ctr">
+            <a:spAutoFit/>
+          </a:bodyPr>
+          <a:lstStyle/>
+          <a:p>
+            <a:pPr algn="l"/>
+            <a:r>
+              <a:rPr sz="1700" b="1">
+                <a:solidFill>
+                  <a:schemeClr val="tx1"/>
+                </a:solidFill>
+                <a:latin typeface="맑은 고딕"/>
+              </a:rPr>
+              <a:t>모두 · 수업 전에 꼭</a:t>
+            </a:r>
+          </a:p>
+          <a:p>
+            <a:pPr algn="l"/>
+            <a:r>
+              <a:rPr sz="1400" b="0">
+                <a:solidFill>
+                  <a:schemeClr val="tx2"/>
+                </a:solidFill>
+                <a:latin typeface="맑은 고딕"/>
+              </a:rPr>
+              <a:t>앞으로 쓰는 것을 전부 여기 모읍니다</a:t>
+            </a:r>
+          </a:p>
+        </p:txBody>
+      </p:sp>
+      <p:sp>
+        <p:nvSpPr>
+          <p:cNvPr id="6" name="TextBox 5"/>
+          <p:cNvSpPr txBox="1"/>
+          <p:nvPr/>
+        </p:nvSpPr>
+        <p:spPr>
+          <a:xfrm>
+            <a:off x="9769040" y="1600000"/>
+            <a:ext cx="1420000" cy="720000"/>
+          </a:xfrm>
+          <a:prstGeom prst="rect">
+            <a:avLst/>
+          </a:prstGeom>
+          <a:noFill/>
+        </p:spPr>
+        <p:txBody>
+          <a:bodyPr wrap="square" lIns="0" tIns="0" rIns="0" bIns="0" anchor="ctr">
+            <a:spAutoFit/>
+          </a:bodyPr>
+          <a:lstStyle/>
+          <a:p>
+            <a:pPr algn="r"/>
+            <a:r>
+              <a:rPr sz="1500" b="1">
+                <a:solidFill>
+                  <a:schemeClr val="accent1"/>
+                </a:solidFill>
+                <a:latin typeface="맑은 고딕"/>
+              </a:rPr>
+              <a:t>03단원</a:t>
+            </a:r>
+          </a:p>
+        </p:txBody>
+      </p:sp>
+      <p:sp>
+        <p:nvSpPr>
+          <p:cNvPr id="7" name="Rounded Rectangle 6"/>
+          <p:cNvSpPr/>
+          <p:nvPr/>
+        </p:nvSpPr>
+        <p:spPr>
+          <a:xfrm>
+            <a:off x="822960" y="2470000"/>
+            <a:ext cx="10546080" cy="720000"/>
+          </a:xfrm>
+          <a:prstGeom prst="roundRect">
+            <a:avLst>
+              <a:gd name="adj" fmla="val 12000"/>
+            </a:avLst>
+          </a:prstGeom>
+          <a:solidFill>
+            <a:schemeClr val="bg2"/>
+          </a:solidFill>
+          <a:ln>
+            <a:noFill/>
+          </a:ln>
+          <a:effectLst/>
+        </p:spPr>
+        <p:style>
+          <a:lnRef idx="1">
+            <a:schemeClr val="accent1"/>
+          </a:lnRef>
+          <a:fillRef idx="3">
+            <a:schemeClr val="accent1"/>
+          </a:fillRef>
+          <a:effectRef idx="2">
+            <a:schemeClr val="accent1"/>
+          </a:effectRef>
+          <a:fontRef idx="minor">
+            <a:schemeClr val="lt1"/>
+          </a:fontRef>
+        </p:style>
+        <p:txBody>
+          <a:bodyPr rtlCol="0" anchor="ctr"/>
+          <a:lstStyle/>
+          <a:p>
+            <a:pPr algn="ctr"/>
+            <a:endParaRPr/>
+          </a:p>
+        </p:txBody>
+      </p:sp>
+      <p:sp>
+        <p:nvSpPr>
+          <p:cNvPr id="8" name="Rounded Rectangle 7"/>
+          <p:cNvSpPr/>
+          <p:nvPr/>
+        </p:nvSpPr>
+        <p:spPr>
+          <a:xfrm>
+            <a:off x="1460160" y="2620000"/>
+            <a:ext cx="2142800" cy="420000"/>
+          </a:xfrm>
+          <a:prstGeom prst="roundRect">
+            <a:avLst>
+              <a:gd name="adj" fmla="val 12000"/>
+            </a:avLst>
+          </a:prstGeom>
+          <a:solidFill>
+            <a:schemeClr val="accent1"/>
+          </a:solidFill>
+          <a:ln>
+            <a:noFill/>
+          </a:ln>
+          <a:effectLst/>
+        </p:spPr>
+        <p:style>
+          <a:lnRef idx="1">
+            <a:schemeClr val="accent1"/>
+          </a:lnRef>
+          <a:fillRef idx="3">
+            <a:schemeClr val="accent1"/>
+          </a:fillRef>
+          <a:effectRef idx="2">
+            <a:schemeClr val="accent1"/>
+          </a:effectRef>
+          <a:fontRef idx="minor">
+            <a:schemeClr val="lt1"/>
+          </a:fontRef>
+        </p:style>
+        <p:txBody>
+          <a:bodyPr lIns="0" rIns="0" rtlCol="0" anchor="ctr"/>
+          <a:lstStyle/>
+          <a:p>
+            <a:pPr algn="ctr"/>
+            <a:r>
+              <a:rPr sz="1800" b="1">
+                <a:solidFill>
+                  <a:schemeClr val="bg1"/>
+                </a:solidFill>
+                <a:latin typeface="Consolas"/>
+              </a:rPr>
+              <a:t>C:\AI\mcp</a:t>
+            </a:r>
+          </a:p>
+        </p:txBody>
+      </p:sp>
+      <p:sp>
+        <p:nvSpPr>
+          <p:cNvPr id="9" name="TextBox 8"/>
+          <p:cNvSpPr txBox="1"/>
+          <p:nvPr/>
+        </p:nvSpPr>
+        <p:spPr>
+          <a:xfrm>
+            <a:off x="1022960" y="2470000"/>
+            <a:ext cx="300000" cy="720000"/>
+          </a:xfrm>
+          <a:prstGeom prst="rect">
+            <a:avLst/>
+          </a:prstGeom>
+          <a:noFill/>
+        </p:spPr>
+        <p:txBody>
+          <a:bodyPr wrap="square" lIns="0" tIns="0" rIns="0" bIns="0" anchor="ctr">
+            <a:spAutoFit/>
+          </a:bodyPr>
+          <a:lstStyle/>
+          <a:p>
+            <a:pPr algn="l"/>
+            <a:r>
+              <a:rPr sz="2000" b="0">
+                <a:solidFill>
+                  <a:schemeClr val="accent5"/>
+                </a:solidFill>
+                <a:latin typeface="맑은 고딕"/>
+              </a:rPr>
+              <a:t>└</a:t>
+            </a:r>
+          </a:p>
+        </p:txBody>
+      </p:sp>
+      <p:sp>
+        <p:nvSpPr>
+          <p:cNvPr id="10" name="TextBox 9"/>
+          <p:cNvSpPr txBox="1"/>
+          <p:nvPr/>
+        </p:nvSpPr>
+        <p:spPr>
+          <a:xfrm>
+            <a:off x="3822960" y="2550000"/>
+            <a:ext cx="4600000" cy="560000"/>
+          </a:xfrm>
+          <a:prstGeom prst="rect">
+            <a:avLst/>
+          </a:prstGeom>
+          <a:noFill/>
+        </p:spPr>
+        <p:txBody>
+          <a:bodyPr wrap="square" lIns="0" tIns="0" rIns="0" bIns="0" anchor="ctr">
+            <a:spAutoFit/>
+          </a:bodyPr>
+          <a:lstStyle/>
+          <a:p>
+            <a:pPr algn="l"/>
+            <a:r>
+              <a:rPr sz="1700" b="1">
+                <a:solidFill>
+                  <a:schemeClr val="tx1"/>
+                </a:solidFill>
+                <a:latin typeface="맑은 고딕"/>
+              </a:rPr>
+              <a:t>모두 · MCP 연결 전</a:t>
+            </a:r>
+          </a:p>
+          <a:p>
+            <a:pPr algn="l"/>
+            <a:r>
+              <a:rPr sz="1400" b="0">
+                <a:solidFill>
+                  <a:schemeClr val="tx2"/>
+                </a:solidFill>
+                <a:latin typeface="맑은 고딕"/>
+              </a:rPr>
+              <a:t>MCP 서버 소스가 들어갈 자리</a:t>
+            </a:r>
+          </a:p>
+        </p:txBody>
+      </p:sp>
+      <p:sp>
+        <p:nvSpPr>
+          <p:cNvPr id="11" name="TextBox 10"/>
+          <p:cNvSpPr txBox="1"/>
+          <p:nvPr/>
+        </p:nvSpPr>
+        <p:spPr>
+          <a:xfrm>
+            <a:off x="9769040" y="2470000"/>
+            <a:ext cx="1420000" cy="720000"/>
+          </a:xfrm>
+          <a:prstGeom prst="rect">
+            <a:avLst/>
+          </a:prstGeom>
+          <a:noFill/>
+        </p:spPr>
+        <p:txBody>
+          <a:bodyPr wrap="square" lIns="0" tIns="0" rIns="0" bIns="0" anchor="ctr">
+            <a:spAutoFit/>
+          </a:bodyPr>
+          <a:lstStyle/>
+          <a:p>
+            <a:pPr algn="r"/>
+            <a:r>
+              <a:rPr sz="1500" b="1">
+                <a:solidFill>
+                  <a:schemeClr val="accent1"/>
+                </a:solidFill>
+                <a:latin typeface="맑은 고딕"/>
+              </a:rPr>
+              <a:t>05단원</a:t>
+            </a:r>
+          </a:p>
+        </p:txBody>
+      </p:sp>
+      <p:sp>
+        <p:nvSpPr>
+          <p:cNvPr id="12" name="Rounded Rectangle 11"/>
+          <p:cNvSpPr/>
+          <p:nvPr/>
+        </p:nvSpPr>
+        <p:spPr>
+          <a:xfrm>
+            <a:off x="822960" y="3340000"/>
+            <a:ext cx="10546080" cy="720000"/>
+          </a:xfrm>
+          <a:prstGeom prst="roundRect">
+            <a:avLst>
+              <a:gd name="adj" fmla="val 12000"/>
+            </a:avLst>
+          </a:prstGeom>
+          <a:solidFill>
+            <a:schemeClr val="bg2"/>
+          </a:solidFill>
+          <a:ln>
+            <a:noFill/>
+          </a:ln>
+          <a:effectLst/>
+        </p:spPr>
+        <p:style>
+          <a:lnRef idx="1">
+            <a:schemeClr val="accent1"/>
+          </a:lnRef>
+          <a:fillRef idx="3">
+            <a:schemeClr val="accent1"/>
+          </a:fillRef>
+          <a:effectRef idx="2">
+            <a:schemeClr val="accent1"/>
+          </a:effectRef>
+          <a:fontRef idx="minor">
+            <a:schemeClr val="lt1"/>
+          </a:fontRef>
+        </p:style>
+        <p:txBody>
+          <a:bodyPr rtlCol="0" anchor="ctr"/>
+          <a:lstStyle/>
+          <a:p>
+            <a:pPr algn="ctr"/>
+            <a:endParaRPr/>
+          </a:p>
+        </p:txBody>
+      </p:sp>
+      <p:sp>
+        <p:nvSpPr>
+          <p:cNvPr id="13" name="Rounded Rectangle 12"/>
+          <p:cNvSpPr/>
+          <p:nvPr/>
+        </p:nvSpPr>
+        <p:spPr>
+          <a:xfrm>
+            <a:off x="1460160" y="3490000"/>
+            <a:ext cx="2142800" cy="420000"/>
+          </a:xfrm>
+          <a:prstGeom prst="roundRect">
+            <a:avLst>
+              <a:gd name="adj" fmla="val 12000"/>
+            </a:avLst>
+          </a:prstGeom>
+          <a:solidFill>
+            <a:schemeClr val="accent5"/>
+          </a:solidFill>
+          <a:ln>
+            <a:noFill/>
+          </a:ln>
+          <a:effectLst/>
+        </p:spPr>
+        <p:style>
+          <a:lnRef idx="1">
+            <a:schemeClr val="accent1"/>
+          </a:lnRef>
+          <a:fillRef idx="3">
+            <a:schemeClr val="accent1"/>
+          </a:fillRef>
+          <a:effectRef idx="2">
+            <a:schemeClr val="accent1"/>
+          </a:effectRef>
+          <a:fontRef idx="minor">
+            <a:schemeClr val="lt1"/>
+          </a:fontRef>
+        </p:style>
+        <p:txBody>
+          <a:bodyPr lIns="0" rIns="0" rtlCol="0" anchor="ctr"/>
+          <a:lstStyle/>
+          <a:p>
+            <a:pPr algn="ctr"/>
+            <a:r>
+              <a:rPr sz="1800" b="1">
+                <a:solidFill>
+                  <a:schemeClr val="bg1"/>
+                </a:solidFill>
+                <a:latin typeface="Consolas"/>
+              </a:rPr>
+              <a:t>C:\AI\스킬</a:t>
+            </a:r>
+          </a:p>
+        </p:txBody>
+      </p:sp>
+      <p:sp>
+        <p:nvSpPr>
+          <p:cNvPr id="14" name="TextBox 13"/>
+          <p:cNvSpPr txBox="1"/>
+          <p:nvPr/>
+        </p:nvSpPr>
+        <p:spPr>
+          <a:xfrm>
+            <a:off x="1022960" y="3340000"/>
+            <a:ext cx="300000" cy="720000"/>
+          </a:xfrm>
+          <a:prstGeom prst="rect">
+            <a:avLst/>
+          </a:prstGeom>
+          <a:noFill/>
+        </p:spPr>
+        <p:txBody>
+          <a:bodyPr wrap="square" lIns="0" tIns="0" rIns="0" bIns="0" anchor="ctr">
+            <a:spAutoFit/>
+          </a:bodyPr>
+          <a:lstStyle/>
+          <a:p>
+            <a:pPr algn="l"/>
+            <a:r>
+              <a:rPr sz="2000" b="0">
+                <a:solidFill>
+                  <a:schemeClr val="accent5"/>
+                </a:solidFill>
+                <a:latin typeface="맑은 고딕"/>
+              </a:rPr>
+              <a:t>└</a:t>
+            </a:r>
+          </a:p>
+        </p:txBody>
+      </p:sp>
+      <p:sp>
+        <p:nvSpPr>
+          <p:cNvPr id="15" name="TextBox 14"/>
+          <p:cNvSpPr txBox="1"/>
+          <p:nvPr/>
+        </p:nvSpPr>
+        <p:spPr>
+          <a:xfrm>
+            <a:off x="3822960" y="3420000"/>
+            <a:ext cx="4600000" cy="560000"/>
+          </a:xfrm>
+          <a:prstGeom prst="rect">
+            <a:avLst/>
+          </a:prstGeom>
+          <a:noFill/>
+        </p:spPr>
+        <p:txBody>
+          <a:bodyPr wrap="square" lIns="0" tIns="0" rIns="0" bIns="0" anchor="ctr">
+            <a:spAutoFit/>
+          </a:bodyPr>
+          <a:lstStyle/>
+          <a:p>
+            <a:pPr algn="l"/>
+            <a:r>
+              <a:rPr sz="1700" b="1">
+                <a:solidFill>
+                  <a:schemeClr val="tx1"/>
+                </a:solidFill>
+                <a:latin typeface="맑은 고딕"/>
+              </a:rPr>
+              <a:t>스킬 만들기 실습 때</a:t>
+            </a:r>
+          </a:p>
+          <a:p>
+            <a:pPr algn="l"/>
+            <a:r>
+              <a:rPr sz="1400" b="0">
+                <a:solidFill>
+                  <a:schemeClr val="tx2"/>
+                </a:solidFill>
+                <a:latin typeface="맑은 고딕"/>
+              </a:rPr>
+              <a:t>프로젝트에 연결해 .skill 을 저장하는 곳</a:t>
+            </a:r>
+          </a:p>
+        </p:txBody>
+      </p:sp>
+      <p:sp>
+        <p:nvSpPr>
+          <p:cNvPr id="16" name="TextBox 15"/>
+          <p:cNvSpPr txBox="1"/>
+          <p:nvPr/>
+        </p:nvSpPr>
+        <p:spPr>
+          <a:xfrm>
+            <a:off x="9769040" y="3340000"/>
+            <a:ext cx="1420000" cy="720000"/>
+          </a:xfrm>
+          <a:prstGeom prst="rect">
+            <a:avLst/>
+          </a:prstGeom>
+          <a:noFill/>
+        </p:spPr>
+        <p:txBody>
+          <a:bodyPr wrap="square" lIns="0" tIns="0" rIns="0" bIns="0" anchor="ctr">
+            <a:spAutoFit/>
+          </a:bodyPr>
+          <a:lstStyle/>
+          <a:p>
+            <a:pPr algn="r"/>
+            <a:r>
+              <a:rPr sz="1500" b="1">
+                <a:solidFill>
+                  <a:schemeClr val="accent5"/>
+                </a:solidFill>
+                <a:latin typeface="맑은 고딕"/>
+              </a:rPr>
+              <a:t>06·07단원</a:t>
+            </a:r>
+          </a:p>
+        </p:txBody>
+      </p:sp>
+      <p:sp>
+        <p:nvSpPr>
+          <p:cNvPr id="22" name="Rounded Rectangle 21"/>
+          <p:cNvSpPr/>
+          <p:nvPr/>
+        </p:nvSpPr>
+        <p:spPr>
+          <a:xfrm>
+            <a:off x="822960" y="4246400"/>
+            <a:ext cx="10546080" cy="560000"/>
+          </a:xfrm>
+          <a:prstGeom prst="roundRect">
+            <a:avLst>
+              <a:gd name="adj" fmla="val 12000"/>
+            </a:avLst>
+          </a:prstGeom>
+          <a:solidFill>
+            <a:schemeClr val="tx1"/>
+          </a:solidFill>
+          <a:ln>
+            <a:noFill/>
+          </a:ln>
+          <a:effectLst/>
+        </p:spPr>
+        <p:style>
+          <a:lnRef idx="1">
+            <a:schemeClr val="accent1"/>
+          </a:lnRef>
+          <a:fillRef idx="3">
+            <a:schemeClr val="accent1"/>
+          </a:fillRef>
+          <a:effectRef idx="2">
+            <a:schemeClr val="accent1"/>
+          </a:effectRef>
+          <a:fontRef idx="minor">
+            <a:schemeClr val="lt1"/>
+          </a:fontRef>
+        </p:style>
+        <p:txBody>
+          <a:bodyPr rtlCol="0" anchor="ctr"/>
+          <a:lstStyle/>
+          <a:p>
+            <a:pPr algn="ctr"/>
+            <a:r>
+              <a:rPr sz="1600" b="1">
+                <a:solidFill>
+                  <a:schemeClr val="bg1"/>
+                </a:solidFill>
+                <a:latin typeface="맑은 고딕"/>
+              </a:rPr>
+              <a:t>안쪽 폴더(kis-mcp-server 등)는 실습 중에 Claude 가 만듭니다 — 이름과 위치는 바꾸지 마세요</a:t>
+            </a:r>
+          </a:p>
+        </p:txBody>
+      </p:sp>
+      <p:sp>
+        <p:nvSpPr>
+          <p:cNvPr id="23" name="TextBox 22"/>
+          <p:cNvSpPr txBox="1"/>
+          <p:nvPr/>
+        </p:nvSpPr>
+        <p:spPr>
+          <a:xfrm>
+            <a:off x="822960" y="4886400"/>
+            <a:ext cx="10546080" cy="300000"/>
+          </a:xfrm>
+          <a:prstGeom prst="rect">
+            <a:avLst/>
+          </a:prstGeom>
+          <a:noFill/>
+        </p:spPr>
+        <p:txBody>
+          <a:bodyPr wrap="square" lIns="0" tIns="0" rIns="0" bIns="0" anchor="ctr">
+            <a:spAutoFit/>
+          </a:bodyPr>
+          <a:lstStyle/>
+          <a:p>
+            <a:pPr algn="l"/>
+            <a:r>
+              <a:rPr sz="1300" b="0">
+                <a:solidFill>
+                  <a:schemeClr val="accent5"/>
+                </a:solidFill>
+                <a:latin typeface="맑은 고딕"/>
+              </a:rPr>
+              <a:t>만드는 법 — 탐색기 → 내 PC → C: 드라이브 → 빈 곳에서 마우스 오른쪽 → 새로 만들기 → 폴더 → 이름 「AI」</a:t>
+            </a:r>
+          </a:p>
+        </p:txBody>
+      </p:sp>
+    </p:spTree>
+  </p:cSld>
+  <p:clrMapOvr>
+    <a:masterClrMapping/>
+  </p:clrMapOvr>
+</p:sld>
+</file>
+
+<file path=ppt/slides/slide20.xml><?xml version="1.0" encoding="utf-8"?>
 <p:sld xmlns:a="http://schemas.openxmlformats.org/drawingml/2006/main" xmlns:r="http://schemas.openxmlformats.org/officeDocument/2006/relationships" xmlns:p="http://schemas.openxmlformats.org/presentationml/2006/main">
   <p:cSld name="Slide 18">
     <p:spTree>
@@ -9978,7 +13267,7 @@
             <a:pPr algn="l"/>
             <a:fld id="{F7021451-1387-4CA6-816F-3879F97B5CBC}" type="slidenum">
               <a:rPr b="0" lang="en-US"/>
-              <a:t>18</a:t>
+              <a:t>20</a:t>
             </a:fld>
             <a:endParaRPr lang="en-US"/>
           </a:p>
@@ -9992,7 +13281,7 @@
 </p:sld>
 </file>
 
-<file path=ppt/slides/slide19.xml><?xml version="1.0" encoding="utf-8"?>
+<file path=ppt/slides/slide21.xml><?xml version="1.0" encoding="utf-8"?>
 <p:sld xmlns:a="http://schemas.openxmlformats.org/drawingml/2006/main" xmlns:r="http://schemas.openxmlformats.org/officeDocument/2006/relationships" xmlns:p="http://schemas.openxmlformats.org/presentationml/2006/main">
   <p:cSld name="Slide 19">
     <p:spTree>
@@ -10776,7 +14065,7 @@
             <a:pPr algn="l"/>
             <a:fld id="{F7021451-1387-4CA6-816F-3879F97B5CBC}" type="slidenum">
               <a:rPr b="0" lang="en-US"/>
-              <a:t>19</a:t>
+              <a:t>21</a:t>
             </a:fld>
             <a:endParaRPr lang="en-US"/>
           </a:p>
@@ -10790,7 +14079,2178 @@
 </p:sld>
 </file>
 
-<file path=ppt/slides/slide2.xml><?xml version="1.0" encoding="utf-8"?>
+<file path=ppt/slides/slide22.xml><?xml version="1.0" encoding="utf-8"?>
+<p:sld xmlns:a="http://schemas.openxmlformats.org/drawingml/2006/main" xmlns:r="http://schemas.openxmlformats.org/officeDocument/2006/relationships" xmlns:p="http://schemas.openxmlformats.org/presentationml/2006/main">
+  <p:cSld name="Slide 20">
+    <p:spTree>
+      <p:nvGrpSpPr>
+        <p:cNvPr id="1" name=""/>
+        <p:cNvGrpSpPr/>
+        <p:nvPr/>
+      </p:nvGrpSpPr>
+      <p:grpSpPr>
+        <a:xfrm>
+          <a:off x="0" y="0"/>
+          <a:ext cx="0" cy="0"/>
+          <a:chOff x="0" y="0"/>
+          <a:chExt cx="0" cy="0"/>
+        </a:xfrm>
+      </p:grpSpPr>
+      <p:sp>
+        <p:nvSpPr>
+          <p:cNvPr id="2" name="Text 0"/>
+          <p:cNvSpPr/>
+          <p:nvPr>
+            <p:ph idx="100" type="title" hasCustomPrompt="1"/>
+          </p:nvPr>
+        </p:nvSpPr>
+        <p:spPr>
+          <a:xfrm>
+            <a:off x="548640" y="320040"/>
+            <a:ext cx="11064240" cy="822960"/>
+          </a:xfrm>
+          <a:prstGeom prst="rect">
+            <a:avLst/>
+          </a:prstGeom>
+          <a:noFill/>
+          <a:ln/>
+        </p:spPr>
+        <p:txBody>
+          <a:bodyPr wrap="square" rtlCol="0" anchor="ctr"/>
+          <a:lstStyle/>
+          <a:p>
+            <a:pPr indent="0" marL="0">
+              <a:buNone/>
+            </a:pPr>
+            <a:r>
+              <a:rPr lang="en-US" sz="2800" b="1" dirty="0">
+                <a:solidFill>
+                  <a:srgbClr val="1C2333"/>
+                </a:solidFill>
+                <a:latin typeface="맑은 고딕" pitchFamily="34" charset="0"/>
+                <a:ea typeface="맑은 고딕" pitchFamily="34" charset="-122"/>
+                <a:cs typeface="맑은 고딕" pitchFamily="34" charset="-120"/>
+              </a:rPr>
+              <a:t>안전 수칙 — 이것만은 지킨다</a:t>
+            </a:r>
+            <a:endParaRPr lang="en-US" sz="2800" dirty="0"/>
+          </a:p>
+        </p:txBody>
+      </p:sp>
+      <p:sp>
+        <p:nvSpPr>
+          <p:cNvPr id="3" name="card"/>
+          <p:cNvSpPr/>
+          <p:nvPr/>
+        </p:nvSpPr>
+        <p:spPr>
+          <a:xfrm>
+            <a:off x="548640" y="1417320"/>
+            <a:ext cx="5440680" cy="1920240"/>
+          </a:xfrm>
+          <a:prstGeom prst="roundRect">
+            <a:avLst>
+              <a:gd name="adj" fmla="val 3810"/>
+            </a:avLst>
+          </a:prstGeom>
+          <a:solidFill>
+            <a:srgbClr val="E4F3F1"/>
+          </a:solidFill>
+          <a:ln w="12700">
+            <a:solidFill>
+              <a:srgbClr val="E4F3F1"/>
+            </a:solidFill>
+            <a:prstDash val="solid"/>
+          </a:ln>
+        </p:spPr>
+      </p:sp>
+      <p:sp>
+        <p:nvSpPr>
+          <p:cNvPr id="4" name="Shape 2"/>
+          <p:cNvSpPr/>
+          <p:nvPr/>
+        </p:nvSpPr>
+        <p:spPr>
+          <a:xfrm>
+            <a:off x="822960" y="1691640"/>
+            <a:ext cx="502920" cy="502920"/>
+          </a:xfrm>
+          <a:prstGeom prst="ellipse">
+            <a:avLst/>
+          </a:prstGeom>
+          <a:solidFill>
+            <a:srgbClr val="0F8C7E"/>
+          </a:solidFill>
+          <a:ln w="12700">
+            <a:solidFill>
+              <a:srgbClr val="0F8C7E"/>
+            </a:solidFill>
+            <a:prstDash val="solid"/>
+          </a:ln>
+        </p:spPr>
+      </p:sp>
+      <p:sp>
+        <p:nvSpPr>
+          <p:cNvPr id="5" name="Text 3"/>
+          <p:cNvSpPr txBox="1"/>
+          <p:nvPr/>
+        </p:nvSpPr>
+        <p:spPr>
+          <a:xfrm>
+            <a:off x="822960" y="1691640"/>
+            <a:ext cx="502920" cy="502920"/>
+          </a:xfrm>
+          <a:prstGeom prst="rect">
+            <a:avLst/>
+          </a:prstGeom>
+          <a:noFill/>
+          <a:ln/>
+        </p:spPr>
+        <p:txBody>
+          <a:bodyPr wrap="square" lIns="0" tIns="0" rIns="0" bIns="0" rtlCol="0" anchor="ctr"/>
+          <a:lstStyle/>
+          <a:p>
+            <a:pPr algn="ctr" indent="0" marL="0">
+              <a:buNone/>
+            </a:pPr>
+            <a:r>
+              <a:rPr lang="en-US" sz="1600" b="1" dirty="0">
+                <a:solidFill>
+                  <a:srgbClr val="FFFFFF"/>
+                </a:solidFill>
+                <a:latin typeface="맑은 고딕" pitchFamily="34" charset="0"/>
+                <a:ea typeface="맑은 고딕" pitchFamily="34" charset="-122"/>
+                <a:cs typeface="맑은 고딕" pitchFamily="34" charset="-120"/>
+              </a:rPr>
+              <a:t>1</a:t>
+            </a:r>
+            <a:endParaRPr lang="en-US" sz="1600" dirty="0"/>
+          </a:p>
+        </p:txBody>
+      </p:sp>
+      <p:sp>
+        <p:nvSpPr>
+          <p:cNvPr id="6" name="Text 4"/>
+          <p:cNvSpPr txBox="1"/>
+          <p:nvPr/>
+        </p:nvSpPr>
+        <p:spPr>
+          <a:xfrm>
+            <a:off x="1508760" y="1691640"/>
+            <a:ext cx="4297680" cy="822960"/>
+          </a:xfrm>
+          <a:prstGeom prst="rect">
+            <a:avLst/>
+          </a:prstGeom>
+          <a:noFill/>
+          <a:ln/>
+        </p:spPr>
+        <p:txBody>
+          <a:bodyPr wrap="square" lIns="0" tIns="0" rIns="0" bIns="0" rtlCol="0" anchor="t"/>
+          <a:lstStyle/>
+          <a:p>
+            <a:pPr indent="0" marL="0">
+              <a:buNone/>
+            </a:pPr>
+            <a:r>
+              <a:rPr lang="en-US" sz="1800" b="1" dirty="0">
+                <a:solidFill>
+                  <a:srgbClr val="1C2333"/>
+                </a:solidFill>
+                <a:latin typeface="맑은 고딕" pitchFamily="34" charset="0"/>
+                <a:ea typeface="맑은 고딕" pitchFamily="34" charset="-122"/>
+                <a:cs typeface="맑은 고딕" pitchFamily="34" charset="-120"/>
+              </a:rPr>
+              <a:t>API 키·인증키는 채팅에 붙여 넣지 않는다</a:t>
+            </a:r>
+            <a:endParaRPr lang="en-US" sz="1800" dirty="0"/>
+          </a:p>
+        </p:txBody>
+      </p:sp>
+      <p:sp>
+        <p:nvSpPr>
+          <p:cNvPr id="7" name="Text 5"/>
+          <p:cNvSpPr txBox="1"/>
+          <p:nvPr/>
+        </p:nvSpPr>
+        <p:spPr>
+          <a:xfrm>
+            <a:off x="1508760" y="2560320"/>
+            <a:ext cx="4297680" cy="640080"/>
+          </a:xfrm>
+          <a:prstGeom prst="rect">
+            <a:avLst/>
+          </a:prstGeom>
+          <a:noFill/>
+          <a:ln/>
+        </p:spPr>
+        <p:txBody>
+          <a:bodyPr wrap="square" lIns="0" tIns="0" rIns="0" bIns="0" rtlCol="0" anchor="t"/>
+          <a:lstStyle/>
+          <a:p>
+            <a:pPr indent="0" marL="0">
+              <a:buNone/>
+            </a:pPr>
+            <a:r>
+              <a:rPr lang="en-US" sz="1400" dirty="0">
+                <a:solidFill>
+                  <a:srgbClr val="6B7A90"/>
+                </a:solidFill>
+                <a:latin typeface="맑은 고딕" pitchFamily="34" charset="0"/>
+                <a:ea typeface="맑은 고딕" pitchFamily="34" charset="-122"/>
+                <a:cs typeface="맑은 고딕" pitchFamily="34" charset="-120"/>
+              </a:rPr>
+              <a:t>키는 PC 안에서 스크립트로 옮긴다</a:t>
+            </a:r>
+            <a:endParaRPr lang="en-US" sz="1400" dirty="0"/>
+          </a:p>
+        </p:txBody>
+      </p:sp>
+      <p:sp>
+        <p:nvSpPr>
+          <p:cNvPr id="8" name="card"/>
+          <p:cNvSpPr/>
+          <p:nvPr/>
+        </p:nvSpPr>
+        <p:spPr>
+          <a:xfrm>
+            <a:off x="6172200" y="1417320"/>
+            <a:ext cx="5440680" cy="1920240"/>
+          </a:xfrm>
+          <a:prstGeom prst="roundRect">
+            <a:avLst>
+              <a:gd name="adj" fmla="val 3810"/>
+            </a:avLst>
+          </a:prstGeom>
+          <a:solidFill>
+            <a:srgbClr val="E4F3F1"/>
+          </a:solidFill>
+          <a:ln w="12700">
+            <a:solidFill>
+              <a:srgbClr val="E4F3F1"/>
+            </a:solidFill>
+            <a:prstDash val="solid"/>
+          </a:ln>
+        </p:spPr>
+      </p:sp>
+      <p:sp>
+        <p:nvSpPr>
+          <p:cNvPr id="9" name="Shape 7"/>
+          <p:cNvSpPr/>
+          <p:nvPr/>
+        </p:nvSpPr>
+        <p:spPr>
+          <a:xfrm>
+            <a:off x="6446520" y="1691640"/>
+            <a:ext cx="502920" cy="502920"/>
+          </a:xfrm>
+          <a:prstGeom prst="ellipse">
+            <a:avLst/>
+          </a:prstGeom>
+          <a:solidFill>
+            <a:srgbClr val="0F8C7E"/>
+          </a:solidFill>
+          <a:ln w="12700">
+            <a:solidFill>
+              <a:srgbClr val="0F8C7E"/>
+            </a:solidFill>
+            <a:prstDash val="solid"/>
+          </a:ln>
+        </p:spPr>
+      </p:sp>
+      <p:sp>
+        <p:nvSpPr>
+          <p:cNvPr id="10" name="Text 8"/>
+          <p:cNvSpPr txBox="1"/>
+          <p:nvPr/>
+        </p:nvSpPr>
+        <p:spPr>
+          <a:xfrm>
+            <a:off x="6446520" y="1691640"/>
+            <a:ext cx="502920" cy="502920"/>
+          </a:xfrm>
+          <a:prstGeom prst="rect">
+            <a:avLst/>
+          </a:prstGeom>
+          <a:noFill/>
+          <a:ln/>
+        </p:spPr>
+        <p:txBody>
+          <a:bodyPr wrap="square" lIns="0" tIns="0" rIns="0" bIns="0" rtlCol="0" anchor="ctr"/>
+          <a:lstStyle/>
+          <a:p>
+            <a:pPr algn="ctr" indent="0" marL="0">
+              <a:buNone/>
+            </a:pPr>
+            <a:r>
+              <a:rPr lang="en-US" sz="1600" b="1" dirty="0">
+                <a:solidFill>
+                  <a:srgbClr val="FFFFFF"/>
+                </a:solidFill>
+                <a:latin typeface="맑은 고딕" pitchFamily="34" charset="0"/>
+                <a:ea typeface="맑은 고딕" pitchFamily="34" charset="-122"/>
+                <a:cs typeface="맑은 고딕" pitchFamily="34" charset="-120"/>
+              </a:rPr>
+              <a:t>2</a:t>
+            </a:r>
+            <a:endParaRPr lang="en-US" sz="1600" dirty="0"/>
+          </a:p>
+        </p:txBody>
+      </p:sp>
+      <p:sp>
+        <p:nvSpPr>
+          <p:cNvPr id="11" name="Text 9"/>
+          <p:cNvSpPr txBox="1"/>
+          <p:nvPr/>
+        </p:nvSpPr>
+        <p:spPr>
+          <a:xfrm>
+            <a:off x="7132320" y="1691640"/>
+            <a:ext cx="4297680" cy="822960"/>
+          </a:xfrm>
+          <a:prstGeom prst="rect">
+            <a:avLst/>
+          </a:prstGeom>
+          <a:noFill/>
+          <a:ln/>
+        </p:spPr>
+        <p:txBody>
+          <a:bodyPr wrap="square" lIns="0" tIns="0" rIns="0" bIns="0" rtlCol="0" anchor="t"/>
+          <a:lstStyle/>
+          <a:p>
+            <a:pPr indent="0" marL="0">
+              <a:buNone/>
+            </a:pPr>
+            <a:r>
+              <a:rPr lang="en-US" sz="1800" b="1" dirty="0">
+                <a:solidFill>
+                  <a:srgbClr val="1C2333"/>
+                </a:solidFill>
+                <a:latin typeface="맑은 고딕" pitchFamily="34" charset="0"/>
+                <a:ea typeface="맑은 고딕" pitchFamily="34" charset="-122"/>
+                <a:cs typeface="맑은 고딕" pitchFamily="34" charset="-120"/>
+              </a:rPr>
+              <a:t>설정·설명문은 고치기 전에 백업</a:t>
+            </a:r>
+            <a:endParaRPr lang="en-US" sz="1800" dirty="0"/>
+          </a:p>
+        </p:txBody>
+      </p:sp>
+      <p:sp>
+        <p:nvSpPr>
+          <p:cNvPr id="12" name="Text 10"/>
+          <p:cNvSpPr txBox="1"/>
+          <p:nvPr/>
+        </p:nvSpPr>
+        <p:spPr>
+          <a:xfrm>
+            <a:off x="7132320" y="2560320"/>
+            <a:ext cx="4297680" cy="640080"/>
+          </a:xfrm>
+          <a:prstGeom prst="rect">
+            <a:avLst/>
+          </a:prstGeom>
+          <a:noFill/>
+          <a:ln/>
+        </p:spPr>
+        <p:txBody>
+          <a:bodyPr wrap="square" lIns="0" tIns="0" rIns="0" bIns="0" rtlCol="0" anchor="t"/>
+          <a:lstStyle/>
+          <a:p>
+            <a:pPr indent="0" marL="0">
+              <a:buNone/>
+            </a:pPr>
+            <a:r>
+              <a:rPr lang="en-US" sz="1400" dirty="0">
+                <a:solidFill>
+                  <a:srgbClr val="6B7A90"/>
+                </a:solidFill>
+                <a:latin typeface="맑은 고딕" pitchFamily="34" charset="0"/>
+                <a:ea typeface="맑은 고딕" pitchFamily="34" charset="-122"/>
+                <a:cs typeface="맑은 고딕" pitchFamily="34" charset="-120"/>
+              </a:rPr>
+              <a:t>파일 옆에 .bak_날짜시각 사본, 설명문은 전·후 둘 다</a:t>
+            </a:r>
+            <a:endParaRPr lang="en-US" sz="1400" dirty="0"/>
+          </a:p>
+        </p:txBody>
+      </p:sp>
+      <p:sp>
+        <p:nvSpPr>
+          <p:cNvPr id="13" name="card"/>
+          <p:cNvSpPr/>
+          <p:nvPr/>
+        </p:nvSpPr>
+        <p:spPr>
+          <a:xfrm>
+            <a:off x="548640" y="3611880"/>
+            <a:ext cx="5440680" cy="1920240"/>
+          </a:xfrm>
+          <a:prstGeom prst="roundRect">
+            <a:avLst>
+              <a:gd name="adj" fmla="val 3810"/>
+            </a:avLst>
+          </a:prstGeom>
+          <a:solidFill>
+            <a:srgbClr val="E4F3F1"/>
+          </a:solidFill>
+          <a:ln w="12700">
+            <a:solidFill>
+              <a:srgbClr val="E4F3F1"/>
+            </a:solidFill>
+            <a:prstDash val="solid"/>
+          </a:ln>
+        </p:spPr>
+      </p:sp>
+      <p:sp>
+        <p:nvSpPr>
+          <p:cNvPr id="14" name="Shape 12"/>
+          <p:cNvSpPr/>
+          <p:nvPr/>
+        </p:nvSpPr>
+        <p:spPr>
+          <a:xfrm>
+            <a:off x="822960" y="3886200"/>
+            <a:ext cx="502920" cy="502920"/>
+          </a:xfrm>
+          <a:prstGeom prst="ellipse">
+            <a:avLst/>
+          </a:prstGeom>
+          <a:solidFill>
+            <a:srgbClr val="0F8C7E"/>
+          </a:solidFill>
+          <a:ln w="12700">
+            <a:solidFill>
+              <a:srgbClr val="0F8C7E"/>
+            </a:solidFill>
+            <a:prstDash val="solid"/>
+          </a:ln>
+        </p:spPr>
+      </p:sp>
+      <p:sp>
+        <p:nvSpPr>
+          <p:cNvPr id="15" name="Text 13"/>
+          <p:cNvSpPr txBox="1"/>
+          <p:nvPr/>
+        </p:nvSpPr>
+        <p:spPr>
+          <a:xfrm>
+            <a:off x="822960" y="3886200"/>
+            <a:ext cx="502920" cy="502920"/>
+          </a:xfrm>
+          <a:prstGeom prst="rect">
+            <a:avLst/>
+          </a:prstGeom>
+          <a:noFill/>
+          <a:ln/>
+        </p:spPr>
+        <p:txBody>
+          <a:bodyPr wrap="square" lIns="0" tIns="0" rIns="0" bIns="0" rtlCol="0" anchor="ctr"/>
+          <a:lstStyle/>
+          <a:p>
+            <a:pPr algn="ctr" indent="0" marL="0">
+              <a:buNone/>
+            </a:pPr>
+            <a:r>
+              <a:rPr lang="en-US" sz="1600" b="1" dirty="0">
+                <a:solidFill>
+                  <a:srgbClr val="FFFFFF"/>
+                </a:solidFill>
+                <a:latin typeface="맑은 고딕" pitchFamily="34" charset="0"/>
+                <a:ea typeface="맑은 고딕" pitchFamily="34" charset="-122"/>
+                <a:cs typeface="맑은 고딕" pitchFamily="34" charset="-120"/>
+              </a:rPr>
+              <a:t>3</a:t>
+            </a:r>
+            <a:endParaRPr lang="en-US" sz="1600" dirty="0"/>
+          </a:p>
+        </p:txBody>
+      </p:sp>
+      <p:sp>
+        <p:nvSpPr>
+          <p:cNvPr id="16" name="Text 14"/>
+          <p:cNvSpPr txBox="1"/>
+          <p:nvPr/>
+        </p:nvSpPr>
+        <p:spPr>
+          <a:xfrm>
+            <a:off x="1508760" y="3886200"/>
+            <a:ext cx="4297680" cy="822960"/>
+          </a:xfrm>
+          <a:prstGeom prst="rect">
+            <a:avLst/>
+          </a:prstGeom>
+          <a:noFill/>
+          <a:ln/>
+        </p:spPr>
+        <p:txBody>
+          <a:bodyPr wrap="square" lIns="0" tIns="0" rIns="0" bIns="0" rtlCol="0" anchor="t"/>
+          <a:lstStyle/>
+          <a:p>
+            <a:pPr indent="0" marL="0">
+              <a:buNone/>
+            </a:pPr>
+            <a:r>
+              <a:rPr lang="en-US" sz="1800" b="1" dirty="0">
+                <a:solidFill>
+                  <a:srgbClr val="1C2333"/>
+                </a:solidFill>
+                <a:latin typeface="맑은 고딕" pitchFamily="34" charset="0"/>
+                <a:ea typeface="맑은 고딕" pitchFamily="34" charset="-122"/>
+                <a:cs typeface="맑은 고딕" pitchFamily="34" charset="-120"/>
+              </a:rPr>
+              <a:t>「성공」 표시를 믿지 말고 파일로 확인</a:t>
+            </a:r>
+            <a:endParaRPr lang="en-US" sz="1800" dirty="0"/>
+          </a:p>
+        </p:txBody>
+      </p:sp>
+      <p:sp>
+        <p:nvSpPr>
+          <p:cNvPr id="17" name="Text 15"/>
+          <p:cNvSpPr txBox="1"/>
+          <p:nvPr/>
+        </p:nvSpPr>
+        <p:spPr>
+          <a:xfrm>
+            <a:off x="1508760" y="4754880"/>
+            <a:ext cx="4297680" cy="640080"/>
+          </a:xfrm>
+          <a:prstGeom prst="rect">
+            <a:avLst/>
+          </a:prstGeom>
+          <a:noFill/>
+          <a:ln/>
+        </p:spPr>
+        <p:txBody>
+          <a:bodyPr wrap="square" lIns="0" tIns="0" rIns="0" bIns="0" rtlCol="0" anchor="t"/>
+          <a:lstStyle/>
+          <a:p>
+            <a:pPr indent="0" marL="0">
+              <a:buNone/>
+            </a:pPr>
+            <a:r>
+              <a:rPr lang="en-US" sz="1400" dirty="0">
+                <a:solidFill>
+                  <a:srgbClr val="6B7A90"/>
+                </a:solidFill>
+                <a:latin typeface="맑은 고딕" pitchFamily="34" charset="0"/>
+                <a:ea typeface="맑은 고딕" pitchFamily="34" charset="-122"/>
+                <a:cs typeface="맑은 고딕" pitchFamily="34" charset="-120"/>
+              </a:rPr>
+              <a:t>결과 파일의 경로·크기·시각을 본다</a:t>
+            </a:r>
+            <a:endParaRPr lang="en-US" sz="1400" dirty="0"/>
+          </a:p>
+        </p:txBody>
+      </p:sp>
+      <p:sp>
+        <p:nvSpPr>
+          <p:cNvPr id="18" name="card"/>
+          <p:cNvSpPr/>
+          <p:nvPr/>
+        </p:nvSpPr>
+        <p:spPr>
+          <a:xfrm>
+            <a:off x="6172200" y="3611880"/>
+            <a:ext cx="5440680" cy="1920240"/>
+          </a:xfrm>
+          <a:prstGeom prst="roundRect">
+            <a:avLst>
+              <a:gd name="adj" fmla="val 3810"/>
+            </a:avLst>
+          </a:prstGeom>
+          <a:solidFill>
+            <a:srgbClr val="E4F3F1"/>
+          </a:solidFill>
+          <a:ln w="12700">
+            <a:solidFill>
+              <a:srgbClr val="E4F3F1"/>
+            </a:solidFill>
+            <a:prstDash val="solid"/>
+          </a:ln>
+        </p:spPr>
+      </p:sp>
+      <p:sp>
+        <p:nvSpPr>
+          <p:cNvPr id="19" name="Shape 17"/>
+          <p:cNvSpPr/>
+          <p:nvPr/>
+        </p:nvSpPr>
+        <p:spPr>
+          <a:xfrm>
+            <a:off x="6446520" y="3886200"/>
+            <a:ext cx="502920" cy="502920"/>
+          </a:xfrm>
+          <a:prstGeom prst="ellipse">
+            <a:avLst/>
+          </a:prstGeom>
+          <a:solidFill>
+            <a:srgbClr val="0F8C7E"/>
+          </a:solidFill>
+          <a:ln w="12700">
+            <a:solidFill>
+              <a:srgbClr val="0F8C7E"/>
+            </a:solidFill>
+            <a:prstDash val="solid"/>
+          </a:ln>
+        </p:spPr>
+      </p:sp>
+      <p:sp>
+        <p:nvSpPr>
+          <p:cNvPr id="20" name="Text 18"/>
+          <p:cNvSpPr txBox="1"/>
+          <p:nvPr/>
+        </p:nvSpPr>
+        <p:spPr>
+          <a:xfrm>
+            <a:off x="6446520" y="3886200"/>
+            <a:ext cx="502920" cy="502920"/>
+          </a:xfrm>
+          <a:prstGeom prst="rect">
+            <a:avLst/>
+          </a:prstGeom>
+          <a:noFill/>
+          <a:ln/>
+        </p:spPr>
+        <p:txBody>
+          <a:bodyPr wrap="square" lIns="0" tIns="0" rIns="0" bIns="0" rtlCol="0" anchor="ctr"/>
+          <a:lstStyle/>
+          <a:p>
+            <a:pPr algn="ctr" indent="0" marL="0">
+              <a:buNone/>
+            </a:pPr>
+            <a:r>
+              <a:rPr lang="en-US" sz="1600" b="1" dirty="0">
+                <a:solidFill>
+                  <a:srgbClr val="FFFFFF"/>
+                </a:solidFill>
+                <a:latin typeface="맑은 고딕" pitchFamily="34" charset="0"/>
+                <a:ea typeface="맑은 고딕" pitchFamily="34" charset="-122"/>
+                <a:cs typeface="맑은 고딕" pitchFamily="34" charset="-120"/>
+              </a:rPr>
+              <a:t>4</a:t>
+            </a:r>
+            <a:endParaRPr lang="en-US" sz="1600" dirty="0"/>
+          </a:p>
+        </p:txBody>
+      </p:sp>
+      <p:sp>
+        <p:nvSpPr>
+          <p:cNvPr id="21" name="Text 19"/>
+          <p:cNvSpPr txBox="1"/>
+          <p:nvPr/>
+        </p:nvSpPr>
+        <p:spPr>
+          <a:xfrm>
+            <a:off x="7132320" y="3886200"/>
+            <a:ext cx="4297680" cy="822960"/>
+          </a:xfrm>
+          <a:prstGeom prst="rect">
+            <a:avLst/>
+          </a:prstGeom>
+          <a:noFill/>
+          <a:ln/>
+        </p:spPr>
+        <p:txBody>
+          <a:bodyPr wrap="square" lIns="0" tIns="0" rIns="0" bIns="0" rtlCol="0" anchor="t"/>
+          <a:lstStyle/>
+          <a:p>
+            <a:pPr indent="0" marL="0">
+              <a:buNone/>
+            </a:pPr>
+            <a:r>
+              <a:rPr lang="en-US" sz="1800" b="1" dirty="0">
+                <a:solidFill>
+                  <a:srgbClr val="1C2333"/>
+                </a:solidFill>
+                <a:latin typeface="맑은 고딕" pitchFamily="34" charset="0"/>
+                <a:ea typeface="맑은 고딕" pitchFamily="34" charset="-122"/>
+                <a:cs typeface="맑은 고딕" pitchFamily="34" charset="-120"/>
+              </a:rPr>
+              <a:t>권한을 「모두 허용」으로 풀지 않는다</a:t>
+            </a:r>
+            <a:endParaRPr lang="en-US" sz="1800" dirty="0"/>
+          </a:p>
+        </p:txBody>
+      </p:sp>
+      <p:sp>
+        <p:nvSpPr>
+          <p:cNvPr id="22" name="Text 20"/>
+          <p:cNvSpPr txBox="1"/>
+          <p:nvPr/>
+        </p:nvSpPr>
+        <p:spPr>
+          <a:xfrm>
+            <a:off x="7132320" y="4754880"/>
+            <a:ext cx="4297680" cy="640080"/>
+          </a:xfrm>
+          <a:prstGeom prst="rect">
+            <a:avLst/>
+          </a:prstGeom>
+          <a:noFill/>
+          <a:ln/>
+        </p:spPr>
+        <p:txBody>
+          <a:bodyPr wrap="square" lIns="0" tIns="0" rIns="0" bIns="0" rtlCol="0" anchor="t"/>
+          <a:lstStyle/>
+          <a:p>
+            <a:pPr indent="0" marL="0">
+              <a:buNone/>
+            </a:pPr>
+            <a:r>
+              <a:rPr lang="en-US" sz="1400" dirty="0">
+                <a:solidFill>
+                  <a:srgbClr val="6B7A90"/>
+                </a:solidFill>
+                <a:latin typeface="맑은 고딕" pitchFamily="34" charset="0"/>
+                <a:ea typeface="맑은 고딕" pitchFamily="34" charset="-122"/>
+                <a:cs typeface="맑은 고딕" pitchFamily="34" charset="-120"/>
+              </a:rPr>
+              <a:t>필요한 도구만 허용하고, 삭제는 사람이 한다</a:t>
+            </a:r>
+            <a:endParaRPr lang="en-US" sz="1400" dirty="0"/>
+          </a:p>
+        </p:txBody>
+      </p:sp>
+      <p:sp>
+        <p:nvSpPr>
+          <p:cNvPr id="25" name="Slide Number Placeholder 0"/>
+          <p:cNvSpPr>
+            <a:spLocks noGrp="1"/>
+          </p:cNvSpPr>
+          <p:nvPr>
+            <p:ph type="sldNum" sz="quarter" idx="4294967295"/>
+          </p:nvPr>
+        </p:nvSpPr>
+        <p:spPr>
+          <a:xfrm>
+            <a:off x="11247120" y="6400800"/>
+            <a:ext cx="548640" cy="274320"/>
+          </a:xfrm>
+          <a:prstGeom prst="rect">
+            <a:avLst/>
+          </a:prstGeom>
+          <a:extLst>
+            <a:ext uri="{C572A759-6A51-4108-AA02-DFA0A04FC94B}">
+              <ma14:wrappingTextBoxFlag xmlns:ma14="http://schemas.microsoft.com/office/mac/drawingml/2011/main" val="0"/>
+            </a:ext>
+          </a:extLst>
+        </p:spPr>
+        <p:txBody>
+          <a:bodyPr/>
+          <a:lstStyle>
+            <a:lvl1pPr>
+              <a:defRPr sz="1000">
+                <a:solidFill>
+                  <a:srgbClr val="6B7A90"/>
+                </a:solidFill>
+                <a:latin typeface="맑은 고딕"/>
+                <a:ea typeface="맑은 고딕"/>
+                <a:cs typeface="맑은 고딕"/>
+              </a:defRPr>
+            </a:lvl1pPr>
+          </a:lstStyle>
+          <a:p>
+            <a:pPr algn="l"/>
+            <a:fld id="{F7021451-1387-4CA6-816F-3879F97B5CBC}" type="slidenum">
+              <a:rPr b="0" lang="en-US"/>
+              <a:t>22</a:t>
+            </a:fld>
+            <a:endParaRPr lang="en-US"/>
+          </a:p>
+        </p:txBody>
+      </p:sp>
+    </p:spTree>
+  </p:cSld>
+  <p:clrMapOvr>
+    <a:masterClrMapping/>
+  </p:clrMapOvr>
+</p:sld>
+</file>
+
+<file path=ppt/slides/slide23.xml><?xml version="1.0" encoding="utf-8"?>
+<p:sld xmlns:a="http://schemas.openxmlformats.org/drawingml/2006/main" xmlns:r="http://schemas.openxmlformats.org/officeDocument/2006/relationships" xmlns:p="http://schemas.openxmlformats.org/presentationml/2006/main">
+  <p:cSld name="Slide 21">
+    <p:spTree>
+      <p:nvGrpSpPr>
+        <p:cNvPr id="1" name=""/>
+        <p:cNvGrpSpPr/>
+        <p:nvPr/>
+      </p:nvGrpSpPr>
+      <p:grpSpPr>
+        <a:xfrm>
+          <a:off x="0" y="0"/>
+          <a:ext cx="0" cy="0"/>
+          <a:chOff x="0" y="0"/>
+          <a:chExt cx="0" cy="0"/>
+        </a:xfrm>
+      </p:grpSpPr>
+      <p:sp>
+        <p:nvSpPr>
+          <p:cNvPr id="2" name="Text 0"/>
+          <p:cNvSpPr/>
+          <p:nvPr>
+            <p:ph idx="100" type="title" hasCustomPrompt="1"/>
+          </p:nvPr>
+        </p:nvSpPr>
+        <p:spPr>
+          <a:xfrm>
+            <a:off x="548640" y="320040"/>
+            <a:ext cx="11064240" cy="822960"/>
+          </a:xfrm>
+          <a:prstGeom prst="rect">
+            <a:avLst/>
+          </a:prstGeom>
+          <a:noFill/>
+          <a:ln/>
+        </p:spPr>
+        <p:txBody>
+          <a:bodyPr wrap="square" rtlCol="0" anchor="ctr"/>
+          <a:lstStyle/>
+          <a:p>
+            <a:pPr indent="0" marL="0">
+              <a:buNone/>
+            </a:pPr>
+            <a:r>
+              <a:rPr lang="en-US" sz="2800" b="1" dirty="0">
+                <a:solidFill>
+                  <a:srgbClr val="1C2333"/>
+                </a:solidFill>
+                <a:latin typeface="맑은 고딕" pitchFamily="34" charset="0"/>
+                <a:ea typeface="맑은 고딕" pitchFamily="34" charset="-122"/>
+                <a:cs typeface="맑은 고딕" pitchFamily="34" charset="-120"/>
+              </a:rPr>
+              <a:t>실습 체크리스트 — 내 예약작업 점검하기</a:t>
+            </a:r>
+            <a:endParaRPr lang="en-US" sz="2800" dirty="0"/>
+          </a:p>
+        </p:txBody>
+      </p:sp>
+      <p:sp>
+        <p:nvSpPr>
+          <p:cNvPr id="3" name="Shape 1"/>
+          <p:cNvSpPr/>
+          <p:nvPr/>
+        </p:nvSpPr>
+        <p:spPr>
+          <a:xfrm>
+            <a:off x="731520" y="1481328"/>
+            <a:ext cx="384048" cy="384048"/>
+          </a:xfrm>
+          <a:prstGeom prst="roundRect">
+            <a:avLst>
+              <a:gd name="adj" fmla="val 14286"/>
+            </a:avLst>
+          </a:prstGeom>
+          <a:solidFill>
+            <a:srgbClr val="FFFFFF"/>
+          </a:solidFill>
+          <a:ln w="25400">
+            <a:solidFill>
+              <a:srgbClr val="0F8C7E"/>
+            </a:solidFill>
+            <a:prstDash val="solid"/>
+          </a:ln>
+        </p:spPr>
+      </p:sp>
+      <p:sp>
+        <p:nvSpPr>
+          <p:cNvPr id="4" name="Text 2"/>
+          <p:cNvSpPr txBox="1"/>
+          <p:nvPr/>
+        </p:nvSpPr>
+        <p:spPr>
+          <a:xfrm>
+            <a:off x="1371600" y="1463040"/>
+            <a:ext cx="10058400" cy="457200"/>
+          </a:xfrm>
+          <a:prstGeom prst="rect">
+            <a:avLst/>
+          </a:prstGeom>
+          <a:noFill/>
+          <a:ln/>
+        </p:spPr>
+        <p:txBody>
+          <a:bodyPr wrap="square" lIns="0" tIns="0" rIns="0" bIns="0" rtlCol="0" anchor="t"/>
+          <a:lstStyle/>
+          <a:p>
+            <a:pPr indent="0" marL="0">
+              <a:buNone/>
+            </a:pPr>
+            <a:r>
+              <a:rPr lang="en-US" sz="1700" dirty="0">
+                <a:solidFill>
+                  <a:srgbClr val="1C2333"/>
+                </a:solidFill>
+                <a:latin typeface="맑은 고딕" pitchFamily="34" charset="0"/>
+                <a:ea typeface="맑은 고딕" pitchFamily="34" charset="-122"/>
+                <a:cs typeface="맑은 고딕" pitchFamily="34" charset="-120"/>
+              </a:rPr>
+              <a:t>내 예약작업 목록을 열고 작업마다 「엑셀·브라우저·PC 프로그램을 쓰는가」 표시</a:t>
+            </a:r>
+            <a:endParaRPr lang="en-US" sz="1700" dirty="0"/>
+          </a:p>
+        </p:txBody>
+      </p:sp>
+      <p:sp>
+        <p:nvSpPr>
+          <p:cNvPr id="5" name="Shape 3"/>
+          <p:cNvSpPr/>
+          <p:nvPr/>
+        </p:nvSpPr>
+        <p:spPr>
+          <a:xfrm>
+            <a:off x="731520" y="2258568"/>
+            <a:ext cx="384048" cy="384048"/>
+          </a:xfrm>
+          <a:prstGeom prst="roundRect">
+            <a:avLst>
+              <a:gd name="adj" fmla="val 14286"/>
+            </a:avLst>
+          </a:prstGeom>
+          <a:solidFill>
+            <a:srgbClr val="FFFFFF"/>
+          </a:solidFill>
+          <a:ln w="25400">
+            <a:solidFill>
+              <a:srgbClr val="0F8C7E"/>
+            </a:solidFill>
+            <a:prstDash val="solid"/>
+          </a:ln>
+        </p:spPr>
+      </p:sp>
+      <p:sp>
+        <p:nvSpPr>
+          <p:cNvPr id="6" name="Text 4"/>
+          <p:cNvSpPr txBox="1"/>
+          <p:nvPr/>
+        </p:nvSpPr>
+        <p:spPr>
+          <a:xfrm>
+            <a:off x="1371600" y="2240280"/>
+            <a:ext cx="10058400" cy="457200"/>
+          </a:xfrm>
+          <a:prstGeom prst="rect">
+            <a:avLst/>
+          </a:prstGeom>
+          <a:noFill/>
+          <a:ln/>
+        </p:spPr>
+        <p:txBody>
+          <a:bodyPr wrap="square" lIns="0" tIns="0" rIns="0" bIns="0" rtlCol="0" anchor="t"/>
+          <a:lstStyle/>
+          <a:p>
+            <a:pPr indent="0" marL="0">
+              <a:buNone/>
+            </a:pPr>
+            <a:r>
+              <a:rPr lang="en-US" sz="1700" dirty="0">
+                <a:solidFill>
+                  <a:srgbClr val="1C2333"/>
+                </a:solidFill>
+                <a:latin typeface="맑은 고딕" pitchFamily="34" charset="0"/>
+                <a:ea typeface="맑은 고딕" pitchFamily="34" charset="-122"/>
+                <a:cs typeface="맑은 고딕" pitchFamily="34" charset="-120"/>
+              </a:rPr>
+              <a:t>표시된 작업의 최근 결과 파일을 직접 열어 날짜 확인 (성공 표시 말고)</a:t>
+            </a:r>
+            <a:endParaRPr lang="en-US" sz="1700" dirty="0"/>
+          </a:p>
+        </p:txBody>
+      </p:sp>
+      <p:sp>
+        <p:nvSpPr>
+          <p:cNvPr id="7" name="Shape 5"/>
+          <p:cNvSpPr/>
+          <p:nvPr/>
+        </p:nvSpPr>
+        <p:spPr>
+          <a:xfrm>
+            <a:off x="731520" y="3035808"/>
+            <a:ext cx="384048" cy="384048"/>
+          </a:xfrm>
+          <a:prstGeom prst="roundRect">
+            <a:avLst>
+              <a:gd name="adj" fmla="val 14286"/>
+            </a:avLst>
+          </a:prstGeom>
+          <a:solidFill>
+            <a:srgbClr val="FFFFFF"/>
+          </a:solidFill>
+          <a:ln w="25400">
+            <a:solidFill>
+              <a:srgbClr val="0F8C7E"/>
+            </a:solidFill>
+            <a:prstDash val="solid"/>
+          </a:ln>
+        </p:spPr>
+      </p:sp>
+      <p:sp>
+        <p:nvSpPr>
+          <p:cNvPr id="8" name="Text 6"/>
+          <p:cNvSpPr txBox="1"/>
+          <p:nvPr/>
+        </p:nvSpPr>
+        <p:spPr>
+          <a:xfrm>
+            <a:off x="1371600" y="3017520"/>
+            <a:ext cx="10058400" cy="457200"/>
+          </a:xfrm>
+          <a:prstGeom prst="rect">
+            <a:avLst/>
+          </a:prstGeom>
+          <a:noFill/>
+          <a:ln/>
+        </p:spPr>
+        <p:txBody>
+          <a:bodyPr wrap="square" lIns="0" tIns="0" rIns="0" bIns="0" rtlCol="0" anchor="t"/>
+          <a:lstStyle/>
+          <a:p>
+            <a:pPr indent="0" marL="0">
+              <a:buNone/>
+            </a:pPr>
+            <a:r>
+              <a:rPr lang="en-US" sz="1700" dirty="0">
+                <a:solidFill>
+                  <a:srgbClr val="1C2333"/>
+                </a:solidFill>
+                <a:latin typeface="맑은 고딕" pitchFamily="34" charset="0"/>
+                <a:ea typeface="맑은 고딕" pitchFamily="34" charset="-122"/>
+                <a:cs typeface="맑은 고딕" pitchFamily="34" charset="-120"/>
+              </a:rPr>
+              <a:t>옮길 작업 1개를 골라 설명문을 백업</a:t>
+            </a:r>
+            <a:endParaRPr lang="en-US" sz="1700" dirty="0"/>
+          </a:p>
+        </p:txBody>
+      </p:sp>
+      <p:sp>
+        <p:nvSpPr>
+          <p:cNvPr id="9" name="Shape 7"/>
+          <p:cNvSpPr/>
+          <p:nvPr/>
+        </p:nvSpPr>
+        <p:spPr>
+          <a:xfrm>
+            <a:off x="731520" y="3813048"/>
+            <a:ext cx="384048" cy="384048"/>
+          </a:xfrm>
+          <a:prstGeom prst="roundRect">
+            <a:avLst>
+              <a:gd name="adj" fmla="val 14286"/>
+            </a:avLst>
+          </a:prstGeom>
+          <a:solidFill>
+            <a:srgbClr val="FFFFFF"/>
+          </a:solidFill>
+          <a:ln w="25400">
+            <a:solidFill>
+              <a:srgbClr val="0F8C7E"/>
+            </a:solidFill>
+            <a:prstDash val="solid"/>
+          </a:ln>
+        </p:spPr>
+      </p:sp>
+      <p:sp>
+        <p:nvSpPr>
+          <p:cNvPr id="10" name="Text 8"/>
+          <p:cNvSpPr txBox="1"/>
+          <p:nvPr/>
+        </p:nvSpPr>
+        <p:spPr>
+          <a:xfrm>
+            <a:off x="1371600" y="3794760"/>
+            <a:ext cx="10058400" cy="457200"/>
+          </a:xfrm>
+          <a:prstGeom prst="rect">
+            <a:avLst/>
+          </a:prstGeom>
+          <a:noFill/>
+          <a:ln/>
+        </p:spPr>
+        <p:txBody>
+          <a:bodyPr wrap="square" lIns="0" tIns="0" rIns="0" bIns="0" rtlCol="0" anchor="t"/>
+          <a:lstStyle/>
+          <a:p>
+            <a:pPr indent="0" marL="0">
+              <a:buNone/>
+            </a:pPr>
+            <a:r>
+              <a:rPr lang="en-US" sz="1700" dirty="0">
+                <a:solidFill>
+                  <a:srgbClr val="1C2333"/>
+                </a:solidFill>
+                <a:latin typeface="맑은 고딕" pitchFamily="34" charset="0"/>
+                <a:ea typeface="맑은 고딕" pitchFamily="34" charset="-122"/>
+                <a:cs typeface="맑은 고딕" pitchFamily="34" charset="-120"/>
+              </a:rPr>
+              <a:t>Code 탭에서 같은 일정으로 로컬 루틴을 만들고 손으로 1회 실행</a:t>
+            </a:r>
+            <a:endParaRPr lang="en-US" sz="1700" dirty="0"/>
+          </a:p>
+        </p:txBody>
+      </p:sp>
+      <p:sp>
+        <p:nvSpPr>
+          <p:cNvPr id="11" name="Shape 9"/>
+          <p:cNvSpPr/>
+          <p:nvPr/>
+        </p:nvSpPr>
+        <p:spPr>
+          <a:xfrm>
+            <a:off x="731520" y="4590288"/>
+            <a:ext cx="384048" cy="384048"/>
+          </a:xfrm>
+          <a:prstGeom prst="roundRect">
+            <a:avLst>
+              <a:gd name="adj" fmla="val 14286"/>
+            </a:avLst>
+          </a:prstGeom>
+          <a:solidFill>
+            <a:srgbClr val="FFFFFF"/>
+          </a:solidFill>
+          <a:ln w="25400">
+            <a:solidFill>
+              <a:srgbClr val="0F8C7E"/>
+            </a:solidFill>
+            <a:prstDash val="solid"/>
+          </a:ln>
+        </p:spPr>
+      </p:sp>
+      <p:sp>
+        <p:nvSpPr>
+          <p:cNvPr id="12" name="Text 10"/>
+          <p:cNvSpPr txBox="1"/>
+          <p:nvPr/>
+        </p:nvSpPr>
+        <p:spPr>
+          <a:xfrm>
+            <a:off x="1371600" y="4572000"/>
+            <a:ext cx="10058400" cy="457200"/>
+          </a:xfrm>
+          <a:prstGeom prst="rect">
+            <a:avLst/>
+          </a:prstGeom>
+          <a:noFill/>
+          <a:ln/>
+        </p:spPr>
+        <p:txBody>
+          <a:bodyPr wrap="square" lIns="0" tIns="0" rIns="0" bIns="0" rtlCol="0" anchor="t"/>
+          <a:lstStyle/>
+          <a:p>
+            <a:pPr indent="0" marL="0">
+              <a:buNone/>
+            </a:pPr>
+            <a:r>
+              <a:rPr lang="en-US" sz="1700" dirty="0">
+                <a:solidFill>
+                  <a:srgbClr val="1C2333"/>
+                </a:solidFill>
+                <a:latin typeface="맑은 고딕" pitchFamily="34" charset="0"/>
+                <a:ea typeface="맑은 고딕" pitchFamily="34" charset="-122"/>
+                <a:cs typeface="맑은 고딕" pitchFamily="34" charset="-120"/>
+              </a:rPr>
+              <a:t>결과 파일이 생기면 클라우드 쪽 일시중지</a:t>
+            </a:r>
+            <a:endParaRPr lang="en-US" sz="1700" dirty="0"/>
+          </a:p>
+        </p:txBody>
+      </p:sp>
+      <p:sp>
+        <p:nvSpPr>
+          <p:cNvPr id="13" name="Shape 11"/>
+          <p:cNvSpPr/>
+          <p:nvPr/>
+        </p:nvSpPr>
+        <p:spPr>
+          <a:xfrm>
+            <a:off x="731520" y="5367528"/>
+            <a:ext cx="384048" cy="384048"/>
+          </a:xfrm>
+          <a:prstGeom prst="roundRect">
+            <a:avLst>
+              <a:gd name="adj" fmla="val 14286"/>
+            </a:avLst>
+          </a:prstGeom>
+          <a:solidFill>
+            <a:srgbClr val="FFFFFF"/>
+          </a:solidFill>
+          <a:ln w="25400">
+            <a:solidFill>
+              <a:srgbClr val="0F8C7E"/>
+            </a:solidFill>
+            <a:prstDash val="solid"/>
+          </a:ln>
+        </p:spPr>
+      </p:sp>
+      <p:sp>
+        <p:nvSpPr>
+          <p:cNvPr id="14" name="Text 12"/>
+          <p:cNvSpPr txBox="1"/>
+          <p:nvPr/>
+        </p:nvSpPr>
+        <p:spPr>
+          <a:xfrm>
+            <a:off x="1371600" y="5349240"/>
+            <a:ext cx="10058400" cy="457200"/>
+          </a:xfrm>
+          <a:prstGeom prst="rect">
+            <a:avLst/>
+          </a:prstGeom>
+          <a:noFill/>
+          <a:ln/>
+        </p:spPr>
+        <p:txBody>
+          <a:bodyPr wrap="square" lIns="0" tIns="0" rIns="0" bIns="0" rtlCol="0" anchor="t"/>
+          <a:lstStyle/>
+          <a:p>
+            <a:pPr indent="0" marL="0">
+              <a:buNone/>
+            </a:pPr>
+            <a:r>
+              <a:rPr lang="en-US" sz="1700" dirty="0">
+                <a:solidFill>
+                  <a:srgbClr val="1C2333"/>
+                </a:solidFill>
+                <a:latin typeface="맑은 고딕" pitchFamily="34" charset="0"/>
+                <a:ea typeface="맑은 고딕" pitchFamily="34" charset="-122"/>
+                <a:cs typeface="맑은 고딕" pitchFamily="34" charset="-120"/>
+              </a:rPr>
+              <a:t>설명문 맨 앞에 한국어 블록, 맨 끝에 카톡 1건 추가</a:t>
+            </a:r>
+            <a:endParaRPr lang="en-US" sz="1700" dirty="0"/>
+          </a:p>
+        </p:txBody>
+      </p:sp>
+      <p:sp>
+        <p:nvSpPr>
+          <p:cNvPr id="25" name="Slide Number Placeholder 0"/>
+          <p:cNvSpPr>
+            <a:spLocks noGrp="1"/>
+          </p:cNvSpPr>
+          <p:nvPr>
+            <p:ph type="sldNum" sz="quarter" idx="4294967295"/>
+          </p:nvPr>
+        </p:nvSpPr>
+        <p:spPr>
+          <a:xfrm>
+            <a:off x="11247120" y="6400800"/>
+            <a:ext cx="548640" cy="274320"/>
+          </a:xfrm>
+          <a:prstGeom prst="rect">
+            <a:avLst/>
+          </a:prstGeom>
+          <a:extLst>
+            <a:ext uri="{C572A759-6A51-4108-AA02-DFA0A04FC94B}">
+              <ma14:wrappingTextBoxFlag xmlns:ma14="http://schemas.microsoft.com/office/mac/drawingml/2011/main" val="0"/>
+            </a:ext>
+          </a:extLst>
+        </p:spPr>
+        <p:txBody>
+          <a:bodyPr/>
+          <a:lstStyle>
+            <a:lvl1pPr>
+              <a:defRPr sz="1000">
+                <a:solidFill>
+                  <a:srgbClr val="6B7A90"/>
+                </a:solidFill>
+                <a:latin typeface="맑은 고딕"/>
+                <a:ea typeface="맑은 고딕"/>
+                <a:cs typeface="맑은 고딕"/>
+              </a:defRPr>
+            </a:lvl1pPr>
+          </a:lstStyle>
+          <a:p>
+            <a:pPr algn="l"/>
+            <a:fld id="{F7021451-1387-4CA6-816F-3879F97B5CBC}" type="slidenum">
+              <a:rPr b="0" lang="en-US"/>
+              <a:t>23</a:t>
+            </a:fld>
+            <a:endParaRPr lang="en-US"/>
+          </a:p>
+        </p:txBody>
+      </p:sp>
+    </p:spTree>
+  </p:cSld>
+  <p:clrMapOvr>
+    <a:masterClrMapping/>
+  </p:clrMapOvr>
+</p:sld>
+</file>
+
+<file path=ppt/slides/slide24.xml><?xml version="1.0" encoding="utf-8"?>
+<p:sld xmlns:a="http://schemas.openxmlformats.org/drawingml/2006/main" xmlns:r="http://schemas.openxmlformats.org/officeDocument/2006/relationships" xmlns:p="http://schemas.openxmlformats.org/presentationml/2006/main">
+  <p:cSld name="Slide 22">
+    <p:spTree>
+      <p:nvGrpSpPr>
+        <p:cNvPr id="1" name=""/>
+        <p:cNvGrpSpPr/>
+        <p:nvPr/>
+      </p:nvGrpSpPr>
+      <p:grpSpPr>
+        <a:xfrm>
+          <a:off x="0" y="0"/>
+          <a:ext cx="0" cy="0"/>
+          <a:chOff x="0" y="0"/>
+          <a:chExt cx="0" cy="0"/>
+        </a:xfrm>
+      </p:grpSpPr>
+      <p:sp>
+        <p:nvSpPr>
+          <p:cNvPr id="2" name="Text 0"/>
+          <p:cNvSpPr/>
+          <p:nvPr>
+            <p:ph idx="100" type="title" hasCustomPrompt="1"/>
+          </p:nvPr>
+        </p:nvSpPr>
+        <p:spPr>
+          <a:xfrm>
+            <a:off x="731520" y="2011680"/>
+            <a:ext cx="10698480" cy="1463040"/>
+          </a:xfrm>
+          <a:prstGeom prst="rect">
+            <a:avLst/>
+          </a:prstGeom>
+          <a:noFill/>
+          <a:ln/>
+        </p:spPr>
+        <p:txBody>
+          <a:bodyPr wrap="square" rtlCol="0" anchor="t"/>
+          <a:lstStyle/>
+          <a:p>
+            <a:pPr indent="0" marL="0">
+              <a:buNone/>
+            </a:pPr>
+            <a:r>
+              <a:rPr lang="en-US" sz="4000" b="1" dirty="0">
+                <a:solidFill>
+                  <a:srgbClr val="FFFFFF"/>
+                </a:solidFill>
+                <a:latin typeface="맑은 고딕" pitchFamily="34" charset="0"/>
+                <a:ea typeface="맑은 고딕" pitchFamily="34" charset="-122"/>
+                <a:cs typeface="맑은 고딕" pitchFamily="34" charset="-120"/>
+              </a:rPr>
+              <a:t>클라우드는 읽고 보고, 손이 필요한 일은 PC에서</a:t>
+            </a:r>
+            <a:endParaRPr lang="en-US" sz="4000" dirty="0"/>
+          </a:p>
+        </p:txBody>
+      </p:sp>
+      <p:sp>
+        <p:nvSpPr>
+          <p:cNvPr id="3" name="Text 0"/>
+          <p:cNvSpPr/>
+          <p:nvPr>
+            <p:ph idx="101" type="body" hasCustomPrompt="1"/>
+          </p:nvPr>
+        </p:nvSpPr>
+        <p:spPr>
+          <a:xfrm>
+            <a:off x="731520" y="3657600"/>
+            <a:ext cx="10698480" cy="1463040"/>
+          </a:xfrm>
+          <a:prstGeom prst="rect">
+            <a:avLst/>
+          </a:prstGeom>
+          <a:noFill/>
+          <a:ln/>
+        </p:spPr>
+        <p:txBody>
+          <a:bodyPr wrap="square" rtlCol="0" anchor="t"/>
+          <a:lstStyle/>
+          <a:p>
+            <a:pPr indent="0" marL="0">
+              <a:buNone/>
+            </a:pPr>
+            <a:r>
+              <a:rPr lang="en-US" sz="1800" dirty="0">
+                <a:solidFill>
+                  <a:srgbClr val="C9D3E2"/>
+                </a:solidFill>
+                <a:latin typeface="맑은 고딕" pitchFamily="34" charset="0"/>
+                <a:ea typeface="맑은 고딕" pitchFamily="34" charset="-122"/>
+                <a:cs typeface="맑은 고딕" pitchFamily="34" charset="-120"/>
+              </a:rPr>
+              <a:t>그리고 결과는 카톡으로 받는다 — 성공 표시가 아니라 결과 파일로 확인한다</a:t>
+            </a:r>
+            <a:endParaRPr lang="en-US" sz="1800" dirty="0"/>
+          </a:p>
+        </p:txBody>
+      </p:sp>
+      <p:sp>
+        <p:nvSpPr>
+          <p:cNvPr id="4" name="Text 2"/>
+          <p:cNvSpPr txBox="1"/>
+          <p:nvPr/>
+        </p:nvSpPr>
+        <p:spPr>
+          <a:xfrm>
+            <a:off x="731520" y="5760720"/>
+            <a:ext cx="10058400" cy="365760"/>
+          </a:xfrm>
+          <a:prstGeom prst="rect">
+            <a:avLst/>
+          </a:prstGeom>
+          <a:noFill/>
+          <a:ln/>
+        </p:spPr>
+        <p:txBody>
+          <a:bodyPr wrap="square" lIns="0" tIns="0" rIns="0" bIns="0" rtlCol="0" anchor="t"/>
+          <a:lstStyle/>
+          <a:p>
+            <a:pPr indent="0" marL="0">
+              <a:buNone/>
+            </a:pPr>
+            <a:r>
+              <a:rPr lang="en-US" sz="1300" dirty="0">
+                <a:solidFill>
+                  <a:srgbClr val="8FA0B8"/>
+                </a:solidFill>
+                <a:latin typeface="맑은 고딕" pitchFamily="34" charset="0"/>
+                <a:ea typeface="맑은 고딕" pitchFamily="34" charset="-122"/>
+                <a:cs typeface="맑은 고딕" pitchFamily="34" charset="-120"/>
+              </a:rPr>
+              <a:t>※ 메뉴 이름·동작은 Claude 앱 업데이트로 바뀔 수 있습니다 (2026년 10월 기준)</a:t>
+            </a:r>
+            <a:endParaRPr lang="en-US" sz="1300" dirty="0"/>
+          </a:p>
+        </p:txBody>
+      </p:sp>
+    </p:spTree>
+  </p:cSld>
+  <p:clrMapOvr>
+    <a:masterClrMapping/>
+  </p:clrMapOvr>
+</p:sld>
+</file>
+
+<file path=ppt/slides/slide3.xml><?xml version="1.0" encoding="utf-8"?>
+<p:sld xmlns:a="http://schemas.openxmlformats.org/drawingml/2006/main" xmlns:p="http://schemas.openxmlformats.org/presentationml/2006/main" xmlns:r="http://schemas.openxmlformats.org/officeDocument/2006/relationships">
+  <p:cSld>
+    <p:spTree>
+      <p:nvGrpSpPr>
+        <p:cNvPr id="1" name=""/>
+        <p:cNvGrpSpPr/>
+        <p:nvPr/>
+      </p:nvGrpSpPr>
+      <p:grpSpPr/>
+      <p:sp>
+        <p:nvSpPr>
+          <p:cNvPr id="2" name="Title 1"/>
+          <p:cNvSpPr>
+            <a:spLocks noGrp="1"/>
+          </p:cNvSpPr>
+          <p:nvPr>
+            <p:ph type="title" idx="100"/>
+          </p:nvPr>
+        </p:nvSpPr>
+        <p:spPr/>
+        <p:txBody>
+          <a:bodyPr/>
+          <a:lstStyle/>
+          <a:p>
+            <a:r>
+              <a:t>내가 연결한 커넥터 — 9개를 네 묶음으로 씁니다</a:t>
+            </a:r>
+          </a:p>
+        </p:txBody>
+      </p:sp>
+      <p:sp>
+        <p:nvSpPr>
+          <p:cNvPr id="3" name="Rounded Rectangle 2"/>
+          <p:cNvSpPr/>
+          <p:nvPr/>
+        </p:nvSpPr>
+        <p:spPr>
+          <a:xfrm>
+            <a:off x="822960" y="1397000"/>
+            <a:ext cx="10546080" cy="838200"/>
+          </a:xfrm>
+          <a:prstGeom prst="roundRect">
+            <a:avLst>
+              <a:gd name="adj" fmla="val 12000"/>
+            </a:avLst>
+          </a:prstGeom>
+          <a:solidFill>
+            <a:schemeClr val="bg2"/>
+          </a:solidFill>
+          <a:ln>
+            <a:noFill/>
+          </a:ln>
+          <a:effectLst/>
+        </p:spPr>
+        <p:style>
+          <a:lnRef idx="1">
+            <a:schemeClr val="accent1"/>
+          </a:lnRef>
+          <a:fillRef idx="3">
+            <a:schemeClr val="accent1"/>
+          </a:fillRef>
+          <a:effectRef idx="2">
+            <a:schemeClr val="accent1"/>
+          </a:effectRef>
+          <a:fontRef idx="minor">
+            <a:schemeClr val="lt1"/>
+          </a:fontRef>
+        </p:style>
+        <p:txBody>
+          <a:bodyPr rtlCol="0" anchor="ctr"/>
+          <a:lstStyle/>
+          <a:p>
+            <a:pPr algn="ctr"/>
+            <a:endParaRPr/>
+          </a:p>
+        </p:txBody>
+      </p:sp>
+      <p:sp>
+        <p:nvSpPr>
+          <p:cNvPr id="4" name="Rounded Rectangle 3"/>
+          <p:cNvSpPr/>
+          <p:nvPr/>
+        </p:nvSpPr>
+        <p:spPr>
+          <a:xfrm>
+            <a:off x="1003300" y="1606550"/>
+            <a:ext cx="2413000" cy="420000"/>
+          </a:xfrm>
+          <a:prstGeom prst="roundRect">
+            <a:avLst>
+              <a:gd name="adj" fmla="val 12000"/>
+            </a:avLst>
+          </a:prstGeom>
+          <a:solidFill>
+            <a:schemeClr val="accent1"/>
+          </a:solidFill>
+          <a:ln>
+            <a:noFill/>
+          </a:ln>
+          <a:effectLst/>
+        </p:spPr>
+        <p:style>
+          <a:lnRef idx="1">
+            <a:schemeClr val="accent1"/>
+          </a:lnRef>
+          <a:fillRef idx="3">
+            <a:schemeClr val="accent1"/>
+          </a:fillRef>
+          <a:effectRef idx="2">
+            <a:schemeClr val="accent1"/>
+          </a:effectRef>
+          <a:fontRef idx="minor">
+            <a:schemeClr val="lt1"/>
+          </a:fontRef>
+        </p:style>
+        <p:txBody>
+          <a:bodyPr lIns="0" rIns="0" rtlCol="0" anchor="ctr"/>
+          <a:lstStyle/>
+          <a:p>
+            <a:pPr algn="ctr"/>
+            <a:r>
+              <a:rPr sz="1700" b="1">
+                <a:solidFill>
+                  <a:schemeClr val="bg1"/>
+                </a:solidFill>
+                <a:latin typeface="맑은 고딕"/>
+              </a:rPr>
+              <a:t>주식 · 해외</a:t>
+            </a:r>
+          </a:p>
+        </p:txBody>
+      </p:sp>
+      <p:sp>
+        <p:nvSpPr>
+          <p:cNvPr id="5" name="TextBox 4"/>
+          <p:cNvSpPr txBox="1"/>
+          <p:nvPr/>
+        </p:nvSpPr>
+        <p:spPr>
+          <a:xfrm>
+            <a:off x="3619500" y="1473200"/>
+            <a:ext cx="7620000" cy="685800"/>
+          </a:xfrm>
+          <a:prstGeom prst="rect">
+            <a:avLst/>
+          </a:prstGeom>
+          <a:noFill/>
+        </p:spPr>
+        <p:txBody>
+          <a:bodyPr wrap="square" lIns="0" tIns="0" rIns="0" bIns="0" anchor="ctr">
+            <a:spAutoFit/>
+          </a:bodyPr>
+          <a:lstStyle/>
+          <a:p>
+            <a:pPr algn="l"/>
+            <a:r>
+              <a:rPr sz="1700" b="1">
+                <a:solidFill>
+                  <a:schemeClr val="tx1"/>
+                </a:solidFill>
+                <a:latin typeface="맑은 고딕"/>
+              </a:rPr>
+              <a:t>Alpha Vantage · FMP · Bigdata.com</a:t>
+            </a:r>
+          </a:p>
+          <a:p>
+            <a:pPr algn="l"/>
+            <a:r>
+              <a:rPr sz="1400" b="0">
+                <a:solidFill>
+                  <a:schemeClr val="tx2"/>
+                </a:solidFill>
+                <a:latin typeface="맑은 고딕"/>
+              </a:rPr>
+              <a:t>미국 주식 시세 · 재무제표 · 어닝콜 · 영문 뉴스</a:t>
+            </a:r>
+          </a:p>
+        </p:txBody>
+      </p:sp>
+      <p:sp>
+        <p:nvSpPr>
+          <p:cNvPr id="7" name="Rounded Rectangle 6"/>
+          <p:cNvSpPr/>
+          <p:nvPr/>
+        </p:nvSpPr>
+        <p:spPr>
+          <a:xfrm>
+            <a:off x="822960" y="2336800"/>
+            <a:ext cx="10546080" cy="838200"/>
+          </a:xfrm>
+          <a:prstGeom prst="roundRect">
+            <a:avLst>
+              <a:gd name="adj" fmla="val 12000"/>
+            </a:avLst>
+          </a:prstGeom>
+          <a:solidFill>
+            <a:schemeClr val="bg2"/>
+          </a:solidFill>
+          <a:ln>
+            <a:noFill/>
+          </a:ln>
+          <a:effectLst/>
+        </p:spPr>
+        <p:style>
+          <a:lnRef idx="1">
+            <a:schemeClr val="accent1"/>
+          </a:lnRef>
+          <a:fillRef idx="3">
+            <a:schemeClr val="accent1"/>
+          </a:fillRef>
+          <a:effectRef idx="2">
+            <a:schemeClr val="accent1"/>
+          </a:effectRef>
+          <a:fontRef idx="minor">
+            <a:schemeClr val="lt1"/>
+          </a:fontRef>
+        </p:style>
+        <p:txBody>
+          <a:bodyPr rtlCol="0" anchor="ctr"/>
+          <a:lstStyle/>
+          <a:p>
+            <a:pPr algn="ctr"/>
+            <a:endParaRPr/>
+          </a:p>
+        </p:txBody>
+      </p:sp>
+      <p:sp>
+        <p:nvSpPr>
+          <p:cNvPr id="8" name="Rounded Rectangle 7"/>
+          <p:cNvSpPr/>
+          <p:nvPr/>
+        </p:nvSpPr>
+        <p:spPr>
+          <a:xfrm>
+            <a:off x="1003300" y="2546350"/>
+            <a:ext cx="2413000" cy="420000"/>
+          </a:xfrm>
+          <a:prstGeom prst="roundRect">
+            <a:avLst>
+              <a:gd name="adj" fmla="val 12000"/>
+            </a:avLst>
+          </a:prstGeom>
+          <a:solidFill>
+            <a:schemeClr val="accent3"/>
+          </a:solidFill>
+          <a:ln>
+            <a:noFill/>
+          </a:ln>
+          <a:effectLst/>
+        </p:spPr>
+        <p:style>
+          <a:lnRef idx="1">
+            <a:schemeClr val="accent1"/>
+          </a:lnRef>
+          <a:fillRef idx="3">
+            <a:schemeClr val="accent1"/>
+          </a:fillRef>
+          <a:effectRef idx="2">
+            <a:schemeClr val="accent1"/>
+          </a:effectRef>
+          <a:fontRef idx="minor">
+            <a:schemeClr val="lt1"/>
+          </a:fontRef>
+        </p:style>
+        <p:txBody>
+          <a:bodyPr lIns="0" rIns="0" rtlCol="0" anchor="ctr"/>
+          <a:lstStyle/>
+          <a:p>
+            <a:pPr algn="ctr"/>
+            <a:r>
+              <a:rPr sz="1700" b="1">
+                <a:solidFill>
+                  <a:schemeClr val="bg1"/>
+                </a:solidFill>
+                <a:latin typeface="맑은 고딕"/>
+              </a:rPr>
+              <a:t>한국 서비스</a:t>
+            </a:r>
+          </a:p>
+        </p:txBody>
+      </p:sp>
+      <p:sp>
+        <p:nvSpPr>
+          <p:cNvPr id="10" name="TextBox 9"/>
+          <p:cNvSpPr txBox="1"/>
+          <p:nvPr/>
+        </p:nvSpPr>
+        <p:spPr>
+          <a:xfrm>
+            <a:off x="3619500" y="2413000"/>
+            <a:ext cx="7620000" cy="685800"/>
+          </a:xfrm>
+          <a:prstGeom prst="rect">
+            <a:avLst/>
+          </a:prstGeom>
+          <a:noFill/>
+        </p:spPr>
+        <p:txBody>
+          <a:bodyPr wrap="square" lIns="0" tIns="0" rIns="0" bIns="0" anchor="ctr">
+            <a:spAutoFit/>
+          </a:bodyPr>
+          <a:lstStyle/>
+          <a:p>
+            <a:pPr algn="l"/>
+            <a:r>
+              <a:rPr sz="1700" b="1">
+                <a:solidFill>
+                  <a:schemeClr val="tx1"/>
+                </a:solidFill>
+                <a:latin typeface="맑은 고딕"/>
+              </a:rPr>
+              <a:t>PlayMCP — 카카오가 모아 둔 서버 묶음 (안에 9종)</a:t>
+            </a:r>
+          </a:p>
+          <a:p>
+            <a:pPr algn="l"/>
+            <a:r>
+              <a:rPr sz="1400" b="0">
+                <a:solidFill>
+                  <a:schemeClr val="tx2"/>
+                </a:solidFill>
+                <a:latin typeface="맑은 고딕"/>
+              </a:rPr>
+              <a:t>카톡 나에게 보내기 · 카카오맵 · 한국주식 · DART · 실거래가 · 전세안심 · 법률</a:t>
+            </a:r>
+          </a:p>
+        </p:txBody>
+      </p:sp>
+      <p:sp>
+        <p:nvSpPr>
+          <p:cNvPr id="12" name="Rounded Rectangle 11"/>
+          <p:cNvSpPr/>
+          <p:nvPr/>
+        </p:nvSpPr>
+        <p:spPr>
+          <a:xfrm>
+            <a:off x="822960" y="3276600"/>
+            <a:ext cx="10546080" cy="838200"/>
+          </a:xfrm>
+          <a:prstGeom prst="roundRect">
+            <a:avLst>
+              <a:gd name="adj" fmla="val 12000"/>
+            </a:avLst>
+          </a:prstGeom>
+          <a:solidFill>
+            <a:schemeClr val="bg2"/>
+          </a:solidFill>
+          <a:ln>
+            <a:noFill/>
+          </a:ln>
+          <a:effectLst/>
+        </p:spPr>
+        <p:style>
+          <a:lnRef idx="1">
+            <a:schemeClr val="accent1"/>
+          </a:lnRef>
+          <a:fillRef idx="3">
+            <a:schemeClr val="accent1"/>
+          </a:fillRef>
+          <a:effectRef idx="2">
+            <a:schemeClr val="accent1"/>
+          </a:effectRef>
+          <a:fontRef idx="minor">
+            <a:schemeClr val="lt1"/>
+          </a:fontRef>
+        </p:style>
+        <p:txBody>
+          <a:bodyPr rtlCol="0" anchor="ctr"/>
+          <a:lstStyle/>
+          <a:p>
+            <a:pPr algn="ctr"/>
+            <a:endParaRPr/>
+          </a:p>
+        </p:txBody>
+      </p:sp>
+      <p:sp>
+        <p:nvSpPr>
+          <p:cNvPr id="13" name="Rounded Rectangle 12"/>
+          <p:cNvSpPr/>
+          <p:nvPr/>
+        </p:nvSpPr>
+        <p:spPr>
+          <a:xfrm>
+            <a:off x="1003300" y="3486150"/>
+            <a:ext cx="2413000" cy="420000"/>
+          </a:xfrm>
+          <a:prstGeom prst="roundRect">
+            <a:avLst>
+              <a:gd name="adj" fmla="val 12000"/>
+            </a:avLst>
+          </a:prstGeom>
+          <a:solidFill>
+            <a:schemeClr val="accent5"/>
+          </a:solidFill>
+          <a:ln>
+            <a:noFill/>
+          </a:ln>
+          <a:effectLst/>
+        </p:spPr>
+        <p:style>
+          <a:lnRef idx="1">
+            <a:schemeClr val="accent1"/>
+          </a:lnRef>
+          <a:fillRef idx="3">
+            <a:schemeClr val="accent1"/>
+          </a:fillRef>
+          <a:effectRef idx="2">
+            <a:schemeClr val="accent1"/>
+          </a:effectRef>
+          <a:fontRef idx="minor">
+            <a:schemeClr val="lt1"/>
+          </a:fontRef>
+        </p:style>
+        <p:txBody>
+          <a:bodyPr lIns="0" rIns="0" rtlCol="0" anchor="ctr"/>
+          <a:lstStyle/>
+          <a:p>
+            <a:pPr algn="ctr"/>
+            <a:r>
+              <a:rPr sz="1700" b="1">
+                <a:solidFill>
+                  <a:schemeClr val="bg1"/>
+                </a:solidFill>
+                <a:latin typeface="맑은 고딕"/>
+              </a:rPr>
+              <a:t>메일 · 일정 · 문서</a:t>
+            </a:r>
+          </a:p>
+        </p:txBody>
+      </p:sp>
+      <p:sp>
+        <p:nvSpPr>
+          <p:cNvPr id="15" name="TextBox 14"/>
+          <p:cNvSpPr txBox="1"/>
+          <p:nvPr/>
+        </p:nvSpPr>
+        <p:spPr>
+          <a:xfrm>
+            <a:off x="3619500" y="3352800"/>
+            <a:ext cx="7620000" cy="685800"/>
+          </a:xfrm>
+          <a:prstGeom prst="rect">
+            <a:avLst/>
+          </a:prstGeom>
+          <a:noFill/>
+        </p:spPr>
+        <p:txBody>
+          <a:bodyPr wrap="square" lIns="0" tIns="0" rIns="0" bIns="0" anchor="ctr">
+            <a:spAutoFit/>
+          </a:bodyPr>
+          <a:lstStyle/>
+          <a:p>
+            <a:pPr algn="l"/>
+            <a:r>
+              <a:rPr sz="1700" b="1">
+                <a:solidFill>
+                  <a:schemeClr val="tx1"/>
+                </a:solidFill>
+                <a:latin typeface="맑은 고딕"/>
+              </a:rPr>
+              <a:t>Gmail · Google Calendar · Google Drive · Notion</a:t>
+            </a:r>
+          </a:p>
+          <a:p>
+            <a:pPr algn="l"/>
+            <a:r>
+              <a:rPr sz="1400" b="0">
+                <a:solidFill>
+                  <a:schemeClr val="tx2"/>
+                </a:solidFill>
+                <a:latin typeface="맑은 고딕"/>
+              </a:rPr>
+              <a:t>메일 찾기·초안 · 일정 확인 · 파일 읽기 · 노트 정리</a:t>
+            </a:r>
+          </a:p>
+        </p:txBody>
+      </p:sp>
+      <p:sp>
+        <p:nvSpPr>
+          <p:cNvPr id="17" name="Rounded Rectangle 16"/>
+          <p:cNvSpPr/>
+          <p:nvPr/>
+        </p:nvSpPr>
+        <p:spPr>
+          <a:xfrm>
+            <a:off x="822960" y="4216400"/>
+            <a:ext cx="10546080" cy="838200"/>
+          </a:xfrm>
+          <a:prstGeom prst="roundRect">
+            <a:avLst>
+              <a:gd name="adj" fmla="val 12000"/>
+            </a:avLst>
+          </a:prstGeom>
+          <a:solidFill>
+            <a:schemeClr val="bg2"/>
+          </a:solidFill>
+          <a:ln>
+            <a:noFill/>
+          </a:ln>
+          <a:effectLst/>
+        </p:spPr>
+        <p:style>
+          <a:lnRef idx="1">
+            <a:schemeClr val="accent1"/>
+          </a:lnRef>
+          <a:fillRef idx="3">
+            <a:schemeClr val="accent1"/>
+          </a:fillRef>
+          <a:effectRef idx="2">
+            <a:schemeClr val="accent1"/>
+          </a:effectRef>
+          <a:fontRef idx="minor">
+            <a:schemeClr val="lt1"/>
+          </a:fontRef>
+        </p:style>
+        <p:txBody>
+          <a:bodyPr rtlCol="0" anchor="ctr"/>
+          <a:lstStyle/>
+          <a:p>
+            <a:pPr algn="ctr"/>
+            <a:endParaRPr/>
+          </a:p>
+        </p:txBody>
+      </p:sp>
+      <p:sp>
+        <p:nvSpPr>
+          <p:cNvPr id="18" name="Rounded Rectangle 17"/>
+          <p:cNvSpPr/>
+          <p:nvPr/>
+        </p:nvSpPr>
+        <p:spPr>
+          <a:xfrm>
+            <a:off x="1003300" y="4425950"/>
+            <a:ext cx="2413000" cy="420000"/>
+          </a:xfrm>
+          <a:prstGeom prst="roundRect">
+            <a:avLst>
+              <a:gd name="adj" fmla="val 12000"/>
+            </a:avLst>
+          </a:prstGeom>
+          <a:solidFill>
+            <a:schemeClr val="accent2"/>
+          </a:solidFill>
+          <a:ln>
+            <a:noFill/>
+          </a:ln>
+          <a:effectLst/>
+        </p:spPr>
+        <p:style>
+          <a:lnRef idx="1">
+            <a:schemeClr val="accent1"/>
+          </a:lnRef>
+          <a:fillRef idx="3">
+            <a:schemeClr val="accent1"/>
+          </a:fillRef>
+          <a:effectRef idx="2">
+            <a:schemeClr val="accent1"/>
+          </a:effectRef>
+          <a:fontRef idx="minor">
+            <a:schemeClr val="lt1"/>
+          </a:fontRef>
+        </p:style>
+        <p:txBody>
+          <a:bodyPr lIns="0" rIns="0" rtlCol="0" anchor="ctr"/>
+          <a:lstStyle/>
+          <a:p>
+            <a:pPr algn="ctr"/>
+            <a:r>
+              <a:rPr sz="1700" b="1">
+                <a:solidFill>
+                  <a:schemeClr val="bg1"/>
+                </a:solidFill>
+                <a:latin typeface="맑은 고딕"/>
+              </a:rPr>
+              <a:t>디자인</a:t>
+            </a:r>
+          </a:p>
+        </p:txBody>
+      </p:sp>
+      <p:sp>
+        <p:nvSpPr>
+          <p:cNvPr id="20" name="TextBox 19"/>
+          <p:cNvSpPr txBox="1"/>
+          <p:nvPr/>
+        </p:nvSpPr>
+        <p:spPr>
+          <a:xfrm>
+            <a:off x="3619500" y="4292600"/>
+            <a:ext cx="7620000" cy="685800"/>
+          </a:xfrm>
+          <a:prstGeom prst="rect">
+            <a:avLst/>
+          </a:prstGeom>
+          <a:noFill/>
+        </p:spPr>
+        <p:txBody>
+          <a:bodyPr wrap="square" lIns="0" tIns="0" rIns="0" bIns="0" anchor="ctr">
+            <a:spAutoFit/>
+          </a:bodyPr>
+          <a:lstStyle/>
+          <a:p>
+            <a:pPr algn="l"/>
+            <a:r>
+              <a:rPr sz="1700" b="1">
+                <a:solidFill>
+                  <a:schemeClr val="tx1"/>
+                </a:solidFill>
+                <a:latin typeface="맑은 고딕"/>
+              </a:rPr>
+              <a:t>Figma</a:t>
+            </a:r>
+          </a:p>
+          <a:p>
+            <a:pPr algn="l"/>
+            <a:r>
+              <a:rPr sz="1400" b="0">
+                <a:solidFill>
+                  <a:schemeClr val="tx2"/>
+                </a:solidFill>
+                <a:latin typeface="맑은 고딕"/>
+              </a:rPr>
+              <a:t>디자인 화면 읽기 · 다이어그램 만들기</a:t>
+            </a:r>
+          </a:p>
+        </p:txBody>
+      </p:sp>
+      <p:sp>
+        <p:nvSpPr>
+          <p:cNvPr id="22" name="Rounded Rectangle 21"/>
+          <p:cNvSpPr/>
+          <p:nvPr/>
+        </p:nvSpPr>
+        <p:spPr>
+          <a:xfrm>
+            <a:off x="822960" y="5207000"/>
+            <a:ext cx="10546080" cy="558800"/>
+          </a:xfrm>
+          <a:prstGeom prst="roundRect">
+            <a:avLst>
+              <a:gd name="adj" fmla="val 12000"/>
+            </a:avLst>
+          </a:prstGeom>
+          <a:solidFill>
+            <a:schemeClr val="tx1"/>
+          </a:solidFill>
+          <a:ln>
+            <a:noFill/>
+          </a:ln>
+          <a:effectLst/>
+        </p:spPr>
+        <p:style>
+          <a:lnRef idx="1">
+            <a:schemeClr val="accent1"/>
+          </a:lnRef>
+          <a:fillRef idx="3">
+            <a:schemeClr val="accent1"/>
+          </a:fillRef>
+          <a:effectRef idx="2">
+            <a:schemeClr val="accent1"/>
+          </a:effectRef>
+          <a:fontRef idx="minor">
+            <a:schemeClr val="lt1"/>
+          </a:fontRef>
+        </p:style>
+        <p:txBody>
+          <a:bodyPr rtlCol="0" anchor="ctr"/>
+          <a:lstStyle/>
+          <a:p>
+            <a:pPr algn="ctr"/>
+            <a:r>
+              <a:rPr sz="1600" b="1">
+                <a:solidFill>
+                  <a:schemeClr val="bg1"/>
+                </a:solidFill>
+                <a:latin typeface="맑은 고딕"/>
+              </a:rPr>
+              <a:t>커넥터는 내 계정에 붙습니다 — 엑셀·DuckDB 같은 내 PC MCP와는 따로 셉니다</a:t>
+            </a:r>
+          </a:p>
+        </p:txBody>
+      </p:sp>
+      <p:sp>
+        <p:nvSpPr>
+          <p:cNvPr id="23" name="TextBox 22"/>
+          <p:cNvSpPr txBox="1"/>
+          <p:nvPr/>
+        </p:nvSpPr>
+        <p:spPr>
+          <a:xfrm>
+            <a:off x="822960" y="5867400"/>
+            <a:ext cx="10546080" cy="508000"/>
+          </a:xfrm>
+          <a:prstGeom prst="rect">
+            <a:avLst/>
+          </a:prstGeom>
+          <a:noFill/>
+        </p:spPr>
+        <p:txBody>
+          <a:bodyPr wrap="square" lIns="0" tIns="0" rIns="0" bIns="0" anchor="ctr">
+            <a:spAutoFit/>
+          </a:bodyPr>
+          <a:lstStyle/>
+          <a:p>
+            <a:pPr algn="l"/>
+            <a:r>
+              <a:rPr sz="1300" b="0">
+                <a:solidFill>
+                  <a:schemeClr val="accent5"/>
+                </a:solidFill>
+                <a:latin typeface="맑은 고딕"/>
+              </a:rPr>
+              <a:t>2026-10-17 기준 내 계정 · Claude Docs · visualize 는 Claude 기본 제공이라 뺐습니다 · 오늘 카톡 보고(블록 2)는 PlayMCP 를 씁니다</a:t>
+            </a:r>
+          </a:p>
+        </p:txBody>
+      </p:sp>
+    </p:spTree>
+  </p:cSld>
+  <p:clrMapOvr>
+    <a:masterClrMapping/>
+  </p:clrMapOvr>
+</p:sld>
+</file>
+
+<file path=ppt/slides/slide4.xml><?xml version="1.0" encoding="utf-8"?>
 <p:sld xmlns:a="http://schemas.openxmlformats.org/drawingml/2006/main" xmlns:r="http://schemas.openxmlformats.org/officeDocument/2006/relationships" xmlns:p="http://schemas.openxmlformats.org/presentationml/2006/main">
   <p:cSld name="Slide 2">
     <p:spTree>
@@ -11397,7 +16857,7 @@
             <a:pPr algn="l"/>
             <a:fld id="{F7021451-1387-4CA6-816F-3879F97B5CBC}" type="slidenum">
               <a:rPr b="0" lang="en-US"/>
-              <a:t>2</a:t>
+              <a:t>4</a:t>
             </a:fld>
             <a:endParaRPr lang="en-US"/>
           </a:p>
@@ -11411,1453 +16871,7 @@
 </p:sld>
 </file>
 
-<file path=ppt/slides/slide20.xml><?xml version="1.0" encoding="utf-8"?>
-<p:sld xmlns:a="http://schemas.openxmlformats.org/drawingml/2006/main" xmlns:r="http://schemas.openxmlformats.org/officeDocument/2006/relationships" xmlns:p="http://schemas.openxmlformats.org/presentationml/2006/main">
-  <p:cSld name="Slide 20">
-    <p:spTree>
-      <p:nvGrpSpPr>
-        <p:cNvPr id="1" name=""/>
-        <p:cNvGrpSpPr/>
-        <p:nvPr/>
-      </p:nvGrpSpPr>
-      <p:grpSpPr>
-        <a:xfrm>
-          <a:off x="0" y="0"/>
-          <a:ext cx="0" cy="0"/>
-          <a:chOff x="0" y="0"/>
-          <a:chExt cx="0" cy="0"/>
-        </a:xfrm>
-      </p:grpSpPr>
-      <p:sp>
-        <p:nvSpPr>
-          <p:cNvPr id="2" name="Text 0"/>
-          <p:cNvSpPr/>
-          <p:nvPr>
-            <p:ph idx="100" type="title" hasCustomPrompt="1"/>
-          </p:nvPr>
-        </p:nvSpPr>
-        <p:spPr>
-          <a:xfrm>
-            <a:off x="548640" y="320040"/>
-            <a:ext cx="11064240" cy="822960"/>
-          </a:xfrm>
-          <a:prstGeom prst="rect">
-            <a:avLst/>
-          </a:prstGeom>
-          <a:noFill/>
-          <a:ln/>
-        </p:spPr>
-        <p:txBody>
-          <a:bodyPr wrap="square" rtlCol="0" anchor="ctr"/>
-          <a:lstStyle/>
-          <a:p>
-            <a:pPr indent="0" marL="0">
-              <a:buNone/>
-            </a:pPr>
-            <a:r>
-              <a:rPr lang="en-US" sz="2800" b="1" dirty="0">
-                <a:solidFill>
-                  <a:srgbClr val="1C2333"/>
-                </a:solidFill>
-                <a:latin typeface="맑은 고딕" pitchFamily="34" charset="0"/>
-                <a:ea typeface="맑은 고딕" pitchFamily="34" charset="-122"/>
-                <a:cs typeface="맑은 고딕" pitchFamily="34" charset="-120"/>
-              </a:rPr>
-              <a:t>안전 수칙 — 이것만은 지킨다</a:t>
-            </a:r>
-            <a:endParaRPr lang="en-US" sz="2800" dirty="0"/>
-          </a:p>
-        </p:txBody>
-      </p:sp>
-      <p:sp>
-        <p:nvSpPr>
-          <p:cNvPr id="3" name="card"/>
-          <p:cNvSpPr/>
-          <p:nvPr/>
-        </p:nvSpPr>
-        <p:spPr>
-          <a:xfrm>
-            <a:off x="548640" y="1417320"/>
-            <a:ext cx="5440680" cy="1920240"/>
-          </a:xfrm>
-          <a:prstGeom prst="roundRect">
-            <a:avLst>
-              <a:gd name="adj" fmla="val 3810"/>
-            </a:avLst>
-          </a:prstGeom>
-          <a:solidFill>
-            <a:srgbClr val="E4F3F1"/>
-          </a:solidFill>
-          <a:ln w="12700">
-            <a:solidFill>
-              <a:srgbClr val="E4F3F1"/>
-            </a:solidFill>
-            <a:prstDash val="solid"/>
-          </a:ln>
-        </p:spPr>
-      </p:sp>
-      <p:sp>
-        <p:nvSpPr>
-          <p:cNvPr id="4" name="Shape 2"/>
-          <p:cNvSpPr/>
-          <p:nvPr/>
-        </p:nvSpPr>
-        <p:spPr>
-          <a:xfrm>
-            <a:off x="822960" y="1691640"/>
-            <a:ext cx="502920" cy="502920"/>
-          </a:xfrm>
-          <a:prstGeom prst="ellipse">
-            <a:avLst/>
-          </a:prstGeom>
-          <a:solidFill>
-            <a:srgbClr val="0F8C7E"/>
-          </a:solidFill>
-          <a:ln w="12700">
-            <a:solidFill>
-              <a:srgbClr val="0F8C7E"/>
-            </a:solidFill>
-            <a:prstDash val="solid"/>
-          </a:ln>
-        </p:spPr>
-      </p:sp>
-      <p:sp>
-        <p:nvSpPr>
-          <p:cNvPr id="5" name="Text 3"/>
-          <p:cNvSpPr txBox="1"/>
-          <p:nvPr/>
-        </p:nvSpPr>
-        <p:spPr>
-          <a:xfrm>
-            <a:off x="822960" y="1691640"/>
-            <a:ext cx="502920" cy="502920"/>
-          </a:xfrm>
-          <a:prstGeom prst="rect">
-            <a:avLst/>
-          </a:prstGeom>
-          <a:noFill/>
-          <a:ln/>
-        </p:spPr>
-        <p:txBody>
-          <a:bodyPr wrap="square" lIns="0" tIns="0" rIns="0" bIns="0" rtlCol="0" anchor="ctr"/>
-          <a:lstStyle/>
-          <a:p>
-            <a:pPr algn="ctr" indent="0" marL="0">
-              <a:buNone/>
-            </a:pPr>
-            <a:r>
-              <a:rPr lang="en-US" sz="1600" b="1" dirty="0">
-                <a:solidFill>
-                  <a:srgbClr val="FFFFFF"/>
-                </a:solidFill>
-                <a:latin typeface="맑은 고딕" pitchFamily="34" charset="0"/>
-                <a:ea typeface="맑은 고딕" pitchFamily="34" charset="-122"/>
-                <a:cs typeface="맑은 고딕" pitchFamily="34" charset="-120"/>
-              </a:rPr>
-              <a:t>1</a:t>
-            </a:r>
-            <a:endParaRPr lang="en-US" sz="1600" dirty="0"/>
-          </a:p>
-        </p:txBody>
-      </p:sp>
-      <p:sp>
-        <p:nvSpPr>
-          <p:cNvPr id="6" name="Text 4"/>
-          <p:cNvSpPr txBox="1"/>
-          <p:nvPr/>
-        </p:nvSpPr>
-        <p:spPr>
-          <a:xfrm>
-            <a:off x="1508760" y="1691640"/>
-            <a:ext cx="4297680" cy="822960"/>
-          </a:xfrm>
-          <a:prstGeom prst="rect">
-            <a:avLst/>
-          </a:prstGeom>
-          <a:noFill/>
-          <a:ln/>
-        </p:spPr>
-        <p:txBody>
-          <a:bodyPr wrap="square" lIns="0" tIns="0" rIns="0" bIns="0" rtlCol="0" anchor="t"/>
-          <a:lstStyle/>
-          <a:p>
-            <a:pPr indent="0" marL="0">
-              <a:buNone/>
-            </a:pPr>
-            <a:r>
-              <a:rPr lang="en-US" sz="1800" b="1" dirty="0">
-                <a:solidFill>
-                  <a:srgbClr val="1C2333"/>
-                </a:solidFill>
-                <a:latin typeface="맑은 고딕" pitchFamily="34" charset="0"/>
-                <a:ea typeface="맑은 고딕" pitchFamily="34" charset="-122"/>
-                <a:cs typeface="맑은 고딕" pitchFamily="34" charset="-120"/>
-              </a:rPr>
-              <a:t>API 키·인증키는 채팅에 붙여 넣지 않는다</a:t>
-            </a:r>
-            <a:endParaRPr lang="en-US" sz="1800" dirty="0"/>
-          </a:p>
-        </p:txBody>
-      </p:sp>
-      <p:sp>
-        <p:nvSpPr>
-          <p:cNvPr id="7" name="Text 5"/>
-          <p:cNvSpPr txBox="1"/>
-          <p:nvPr/>
-        </p:nvSpPr>
-        <p:spPr>
-          <a:xfrm>
-            <a:off x="1508760" y="2560320"/>
-            <a:ext cx="4297680" cy="640080"/>
-          </a:xfrm>
-          <a:prstGeom prst="rect">
-            <a:avLst/>
-          </a:prstGeom>
-          <a:noFill/>
-          <a:ln/>
-        </p:spPr>
-        <p:txBody>
-          <a:bodyPr wrap="square" lIns="0" tIns="0" rIns="0" bIns="0" rtlCol="0" anchor="t"/>
-          <a:lstStyle/>
-          <a:p>
-            <a:pPr indent="0" marL="0">
-              <a:buNone/>
-            </a:pPr>
-            <a:r>
-              <a:rPr lang="en-US" sz="1400" dirty="0">
-                <a:solidFill>
-                  <a:srgbClr val="6B7A90"/>
-                </a:solidFill>
-                <a:latin typeface="맑은 고딕" pitchFamily="34" charset="0"/>
-                <a:ea typeface="맑은 고딕" pitchFamily="34" charset="-122"/>
-                <a:cs typeface="맑은 고딕" pitchFamily="34" charset="-120"/>
-              </a:rPr>
-              <a:t>키는 PC 안에서 스크립트로 옮긴다</a:t>
-            </a:r>
-            <a:endParaRPr lang="en-US" sz="1400" dirty="0"/>
-          </a:p>
-        </p:txBody>
-      </p:sp>
-      <p:sp>
-        <p:nvSpPr>
-          <p:cNvPr id="8" name="card"/>
-          <p:cNvSpPr/>
-          <p:nvPr/>
-        </p:nvSpPr>
-        <p:spPr>
-          <a:xfrm>
-            <a:off x="6172200" y="1417320"/>
-            <a:ext cx="5440680" cy="1920240"/>
-          </a:xfrm>
-          <a:prstGeom prst="roundRect">
-            <a:avLst>
-              <a:gd name="adj" fmla="val 3810"/>
-            </a:avLst>
-          </a:prstGeom>
-          <a:solidFill>
-            <a:srgbClr val="E4F3F1"/>
-          </a:solidFill>
-          <a:ln w="12700">
-            <a:solidFill>
-              <a:srgbClr val="E4F3F1"/>
-            </a:solidFill>
-            <a:prstDash val="solid"/>
-          </a:ln>
-        </p:spPr>
-      </p:sp>
-      <p:sp>
-        <p:nvSpPr>
-          <p:cNvPr id="9" name="Shape 7"/>
-          <p:cNvSpPr/>
-          <p:nvPr/>
-        </p:nvSpPr>
-        <p:spPr>
-          <a:xfrm>
-            <a:off x="6446520" y="1691640"/>
-            <a:ext cx="502920" cy="502920"/>
-          </a:xfrm>
-          <a:prstGeom prst="ellipse">
-            <a:avLst/>
-          </a:prstGeom>
-          <a:solidFill>
-            <a:srgbClr val="0F8C7E"/>
-          </a:solidFill>
-          <a:ln w="12700">
-            <a:solidFill>
-              <a:srgbClr val="0F8C7E"/>
-            </a:solidFill>
-            <a:prstDash val="solid"/>
-          </a:ln>
-        </p:spPr>
-      </p:sp>
-      <p:sp>
-        <p:nvSpPr>
-          <p:cNvPr id="10" name="Text 8"/>
-          <p:cNvSpPr txBox="1"/>
-          <p:nvPr/>
-        </p:nvSpPr>
-        <p:spPr>
-          <a:xfrm>
-            <a:off x="6446520" y="1691640"/>
-            <a:ext cx="502920" cy="502920"/>
-          </a:xfrm>
-          <a:prstGeom prst="rect">
-            <a:avLst/>
-          </a:prstGeom>
-          <a:noFill/>
-          <a:ln/>
-        </p:spPr>
-        <p:txBody>
-          <a:bodyPr wrap="square" lIns="0" tIns="0" rIns="0" bIns="0" rtlCol="0" anchor="ctr"/>
-          <a:lstStyle/>
-          <a:p>
-            <a:pPr algn="ctr" indent="0" marL="0">
-              <a:buNone/>
-            </a:pPr>
-            <a:r>
-              <a:rPr lang="en-US" sz="1600" b="1" dirty="0">
-                <a:solidFill>
-                  <a:srgbClr val="FFFFFF"/>
-                </a:solidFill>
-                <a:latin typeface="맑은 고딕" pitchFamily="34" charset="0"/>
-                <a:ea typeface="맑은 고딕" pitchFamily="34" charset="-122"/>
-                <a:cs typeface="맑은 고딕" pitchFamily="34" charset="-120"/>
-              </a:rPr>
-              <a:t>2</a:t>
-            </a:r>
-            <a:endParaRPr lang="en-US" sz="1600" dirty="0"/>
-          </a:p>
-        </p:txBody>
-      </p:sp>
-      <p:sp>
-        <p:nvSpPr>
-          <p:cNvPr id="11" name="Text 9"/>
-          <p:cNvSpPr txBox="1"/>
-          <p:nvPr/>
-        </p:nvSpPr>
-        <p:spPr>
-          <a:xfrm>
-            <a:off x="7132320" y="1691640"/>
-            <a:ext cx="4297680" cy="822960"/>
-          </a:xfrm>
-          <a:prstGeom prst="rect">
-            <a:avLst/>
-          </a:prstGeom>
-          <a:noFill/>
-          <a:ln/>
-        </p:spPr>
-        <p:txBody>
-          <a:bodyPr wrap="square" lIns="0" tIns="0" rIns="0" bIns="0" rtlCol="0" anchor="t"/>
-          <a:lstStyle/>
-          <a:p>
-            <a:pPr indent="0" marL="0">
-              <a:buNone/>
-            </a:pPr>
-            <a:r>
-              <a:rPr lang="en-US" sz="1800" b="1" dirty="0">
-                <a:solidFill>
-                  <a:srgbClr val="1C2333"/>
-                </a:solidFill>
-                <a:latin typeface="맑은 고딕" pitchFamily="34" charset="0"/>
-                <a:ea typeface="맑은 고딕" pitchFamily="34" charset="-122"/>
-                <a:cs typeface="맑은 고딕" pitchFamily="34" charset="-120"/>
-              </a:rPr>
-              <a:t>설정·설명문은 고치기 전에 백업</a:t>
-            </a:r>
-            <a:endParaRPr lang="en-US" sz="1800" dirty="0"/>
-          </a:p>
-        </p:txBody>
-      </p:sp>
-      <p:sp>
-        <p:nvSpPr>
-          <p:cNvPr id="12" name="Text 10"/>
-          <p:cNvSpPr txBox="1"/>
-          <p:nvPr/>
-        </p:nvSpPr>
-        <p:spPr>
-          <a:xfrm>
-            <a:off x="7132320" y="2560320"/>
-            <a:ext cx="4297680" cy="640080"/>
-          </a:xfrm>
-          <a:prstGeom prst="rect">
-            <a:avLst/>
-          </a:prstGeom>
-          <a:noFill/>
-          <a:ln/>
-        </p:spPr>
-        <p:txBody>
-          <a:bodyPr wrap="square" lIns="0" tIns="0" rIns="0" bIns="0" rtlCol="0" anchor="t"/>
-          <a:lstStyle/>
-          <a:p>
-            <a:pPr indent="0" marL="0">
-              <a:buNone/>
-            </a:pPr>
-            <a:r>
-              <a:rPr lang="en-US" sz="1400" dirty="0">
-                <a:solidFill>
-                  <a:srgbClr val="6B7A90"/>
-                </a:solidFill>
-                <a:latin typeface="맑은 고딕" pitchFamily="34" charset="0"/>
-                <a:ea typeface="맑은 고딕" pitchFamily="34" charset="-122"/>
-                <a:cs typeface="맑은 고딕" pitchFamily="34" charset="-120"/>
-              </a:rPr>
-              <a:t>파일 옆에 .bak_날짜시각 사본, 설명문은 전·후 둘 다</a:t>
-            </a:r>
-            <a:endParaRPr lang="en-US" sz="1400" dirty="0"/>
-          </a:p>
-        </p:txBody>
-      </p:sp>
-      <p:sp>
-        <p:nvSpPr>
-          <p:cNvPr id="13" name="card"/>
-          <p:cNvSpPr/>
-          <p:nvPr/>
-        </p:nvSpPr>
-        <p:spPr>
-          <a:xfrm>
-            <a:off x="548640" y="3611880"/>
-            <a:ext cx="5440680" cy="1920240"/>
-          </a:xfrm>
-          <a:prstGeom prst="roundRect">
-            <a:avLst>
-              <a:gd name="adj" fmla="val 3810"/>
-            </a:avLst>
-          </a:prstGeom>
-          <a:solidFill>
-            <a:srgbClr val="E4F3F1"/>
-          </a:solidFill>
-          <a:ln w="12700">
-            <a:solidFill>
-              <a:srgbClr val="E4F3F1"/>
-            </a:solidFill>
-            <a:prstDash val="solid"/>
-          </a:ln>
-        </p:spPr>
-      </p:sp>
-      <p:sp>
-        <p:nvSpPr>
-          <p:cNvPr id="14" name="Shape 12"/>
-          <p:cNvSpPr/>
-          <p:nvPr/>
-        </p:nvSpPr>
-        <p:spPr>
-          <a:xfrm>
-            <a:off x="822960" y="3886200"/>
-            <a:ext cx="502920" cy="502920"/>
-          </a:xfrm>
-          <a:prstGeom prst="ellipse">
-            <a:avLst/>
-          </a:prstGeom>
-          <a:solidFill>
-            <a:srgbClr val="0F8C7E"/>
-          </a:solidFill>
-          <a:ln w="12700">
-            <a:solidFill>
-              <a:srgbClr val="0F8C7E"/>
-            </a:solidFill>
-            <a:prstDash val="solid"/>
-          </a:ln>
-        </p:spPr>
-      </p:sp>
-      <p:sp>
-        <p:nvSpPr>
-          <p:cNvPr id="15" name="Text 13"/>
-          <p:cNvSpPr txBox="1"/>
-          <p:nvPr/>
-        </p:nvSpPr>
-        <p:spPr>
-          <a:xfrm>
-            <a:off x="822960" y="3886200"/>
-            <a:ext cx="502920" cy="502920"/>
-          </a:xfrm>
-          <a:prstGeom prst="rect">
-            <a:avLst/>
-          </a:prstGeom>
-          <a:noFill/>
-          <a:ln/>
-        </p:spPr>
-        <p:txBody>
-          <a:bodyPr wrap="square" lIns="0" tIns="0" rIns="0" bIns="0" rtlCol="0" anchor="ctr"/>
-          <a:lstStyle/>
-          <a:p>
-            <a:pPr algn="ctr" indent="0" marL="0">
-              <a:buNone/>
-            </a:pPr>
-            <a:r>
-              <a:rPr lang="en-US" sz="1600" b="1" dirty="0">
-                <a:solidFill>
-                  <a:srgbClr val="FFFFFF"/>
-                </a:solidFill>
-                <a:latin typeface="맑은 고딕" pitchFamily="34" charset="0"/>
-                <a:ea typeface="맑은 고딕" pitchFamily="34" charset="-122"/>
-                <a:cs typeface="맑은 고딕" pitchFamily="34" charset="-120"/>
-              </a:rPr>
-              <a:t>3</a:t>
-            </a:r>
-            <a:endParaRPr lang="en-US" sz="1600" dirty="0"/>
-          </a:p>
-        </p:txBody>
-      </p:sp>
-      <p:sp>
-        <p:nvSpPr>
-          <p:cNvPr id="16" name="Text 14"/>
-          <p:cNvSpPr txBox="1"/>
-          <p:nvPr/>
-        </p:nvSpPr>
-        <p:spPr>
-          <a:xfrm>
-            <a:off x="1508760" y="3886200"/>
-            <a:ext cx="4297680" cy="822960"/>
-          </a:xfrm>
-          <a:prstGeom prst="rect">
-            <a:avLst/>
-          </a:prstGeom>
-          <a:noFill/>
-          <a:ln/>
-        </p:spPr>
-        <p:txBody>
-          <a:bodyPr wrap="square" lIns="0" tIns="0" rIns="0" bIns="0" rtlCol="0" anchor="t"/>
-          <a:lstStyle/>
-          <a:p>
-            <a:pPr indent="0" marL="0">
-              <a:buNone/>
-            </a:pPr>
-            <a:r>
-              <a:rPr lang="en-US" sz="1800" b="1" dirty="0">
-                <a:solidFill>
-                  <a:srgbClr val="1C2333"/>
-                </a:solidFill>
-                <a:latin typeface="맑은 고딕" pitchFamily="34" charset="0"/>
-                <a:ea typeface="맑은 고딕" pitchFamily="34" charset="-122"/>
-                <a:cs typeface="맑은 고딕" pitchFamily="34" charset="-120"/>
-              </a:rPr>
-              <a:t>「성공」 표시를 믿지 말고 파일로 확인</a:t>
-            </a:r>
-            <a:endParaRPr lang="en-US" sz="1800" dirty="0"/>
-          </a:p>
-        </p:txBody>
-      </p:sp>
-      <p:sp>
-        <p:nvSpPr>
-          <p:cNvPr id="17" name="Text 15"/>
-          <p:cNvSpPr txBox="1"/>
-          <p:nvPr/>
-        </p:nvSpPr>
-        <p:spPr>
-          <a:xfrm>
-            <a:off x="1508760" y="4754880"/>
-            <a:ext cx="4297680" cy="640080"/>
-          </a:xfrm>
-          <a:prstGeom prst="rect">
-            <a:avLst/>
-          </a:prstGeom>
-          <a:noFill/>
-          <a:ln/>
-        </p:spPr>
-        <p:txBody>
-          <a:bodyPr wrap="square" lIns="0" tIns="0" rIns="0" bIns="0" rtlCol="0" anchor="t"/>
-          <a:lstStyle/>
-          <a:p>
-            <a:pPr indent="0" marL="0">
-              <a:buNone/>
-            </a:pPr>
-            <a:r>
-              <a:rPr lang="en-US" sz="1400" dirty="0">
-                <a:solidFill>
-                  <a:srgbClr val="6B7A90"/>
-                </a:solidFill>
-                <a:latin typeface="맑은 고딕" pitchFamily="34" charset="0"/>
-                <a:ea typeface="맑은 고딕" pitchFamily="34" charset="-122"/>
-                <a:cs typeface="맑은 고딕" pitchFamily="34" charset="-120"/>
-              </a:rPr>
-              <a:t>결과 파일의 경로·크기·시각을 본다</a:t>
-            </a:r>
-            <a:endParaRPr lang="en-US" sz="1400" dirty="0"/>
-          </a:p>
-        </p:txBody>
-      </p:sp>
-      <p:sp>
-        <p:nvSpPr>
-          <p:cNvPr id="18" name="card"/>
-          <p:cNvSpPr/>
-          <p:nvPr/>
-        </p:nvSpPr>
-        <p:spPr>
-          <a:xfrm>
-            <a:off x="6172200" y="3611880"/>
-            <a:ext cx="5440680" cy="1920240"/>
-          </a:xfrm>
-          <a:prstGeom prst="roundRect">
-            <a:avLst>
-              <a:gd name="adj" fmla="val 3810"/>
-            </a:avLst>
-          </a:prstGeom>
-          <a:solidFill>
-            <a:srgbClr val="E4F3F1"/>
-          </a:solidFill>
-          <a:ln w="12700">
-            <a:solidFill>
-              <a:srgbClr val="E4F3F1"/>
-            </a:solidFill>
-            <a:prstDash val="solid"/>
-          </a:ln>
-        </p:spPr>
-      </p:sp>
-      <p:sp>
-        <p:nvSpPr>
-          <p:cNvPr id="19" name="Shape 17"/>
-          <p:cNvSpPr/>
-          <p:nvPr/>
-        </p:nvSpPr>
-        <p:spPr>
-          <a:xfrm>
-            <a:off x="6446520" y="3886200"/>
-            <a:ext cx="502920" cy="502920"/>
-          </a:xfrm>
-          <a:prstGeom prst="ellipse">
-            <a:avLst/>
-          </a:prstGeom>
-          <a:solidFill>
-            <a:srgbClr val="0F8C7E"/>
-          </a:solidFill>
-          <a:ln w="12700">
-            <a:solidFill>
-              <a:srgbClr val="0F8C7E"/>
-            </a:solidFill>
-            <a:prstDash val="solid"/>
-          </a:ln>
-        </p:spPr>
-      </p:sp>
-      <p:sp>
-        <p:nvSpPr>
-          <p:cNvPr id="20" name="Text 18"/>
-          <p:cNvSpPr txBox="1"/>
-          <p:nvPr/>
-        </p:nvSpPr>
-        <p:spPr>
-          <a:xfrm>
-            <a:off x="6446520" y="3886200"/>
-            <a:ext cx="502920" cy="502920"/>
-          </a:xfrm>
-          <a:prstGeom prst="rect">
-            <a:avLst/>
-          </a:prstGeom>
-          <a:noFill/>
-          <a:ln/>
-        </p:spPr>
-        <p:txBody>
-          <a:bodyPr wrap="square" lIns="0" tIns="0" rIns="0" bIns="0" rtlCol="0" anchor="ctr"/>
-          <a:lstStyle/>
-          <a:p>
-            <a:pPr algn="ctr" indent="0" marL="0">
-              <a:buNone/>
-            </a:pPr>
-            <a:r>
-              <a:rPr lang="en-US" sz="1600" b="1" dirty="0">
-                <a:solidFill>
-                  <a:srgbClr val="FFFFFF"/>
-                </a:solidFill>
-                <a:latin typeface="맑은 고딕" pitchFamily="34" charset="0"/>
-                <a:ea typeface="맑은 고딕" pitchFamily="34" charset="-122"/>
-                <a:cs typeface="맑은 고딕" pitchFamily="34" charset="-120"/>
-              </a:rPr>
-              <a:t>4</a:t>
-            </a:r>
-            <a:endParaRPr lang="en-US" sz="1600" dirty="0"/>
-          </a:p>
-        </p:txBody>
-      </p:sp>
-      <p:sp>
-        <p:nvSpPr>
-          <p:cNvPr id="21" name="Text 19"/>
-          <p:cNvSpPr txBox="1"/>
-          <p:nvPr/>
-        </p:nvSpPr>
-        <p:spPr>
-          <a:xfrm>
-            <a:off x="7132320" y="3886200"/>
-            <a:ext cx="4297680" cy="822960"/>
-          </a:xfrm>
-          <a:prstGeom prst="rect">
-            <a:avLst/>
-          </a:prstGeom>
-          <a:noFill/>
-          <a:ln/>
-        </p:spPr>
-        <p:txBody>
-          <a:bodyPr wrap="square" lIns="0" tIns="0" rIns="0" bIns="0" rtlCol="0" anchor="t"/>
-          <a:lstStyle/>
-          <a:p>
-            <a:pPr indent="0" marL="0">
-              <a:buNone/>
-            </a:pPr>
-            <a:r>
-              <a:rPr lang="en-US" sz="1800" b="1" dirty="0">
-                <a:solidFill>
-                  <a:srgbClr val="1C2333"/>
-                </a:solidFill>
-                <a:latin typeface="맑은 고딕" pitchFamily="34" charset="0"/>
-                <a:ea typeface="맑은 고딕" pitchFamily="34" charset="-122"/>
-                <a:cs typeface="맑은 고딕" pitchFamily="34" charset="-120"/>
-              </a:rPr>
-              <a:t>권한을 「모두 허용」으로 풀지 않는다</a:t>
-            </a:r>
-            <a:endParaRPr lang="en-US" sz="1800" dirty="0"/>
-          </a:p>
-        </p:txBody>
-      </p:sp>
-      <p:sp>
-        <p:nvSpPr>
-          <p:cNvPr id="22" name="Text 20"/>
-          <p:cNvSpPr txBox="1"/>
-          <p:nvPr/>
-        </p:nvSpPr>
-        <p:spPr>
-          <a:xfrm>
-            <a:off x="7132320" y="4754880"/>
-            <a:ext cx="4297680" cy="640080"/>
-          </a:xfrm>
-          <a:prstGeom prst="rect">
-            <a:avLst/>
-          </a:prstGeom>
-          <a:noFill/>
-          <a:ln/>
-        </p:spPr>
-        <p:txBody>
-          <a:bodyPr wrap="square" lIns="0" tIns="0" rIns="0" bIns="0" rtlCol="0" anchor="t"/>
-          <a:lstStyle/>
-          <a:p>
-            <a:pPr indent="0" marL="0">
-              <a:buNone/>
-            </a:pPr>
-            <a:r>
-              <a:rPr lang="en-US" sz="1400" dirty="0">
-                <a:solidFill>
-                  <a:srgbClr val="6B7A90"/>
-                </a:solidFill>
-                <a:latin typeface="맑은 고딕" pitchFamily="34" charset="0"/>
-                <a:ea typeface="맑은 고딕" pitchFamily="34" charset="-122"/>
-                <a:cs typeface="맑은 고딕" pitchFamily="34" charset="-120"/>
-              </a:rPr>
-              <a:t>필요한 도구만 허용하고, 삭제는 사람이 한다</a:t>
-            </a:r>
-            <a:endParaRPr lang="en-US" sz="1400" dirty="0"/>
-          </a:p>
-        </p:txBody>
-      </p:sp>
-      <p:sp>
-        <p:nvSpPr>
-          <p:cNvPr id="25" name="Slide Number Placeholder 0"/>
-          <p:cNvSpPr>
-            <a:spLocks noGrp="1"/>
-          </p:cNvSpPr>
-          <p:nvPr>
-            <p:ph type="sldNum" sz="quarter" idx="4294967295"/>
-          </p:nvPr>
-        </p:nvSpPr>
-        <p:spPr>
-          <a:xfrm>
-            <a:off x="11247120" y="6400800"/>
-            <a:ext cx="548640" cy="274320"/>
-          </a:xfrm>
-          <a:prstGeom prst="rect">
-            <a:avLst/>
-          </a:prstGeom>
-          <a:extLst>
-            <a:ext uri="{C572A759-6A51-4108-AA02-DFA0A04FC94B}">
-              <ma14:wrappingTextBoxFlag xmlns:ma14="http://schemas.microsoft.com/office/mac/drawingml/2011/main" val="0"/>
-            </a:ext>
-          </a:extLst>
-        </p:spPr>
-        <p:txBody>
-          <a:bodyPr/>
-          <a:lstStyle>
-            <a:lvl1pPr>
-              <a:defRPr sz="1000">
-                <a:solidFill>
-                  <a:srgbClr val="6B7A90"/>
-                </a:solidFill>
-                <a:latin typeface="맑은 고딕"/>
-                <a:ea typeface="맑은 고딕"/>
-                <a:cs typeface="맑은 고딕"/>
-              </a:defRPr>
-            </a:lvl1pPr>
-          </a:lstStyle>
-          <a:p>
-            <a:pPr algn="l"/>
-            <a:fld id="{F7021451-1387-4CA6-816F-3879F97B5CBC}" type="slidenum">
-              <a:rPr b="0" lang="en-US"/>
-              <a:t>20</a:t>
-            </a:fld>
-            <a:endParaRPr lang="en-US"/>
-          </a:p>
-        </p:txBody>
-      </p:sp>
-    </p:spTree>
-  </p:cSld>
-  <p:clrMapOvr>
-    <a:masterClrMapping/>
-  </p:clrMapOvr>
-</p:sld>
-</file>
-
-<file path=ppt/slides/slide21.xml><?xml version="1.0" encoding="utf-8"?>
-<p:sld xmlns:a="http://schemas.openxmlformats.org/drawingml/2006/main" xmlns:r="http://schemas.openxmlformats.org/officeDocument/2006/relationships" xmlns:p="http://schemas.openxmlformats.org/presentationml/2006/main">
-  <p:cSld name="Slide 21">
-    <p:spTree>
-      <p:nvGrpSpPr>
-        <p:cNvPr id="1" name=""/>
-        <p:cNvGrpSpPr/>
-        <p:nvPr/>
-      </p:nvGrpSpPr>
-      <p:grpSpPr>
-        <a:xfrm>
-          <a:off x="0" y="0"/>
-          <a:ext cx="0" cy="0"/>
-          <a:chOff x="0" y="0"/>
-          <a:chExt cx="0" cy="0"/>
-        </a:xfrm>
-      </p:grpSpPr>
-      <p:sp>
-        <p:nvSpPr>
-          <p:cNvPr id="2" name="Text 0"/>
-          <p:cNvSpPr/>
-          <p:nvPr>
-            <p:ph idx="100" type="title" hasCustomPrompt="1"/>
-          </p:nvPr>
-        </p:nvSpPr>
-        <p:spPr>
-          <a:xfrm>
-            <a:off x="548640" y="320040"/>
-            <a:ext cx="11064240" cy="822960"/>
-          </a:xfrm>
-          <a:prstGeom prst="rect">
-            <a:avLst/>
-          </a:prstGeom>
-          <a:noFill/>
-          <a:ln/>
-        </p:spPr>
-        <p:txBody>
-          <a:bodyPr wrap="square" rtlCol="0" anchor="ctr"/>
-          <a:lstStyle/>
-          <a:p>
-            <a:pPr indent="0" marL="0">
-              <a:buNone/>
-            </a:pPr>
-            <a:r>
-              <a:rPr lang="en-US" sz="2800" b="1" dirty="0">
-                <a:solidFill>
-                  <a:srgbClr val="1C2333"/>
-                </a:solidFill>
-                <a:latin typeface="맑은 고딕" pitchFamily="34" charset="0"/>
-                <a:ea typeface="맑은 고딕" pitchFamily="34" charset="-122"/>
-                <a:cs typeface="맑은 고딕" pitchFamily="34" charset="-120"/>
-              </a:rPr>
-              <a:t>실습 체크리스트 — 내 예약작업 점검하기</a:t>
-            </a:r>
-            <a:endParaRPr lang="en-US" sz="2800" dirty="0"/>
-          </a:p>
-        </p:txBody>
-      </p:sp>
-      <p:sp>
-        <p:nvSpPr>
-          <p:cNvPr id="3" name="Shape 1"/>
-          <p:cNvSpPr/>
-          <p:nvPr/>
-        </p:nvSpPr>
-        <p:spPr>
-          <a:xfrm>
-            <a:off x="731520" y="1481328"/>
-            <a:ext cx="384048" cy="384048"/>
-          </a:xfrm>
-          <a:prstGeom prst="roundRect">
-            <a:avLst>
-              <a:gd name="adj" fmla="val 14286"/>
-            </a:avLst>
-          </a:prstGeom>
-          <a:solidFill>
-            <a:srgbClr val="FFFFFF"/>
-          </a:solidFill>
-          <a:ln w="25400">
-            <a:solidFill>
-              <a:srgbClr val="0F8C7E"/>
-            </a:solidFill>
-            <a:prstDash val="solid"/>
-          </a:ln>
-        </p:spPr>
-      </p:sp>
-      <p:sp>
-        <p:nvSpPr>
-          <p:cNvPr id="4" name="Text 2"/>
-          <p:cNvSpPr txBox="1"/>
-          <p:nvPr/>
-        </p:nvSpPr>
-        <p:spPr>
-          <a:xfrm>
-            <a:off x="1371600" y="1463040"/>
-            <a:ext cx="10058400" cy="457200"/>
-          </a:xfrm>
-          <a:prstGeom prst="rect">
-            <a:avLst/>
-          </a:prstGeom>
-          <a:noFill/>
-          <a:ln/>
-        </p:spPr>
-        <p:txBody>
-          <a:bodyPr wrap="square" lIns="0" tIns="0" rIns="0" bIns="0" rtlCol="0" anchor="t"/>
-          <a:lstStyle/>
-          <a:p>
-            <a:pPr indent="0" marL="0">
-              <a:buNone/>
-            </a:pPr>
-            <a:r>
-              <a:rPr lang="en-US" sz="1700" dirty="0">
-                <a:solidFill>
-                  <a:srgbClr val="1C2333"/>
-                </a:solidFill>
-                <a:latin typeface="맑은 고딕" pitchFamily="34" charset="0"/>
-                <a:ea typeface="맑은 고딕" pitchFamily="34" charset="-122"/>
-                <a:cs typeface="맑은 고딕" pitchFamily="34" charset="-120"/>
-              </a:rPr>
-              <a:t>내 예약작업 목록을 열고 작업마다 「엑셀·브라우저·PC 프로그램을 쓰는가」 표시</a:t>
-            </a:r>
-            <a:endParaRPr lang="en-US" sz="1700" dirty="0"/>
-          </a:p>
-        </p:txBody>
-      </p:sp>
-      <p:sp>
-        <p:nvSpPr>
-          <p:cNvPr id="5" name="Shape 3"/>
-          <p:cNvSpPr/>
-          <p:nvPr/>
-        </p:nvSpPr>
-        <p:spPr>
-          <a:xfrm>
-            <a:off x="731520" y="2258568"/>
-            <a:ext cx="384048" cy="384048"/>
-          </a:xfrm>
-          <a:prstGeom prst="roundRect">
-            <a:avLst>
-              <a:gd name="adj" fmla="val 14286"/>
-            </a:avLst>
-          </a:prstGeom>
-          <a:solidFill>
-            <a:srgbClr val="FFFFFF"/>
-          </a:solidFill>
-          <a:ln w="25400">
-            <a:solidFill>
-              <a:srgbClr val="0F8C7E"/>
-            </a:solidFill>
-            <a:prstDash val="solid"/>
-          </a:ln>
-        </p:spPr>
-      </p:sp>
-      <p:sp>
-        <p:nvSpPr>
-          <p:cNvPr id="6" name="Text 4"/>
-          <p:cNvSpPr txBox="1"/>
-          <p:nvPr/>
-        </p:nvSpPr>
-        <p:spPr>
-          <a:xfrm>
-            <a:off x="1371600" y="2240280"/>
-            <a:ext cx="10058400" cy="457200"/>
-          </a:xfrm>
-          <a:prstGeom prst="rect">
-            <a:avLst/>
-          </a:prstGeom>
-          <a:noFill/>
-          <a:ln/>
-        </p:spPr>
-        <p:txBody>
-          <a:bodyPr wrap="square" lIns="0" tIns="0" rIns="0" bIns="0" rtlCol="0" anchor="t"/>
-          <a:lstStyle/>
-          <a:p>
-            <a:pPr indent="0" marL="0">
-              <a:buNone/>
-            </a:pPr>
-            <a:r>
-              <a:rPr lang="en-US" sz="1700" dirty="0">
-                <a:solidFill>
-                  <a:srgbClr val="1C2333"/>
-                </a:solidFill>
-                <a:latin typeface="맑은 고딕" pitchFamily="34" charset="0"/>
-                <a:ea typeface="맑은 고딕" pitchFamily="34" charset="-122"/>
-                <a:cs typeface="맑은 고딕" pitchFamily="34" charset="-120"/>
-              </a:rPr>
-              <a:t>표시된 작업의 최근 결과 파일을 직접 열어 날짜 확인 (성공 표시 말고)</a:t>
-            </a:r>
-            <a:endParaRPr lang="en-US" sz="1700" dirty="0"/>
-          </a:p>
-        </p:txBody>
-      </p:sp>
-      <p:sp>
-        <p:nvSpPr>
-          <p:cNvPr id="7" name="Shape 5"/>
-          <p:cNvSpPr/>
-          <p:nvPr/>
-        </p:nvSpPr>
-        <p:spPr>
-          <a:xfrm>
-            <a:off x="731520" y="3035808"/>
-            <a:ext cx="384048" cy="384048"/>
-          </a:xfrm>
-          <a:prstGeom prst="roundRect">
-            <a:avLst>
-              <a:gd name="adj" fmla="val 14286"/>
-            </a:avLst>
-          </a:prstGeom>
-          <a:solidFill>
-            <a:srgbClr val="FFFFFF"/>
-          </a:solidFill>
-          <a:ln w="25400">
-            <a:solidFill>
-              <a:srgbClr val="0F8C7E"/>
-            </a:solidFill>
-            <a:prstDash val="solid"/>
-          </a:ln>
-        </p:spPr>
-      </p:sp>
-      <p:sp>
-        <p:nvSpPr>
-          <p:cNvPr id="8" name="Text 6"/>
-          <p:cNvSpPr txBox="1"/>
-          <p:nvPr/>
-        </p:nvSpPr>
-        <p:spPr>
-          <a:xfrm>
-            <a:off x="1371600" y="3017520"/>
-            <a:ext cx="10058400" cy="457200"/>
-          </a:xfrm>
-          <a:prstGeom prst="rect">
-            <a:avLst/>
-          </a:prstGeom>
-          <a:noFill/>
-          <a:ln/>
-        </p:spPr>
-        <p:txBody>
-          <a:bodyPr wrap="square" lIns="0" tIns="0" rIns="0" bIns="0" rtlCol="0" anchor="t"/>
-          <a:lstStyle/>
-          <a:p>
-            <a:pPr indent="0" marL="0">
-              <a:buNone/>
-            </a:pPr>
-            <a:r>
-              <a:rPr lang="en-US" sz="1700" dirty="0">
-                <a:solidFill>
-                  <a:srgbClr val="1C2333"/>
-                </a:solidFill>
-                <a:latin typeface="맑은 고딕" pitchFamily="34" charset="0"/>
-                <a:ea typeface="맑은 고딕" pitchFamily="34" charset="-122"/>
-                <a:cs typeface="맑은 고딕" pitchFamily="34" charset="-120"/>
-              </a:rPr>
-              <a:t>옮길 작업 1개를 골라 설명문을 백업</a:t>
-            </a:r>
-            <a:endParaRPr lang="en-US" sz="1700" dirty="0"/>
-          </a:p>
-        </p:txBody>
-      </p:sp>
-      <p:sp>
-        <p:nvSpPr>
-          <p:cNvPr id="9" name="Shape 7"/>
-          <p:cNvSpPr/>
-          <p:nvPr/>
-        </p:nvSpPr>
-        <p:spPr>
-          <a:xfrm>
-            <a:off x="731520" y="3813048"/>
-            <a:ext cx="384048" cy="384048"/>
-          </a:xfrm>
-          <a:prstGeom prst="roundRect">
-            <a:avLst>
-              <a:gd name="adj" fmla="val 14286"/>
-            </a:avLst>
-          </a:prstGeom>
-          <a:solidFill>
-            <a:srgbClr val="FFFFFF"/>
-          </a:solidFill>
-          <a:ln w="25400">
-            <a:solidFill>
-              <a:srgbClr val="0F8C7E"/>
-            </a:solidFill>
-            <a:prstDash val="solid"/>
-          </a:ln>
-        </p:spPr>
-      </p:sp>
-      <p:sp>
-        <p:nvSpPr>
-          <p:cNvPr id="10" name="Text 8"/>
-          <p:cNvSpPr txBox="1"/>
-          <p:nvPr/>
-        </p:nvSpPr>
-        <p:spPr>
-          <a:xfrm>
-            <a:off x="1371600" y="3794760"/>
-            <a:ext cx="10058400" cy="457200"/>
-          </a:xfrm>
-          <a:prstGeom prst="rect">
-            <a:avLst/>
-          </a:prstGeom>
-          <a:noFill/>
-          <a:ln/>
-        </p:spPr>
-        <p:txBody>
-          <a:bodyPr wrap="square" lIns="0" tIns="0" rIns="0" bIns="0" rtlCol="0" anchor="t"/>
-          <a:lstStyle/>
-          <a:p>
-            <a:pPr indent="0" marL="0">
-              <a:buNone/>
-            </a:pPr>
-            <a:r>
-              <a:rPr lang="en-US" sz="1700" dirty="0">
-                <a:solidFill>
-                  <a:srgbClr val="1C2333"/>
-                </a:solidFill>
-                <a:latin typeface="맑은 고딕" pitchFamily="34" charset="0"/>
-                <a:ea typeface="맑은 고딕" pitchFamily="34" charset="-122"/>
-                <a:cs typeface="맑은 고딕" pitchFamily="34" charset="-120"/>
-              </a:rPr>
-              <a:t>Code 탭에서 같은 일정으로 로컬 루틴을 만들고 손으로 1회 실행</a:t>
-            </a:r>
-            <a:endParaRPr lang="en-US" sz="1700" dirty="0"/>
-          </a:p>
-        </p:txBody>
-      </p:sp>
-      <p:sp>
-        <p:nvSpPr>
-          <p:cNvPr id="11" name="Shape 9"/>
-          <p:cNvSpPr/>
-          <p:nvPr/>
-        </p:nvSpPr>
-        <p:spPr>
-          <a:xfrm>
-            <a:off x="731520" y="4590288"/>
-            <a:ext cx="384048" cy="384048"/>
-          </a:xfrm>
-          <a:prstGeom prst="roundRect">
-            <a:avLst>
-              <a:gd name="adj" fmla="val 14286"/>
-            </a:avLst>
-          </a:prstGeom>
-          <a:solidFill>
-            <a:srgbClr val="FFFFFF"/>
-          </a:solidFill>
-          <a:ln w="25400">
-            <a:solidFill>
-              <a:srgbClr val="0F8C7E"/>
-            </a:solidFill>
-            <a:prstDash val="solid"/>
-          </a:ln>
-        </p:spPr>
-      </p:sp>
-      <p:sp>
-        <p:nvSpPr>
-          <p:cNvPr id="12" name="Text 10"/>
-          <p:cNvSpPr txBox="1"/>
-          <p:nvPr/>
-        </p:nvSpPr>
-        <p:spPr>
-          <a:xfrm>
-            <a:off x="1371600" y="4572000"/>
-            <a:ext cx="10058400" cy="457200"/>
-          </a:xfrm>
-          <a:prstGeom prst="rect">
-            <a:avLst/>
-          </a:prstGeom>
-          <a:noFill/>
-          <a:ln/>
-        </p:spPr>
-        <p:txBody>
-          <a:bodyPr wrap="square" lIns="0" tIns="0" rIns="0" bIns="0" rtlCol="0" anchor="t"/>
-          <a:lstStyle/>
-          <a:p>
-            <a:pPr indent="0" marL="0">
-              <a:buNone/>
-            </a:pPr>
-            <a:r>
-              <a:rPr lang="en-US" sz="1700" dirty="0">
-                <a:solidFill>
-                  <a:srgbClr val="1C2333"/>
-                </a:solidFill>
-                <a:latin typeface="맑은 고딕" pitchFamily="34" charset="0"/>
-                <a:ea typeface="맑은 고딕" pitchFamily="34" charset="-122"/>
-                <a:cs typeface="맑은 고딕" pitchFamily="34" charset="-120"/>
-              </a:rPr>
-              <a:t>결과 파일이 생기면 클라우드 쪽 일시중지</a:t>
-            </a:r>
-            <a:endParaRPr lang="en-US" sz="1700" dirty="0"/>
-          </a:p>
-        </p:txBody>
-      </p:sp>
-      <p:sp>
-        <p:nvSpPr>
-          <p:cNvPr id="13" name="Shape 11"/>
-          <p:cNvSpPr/>
-          <p:nvPr/>
-        </p:nvSpPr>
-        <p:spPr>
-          <a:xfrm>
-            <a:off x="731520" y="5367528"/>
-            <a:ext cx="384048" cy="384048"/>
-          </a:xfrm>
-          <a:prstGeom prst="roundRect">
-            <a:avLst>
-              <a:gd name="adj" fmla="val 14286"/>
-            </a:avLst>
-          </a:prstGeom>
-          <a:solidFill>
-            <a:srgbClr val="FFFFFF"/>
-          </a:solidFill>
-          <a:ln w="25400">
-            <a:solidFill>
-              <a:srgbClr val="0F8C7E"/>
-            </a:solidFill>
-            <a:prstDash val="solid"/>
-          </a:ln>
-        </p:spPr>
-      </p:sp>
-      <p:sp>
-        <p:nvSpPr>
-          <p:cNvPr id="14" name="Text 12"/>
-          <p:cNvSpPr txBox="1"/>
-          <p:nvPr/>
-        </p:nvSpPr>
-        <p:spPr>
-          <a:xfrm>
-            <a:off x="1371600" y="5349240"/>
-            <a:ext cx="10058400" cy="457200"/>
-          </a:xfrm>
-          <a:prstGeom prst="rect">
-            <a:avLst/>
-          </a:prstGeom>
-          <a:noFill/>
-          <a:ln/>
-        </p:spPr>
-        <p:txBody>
-          <a:bodyPr wrap="square" lIns="0" tIns="0" rIns="0" bIns="0" rtlCol="0" anchor="t"/>
-          <a:lstStyle/>
-          <a:p>
-            <a:pPr indent="0" marL="0">
-              <a:buNone/>
-            </a:pPr>
-            <a:r>
-              <a:rPr lang="en-US" sz="1700" dirty="0">
-                <a:solidFill>
-                  <a:srgbClr val="1C2333"/>
-                </a:solidFill>
-                <a:latin typeface="맑은 고딕" pitchFamily="34" charset="0"/>
-                <a:ea typeface="맑은 고딕" pitchFamily="34" charset="-122"/>
-                <a:cs typeface="맑은 고딕" pitchFamily="34" charset="-120"/>
-              </a:rPr>
-              <a:t>설명문 맨 앞에 한국어 블록, 맨 끝에 카톡 1건 추가</a:t>
-            </a:r>
-            <a:endParaRPr lang="en-US" sz="1700" dirty="0"/>
-          </a:p>
-        </p:txBody>
-      </p:sp>
-      <p:sp>
-        <p:nvSpPr>
-          <p:cNvPr id="25" name="Slide Number Placeholder 0"/>
-          <p:cNvSpPr>
-            <a:spLocks noGrp="1"/>
-          </p:cNvSpPr>
-          <p:nvPr>
-            <p:ph type="sldNum" sz="quarter" idx="4294967295"/>
-          </p:nvPr>
-        </p:nvSpPr>
-        <p:spPr>
-          <a:xfrm>
-            <a:off x="11247120" y="6400800"/>
-            <a:ext cx="548640" cy="274320"/>
-          </a:xfrm>
-          <a:prstGeom prst="rect">
-            <a:avLst/>
-          </a:prstGeom>
-          <a:extLst>
-            <a:ext uri="{C572A759-6A51-4108-AA02-DFA0A04FC94B}">
-              <ma14:wrappingTextBoxFlag xmlns:ma14="http://schemas.microsoft.com/office/mac/drawingml/2011/main" val="0"/>
-            </a:ext>
-          </a:extLst>
-        </p:spPr>
-        <p:txBody>
-          <a:bodyPr/>
-          <a:lstStyle>
-            <a:lvl1pPr>
-              <a:defRPr sz="1000">
-                <a:solidFill>
-                  <a:srgbClr val="6B7A90"/>
-                </a:solidFill>
-                <a:latin typeface="맑은 고딕"/>
-                <a:ea typeface="맑은 고딕"/>
-                <a:cs typeface="맑은 고딕"/>
-              </a:defRPr>
-            </a:lvl1pPr>
-          </a:lstStyle>
-          <a:p>
-            <a:pPr algn="l"/>
-            <a:fld id="{F7021451-1387-4CA6-816F-3879F97B5CBC}" type="slidenum">
-              <a:rPr b="0" lang="en-US"/>
-              <a:t>21</a:t>
-            </a:fld>
-            <a:endParaRPr lang="en-US"/>
-          </a:p>
-        </p:txBody>
-      </p:sp>
-    </p:spTree>
-  </p:cSld>
-  <p:clrMapOvr>
-    <a:masterClrMapping/>
-  </p:clrMapOvr>
-</p:sld>
-</file>
-
-<file path=ppt/slides/slide22.xml><?xml version="1.0" encoding="utf-8"?>
-<p:sld xmlns:a="http://schemas.openxmlformats.org/drawingml/2006/main" xmlns:r="http://schemas.openxmlformats.org/officeDocument/2006/relationships" xmlns:p="http://schemas.openxmlformats.org/presentationml/2006/main">
-  <p:cSld name="Slide 22">
-    <p:spTree>
-      <p:nvGrpSpPr>
-        <p:cNvPr id="1" name=""/>
-        <p:cNvGrpSpPr/>
-        <p:nvPr/>
-      </p:nvGrpSpPr>
-      <p:grpSpPr>
-        <a:xfrm>
-          <a:off x="0" y="0"/>
-          <a:ext cx="0" cy="0"/>
-          <a:chOff x="0" y="0"/>
-          <a:chExt cx="0" cy="0"/>
-        </a:xfrm>
-      </p:grpSpPr>
-      <p:sp>
-        <p:nvSpPr>
-          <p:cNvPr id="2" name="Text 0"/>
-          <p:cNvSpPr/>
-          <p:nvPr>
-            <p:ph idx="100" type="title" hasCustomPrompt="1"/>
-          </p:nvPr>
-        </p:nvSpPr>
-        <p:spPr>
-          <a:xfrm>
-            <a:off x="731520" y="2011680"/>
-            <a:ext cx="10698480" cy="1463040"/>
-          </a:xfrm>
-          <a:prstGeom prst="rect">
-            <a:avLst/>
-          </a:prstGeom>
-          <a:noFill/>
-          <a:ln/>
-        </p:spPr>
-        <p:txBody>
-          <a:bodyPr wrap="square" rtlCol="0" anchor="t"/>
-          <a:lstStyle/>
-          <a:p>
-            <a:pPr indent="0" marL="0">
-              <a:buNone/>
-            </a:pPr>
-            <a:r>
-              <a:rPr lang="en-US" sz="4000" b="1" dirty="0">
-                <a:solidFill>
-                  <a:srgbClr val="FFFFFF"/>
-                </a:solidFill>
-                <a:latin typeface="맑은 고딕" pitchFamily="34" charset="0"/>
-                <a:ea typeface="맑은 고딕" pitchFamily="34" charset="-122"/>
-                <a:cs typeface="맑은 고딕" pitchFamily="34" charset="-120"/>
-              </a:rPr>
-              <a:t>클라우드는 읽고 보고, 손이 필요한 일은 PC에서</a:t>
-            </a:r>
-            <a:endParaRPr lang="en-US" sz="4000" dirty="0"/>
-          </a:p>
-        </p:txBody>
-      </p:sp>
-      <p:sp>
-        <p:nvSpPr>
-          <p:cNvPr id="3" name="Text 0"/>
-          <p:cNvSpPr/>
-          <p:nvPr>
-            <p:ph idx="101" type="body" hasCustomPrompt="1"/>
-          </p:nvPr>
-        </p:nvSpPr>
-        <p:spPr>
-          <a:xfrm>
-            <a:off x="731520" y="3657600"/>
-            <a:ext cx="10698480" cy="1463040"/>
-          </a:xfrm>
-          <a:prstGeom prst="rect">
-            <a:avLst/>
-          </a:prstGeom>
-          <a:noFill/>
-          <a:ln/>
-        </p:spPr>
-        <p:txBody>
-          <a:bodyPr wrap="square" rtlCol="0" anchor="t"/>
-          <a:lstStyle/>
-          <a:p>
-            <a:pPr indent="0" marL="0">
-              <a:buNone/>
-            </a:pPr>
-            <a:r>
-              <a:rPr lang="en-US" sz="1800" dirty="0">
-                <a:solidFill>
-                  <a:srgbClr val="C9D3E2"/>
-                </a:solidFill>
-                <a:latin typeface="맑은 고딕" pitchFamily="34" charset="0"/>
-                <a:ea typeface="맑은 고딕" pitchFamily="34" charset="-122"/>
-                <a:cs typeface="맑은 고딕" pitchFamily="34" charset="-120"/>
-              </a:rPr>
-              <a:t>그리고 결과는 카톡으로 받는다 — 성공 표시가 아니라 결과 파일로 확인한다</a:t>
-            </a:r>
-            <a:endParaRPr lang="en-US" sz="1800" dirty="0"/>
-          </a:p>
-        </p:txBody>
-      </p:sp>
-      <p:sp>
-        <p:nvSpPr>
-          <p:cNvPr id="4" name="Text 2"/>
-          <p:cNvSpPr txBox="1"/>
-          <p:nvPr/>
-        </p:nvSpPr>
-        <p:spPr>
-          <a:xfrm>
-            <a:off x="731520" y="5760720"/>
-            <a:ext cx="10058400" cy="365760"/>
-          </a:xfrm>
-          <a:prstGeom prst="rect">
-            <a:avLst/>
-          </a:prstGeom>
-          <a:noFill/>
-          <a:ln/>
-        </p:spPr>
-        <p:txBody>
-          <a:bodyPr wrap="square" lIns="0" tIns="0" rIns="0" bIns="0" rtlCol="0" anchor="t"/>
-          <a:lstStyle/>
-          <a:p>
-            <a:pPr indent="0" marL="0">
-              <a:buNone/>
-            </a:pPr>
-            <a:r>
-              <a:rPr lang="en-US" sz="1300" dirty="0">
-                <a:solidFill>
-                  <a:srgbClr val="8FA0B8"/>
-                </a:solidFill>
-                <a:latin typeface="맑은 고딕" pitchFamily="34" charset="0"/>
-                <a:ea typeface="맑은 고딕" pitchFamily="34" charset="-122"/>
-                <a:cs typeface="맑은 고딕" pitchFamily="34" charset="-120"/>
-              </a:rPr>
-              <a:t>※ 메뉴 이름·동작은 Claude 앱 업데이트로 바뀔 수 있습니다 (2026년 10월 기준)</a:t>
-            </a:r>
-            <a:endParaRPr lang="en-US" sz="1300" dirty="0"/>
-          </a:p>
-        </p:txBody>
-      </p:sp>
-    </p:spTree>
-  </p:cSld>
-  <p:clrMapOvr>
-    <a:masterClrMapping/>
-  </p:clrMapOvr>
-</p:sld>
-</file>
-
-<file path=ppt/slides/slide3.xml><?xml version="1.0" encoding="utf-8"?>
+<file path=ppt/slides/slide5.xml><?xml version="1.0" encoding="utf-8"?>
 <p:sld xmlns:a="http://schemas.openxmlformats.org/drawingml/2006/main" xmlns:r="http://schemas.openxmlformats.org/officeDocument/2006/relationships" xmlns:p="http://schemas.openxmlformats.org/presentationml/2006/main">
   <p:cSld name="Slide 3">
     <p:spTree>
@@ -13350,7 +17364,7 @@
             <a:pPr algn="l"/>
             <a:fld id="{F7021451-1387-4CA6-816F-3879F97B5CBC}" type="slidenum">
               <a:rPr b="0" lang="en-US"/>
-              <a:t>3</a:t>
+              <a:t>5</a:t>
             </a:fld>
             <a:endParaRPr lang="en-US"/>
           </a:p>
@@ -13364,7 +17378,7 @@
 </p:sld>
 </file>
 
-<file path=ppt/slides/slide4.xml><?xml version="1.0" encoding="utf-8"?>
+<file path=ppt/slides/slide6.xml><?xml version="1.0" encoding="utf-8"?>
 <p:sld xmlns:a="http://schemas.openxmlformats.org/drawingml/2006/main" xmlns:r="http://schemas.openxmlformats.org/officeDocument/2006/relationships" xmlns:p="http://schemas.openxmlformats.org/presentationml/2006/main">
   <p:cSld name="Slide 4">
     <p:spTree>
@@ -13969,7 +17983,7 @@
             <a:pPr algn="l"/>
             <a:fld id="{F7021451-1387-4CA6-816F-3879F97B5CBC}" type="slidenum">
               <a:rPr b="0" lang="en-US"/>
-              <a:t>4</a:t>
+              <a:t>6</a:t>
             </a:fld>
             <a:endParaRPr lang="en-US"/>
           </a:p>
@@ -13983,7 +17997,7 @@
 </p:sld>
 </file>
 
-<file path=ppt/slides/slide5.xml><?xml version="1.0" encoding="utf-8"?>
+<file path=ppt/slides/slide7.xml><?xml version="1.0" encoding="utf-8"?>
 <p:sld xmlns:a="http://schemas.openxmlformats.org/drawingml/2006/main" xmlns:r="http://schemas.openxmlformats.org/officeDocument/2006/relationships" xmlns:p="http://schemas.openxmlformats.org/presentationml/2006/main">
   <p:cSld name="Slide 5">
     <p:spTree>
@@ -14090,7 +18104,7 @@
 </p:sld>
 </file>
 
-<file path=ppt/slides/slide6.xml><?xml version="1.0" encoding="utf-8"?>
+<file path=ppt/slides/slide8.xml><?xml version="1.0" encoding="utf-8"?>
 <p:sld xmlns:a="http://schemas.openxmlformats.org/drawingml/2006/main" xmlns:r="http://schemas.openxmlformats.org/officeDocument/2006/relationships" xmlns:p="http://schemas.openxmlformats.org/presentationml/2006/main">
   <p:cSld name="Slide 6">
     <p:spTree>
@@ -14752,7 +18766,7 @@
             <a:pPr algn="l"/>
             <a:fld id="{F7021451-1387-4CA6-816F-3879F97B5CBC}" type="slidenum">
               <a:rPr b="0" lang="en-US"/>
-              <a:t>6</a:t>
+              <a:t>8</a:t>
             </a:fld>
             <a:endParaRPr lang="en-US"/>
           </a:p>
@@ -14766,7 +18780,7 @@
 </p:sld>
 </file>
 
-<file path=ppt/slides/slide7.xml><?xml version="1.0" encoding="utf-8"?>
+<file path=ppt/slides/slide9.xml><?xml version="1.0" encoding="utf-8"?>
 <p:sld xmlns:a="http://schemas.openxmlformats.org/drawingml/2006/main" xmlns:r="http://schemas.openxmlformats.org/officeDocument/2006/relationships" xmlns:p="http://schemas.openxmlformats.org/presentationml/2006/main">
   <p:cSld name="Slide 7">
     <p:spTree>
@@ -15404,2372 +19418,6 @@
               <a:t>교훈  「성공」 표시가 아니라 결과 파일로 판정한다</a:t>
             </a:r>
             <a:endParaRPr lang="en-US" sz="1800" dirty="0"/>
-          </a:p>
-        </p:txBody>
-      </p:sp>
-      <p:sp>
-        <p:nvSpPr>
-          <p:cNvPr id="25" name="Slide Number Placeholder 0"/>
-          <p:cNvSpPr>
-            <a:spLocks noGrp="1"/>
-          </p:cNvSpPr>
-          <p:nvPr>
-            <p:ph type="sldNum" sz="quarter" idx="4294967295"/>
-          </p:nvPr>
-        </p:nvSpPr>
-        <p:spPr>
-          <a:xfrm>
-            <a:off x="11247120" y="6400800"/>
-            <a:ext cx="548640" cy="274320"/>
-          </a:xfrm>
-          <a:prstGeom prst="rect">
-            <a:avLst/>
-          </a:prstGeom>
-          <a:extLst>
-            <a:ext uri="{C572A759-6A51-4108-AA02-DFA0A04FC94B}">
-              <ma14:wrappingTextBoxFlag xmlns:ma14="http://schemas.microsoft.com/office/mac/drawingml/2011/main" val="0"/>
-            </a:ext>
-          </a:extLst>
-        </p:spPr>
-        <p:txBody>
-          <a:bodyPr/>
-          <a:lstStyle>
-            <a:lvl1pPr>
-              <a:defRPr sz="1000">
-                <a:solidFill>
-                  <a:srgbClr val="6B7A90"/>
-                </a:solidFill>
-                <a:latin typeface="맑은 고딕"/>
-                <a:ea typeface="맑은 고딕"/>
-                <a:cs typeface="맑은 고딕"/>
-              </a:defRPr>
-            </a:lvl1pPr>
-          </a:lstStyle>
-          <a:p>
-            <a:pPr algn="l"/>
-            <a:fld id="{F7021451-1387-4CA6-816F-3879F97B5CBC}" type="slidenum">
-              <a:rPr b="0" lang="en-US"/>
-              <a:t>7</a:t>
-            </a:fld>
-            <a:endParaRPr lang="en-US"/>
-          </a:p>
-        </p:txBody>
-      </p:sp>
-    </p:spTree>
-  </p:cSld>
-  <p:clrMapOvr>
-    <a:masterClrMapping/>
-  </p:clrMapOvr>
-</p:sld>
-</file>
-
-<file path=ppt/slides/slide8.xml><?xml version="1.0" encoding="utf-8"?>
-<p:sld xmlns:a="http://schemas.openxmlformats.org/drawingml/2006/main" xmlns:r="http://schemas.openxmlformats.org/officeDocument/2006/relationships" xmlns:p="http://schemas.openxmlformats.org/presentationml/2006/main">
-  <p:cSld name="Slide 8">
-    <p:spTree>
-      <p:nvGrpSpPr>
-        <p:cNvPr id="1" name=""/>
-        <p:cNvGrpSpPr/>
-        <p:nvPr/>
-      </p:nvGrpSpPr>
-      <p:grpSpPr>
-        <a:xfrm>
-          <a:off x="0" y="0"/>
-          <a:ext cx="0" cy="0"/>
-          <a:chOff x="0" y="0"/>
-          <a:chExt cx="0" cy="0"/>
-        </a:xfrm>
-      </p:grpSpPr>
-      <p:sp>
-        <p:nvSpPr>
-          <p:cNvPr id="2" name="Text 0"/>
-          <p:cNvSpPr/>
-          <p:nvPr>
-            <p:ph idx="100" type="title" hasCustomPrompt="1"/>
-          </p:nvPr>
-        </p:nvSpPr>
-        <p:spPr>
-          <a:xfrm>
-            <a:off x="548640" y="320040"/>
-            <a:ext cx="11064240" cy="822960"/>
-          </a:xfrm>
-          <a:prstGeom prst="rect">
-            <a:avLst/>
-          </a:prstGeom>
-          <a:noFill/>
-          <a:ln/>
-        </p:spPr>
-        <p:txBody>
-          <a:bodyPr wrap="square" rtlCol="0" anchor="ctr"/>
-          <a:lstStyle/>
-          <a:p>
-            <a:pPr indent="0" marL="0">
-              <a:buNone/>
-            </a:pPr>
-            <a:r>
-              <a:rPr lang="en-US" sz="2800" b="1" dirty="0">
-                <a:solidFill>
-                  <a:srgbClr val="1C2333"/>
-                </a:solidFill>
-                <a:latin typeface="맑은 고딕" pitchFamily="34" charset="0"/>
-                <a:ea typeface="맑은 고딕" pitchFamily="34" charset="-122"/>
-                <a:cs typeface="맑은 고딕" pitchFamily="34" charset="-120"/>
-              </a:rPr>
-              <a:t>PC 앱이 꺼지면 「반쪽 실행」</a:t>
-            </a:r>
-            <a:endParaRPr lang="en-US" sz="2800" dirty="0"/>
-          </a:p>
-        </p:txBody>
-      </p:sp>
-      <p:sp>
-        <p:nvSpPr>
-          <p:cNvPr id="3" name="Shape 1"/>
-          <p:cNvSpPr/>
-          <p:nvPr/>
-        </p:nvSpPr>
-        <p:spPr>
-          <a:xfrm>
-            <a:off x="548640" y="1325880"/>
-            <a:ext cx="548640" cy="548640"/>
-          </a:xfrm>
-          <a:prstGeom prst="ellipse">
-            <a:avLst/>
-          </a:prstGeom>
-          <a:solidFill>
-            <a:srgbClr val="D9534F"/>
-          </a:solidFill>
-          <a:ln w="12700">
-            <a:solidFill>
-              <a:srgbClr val="D9534F"/>
-            </a:solidFill>
-            <a:prstDash val="solid"/>
-          </a:ln>
-        </p:spPr>
-      </p:sp>
-      <p:sp>
-        <p:nvSpPr>
-          <p:cNvPr id="4" name="Text 2"/>
-          <p:cNvSpPr txBox="1"/>
-          <p:nvPr/>
-        </p:nvSpPr>
-        <p:spPr>
-          <a:xfrm>
-            <a:off x="548640" y="1325880"/>
-            <a:ext cx="548640" cy="548640"/>
-          </a:xfrm>
-          <a:prstGeom prst="rect">
-            <a:avLst/>
-          </a:prstGeom>
-          <a:noFill/>
-          <a:ln/>
-        </p:spPr>
-        <p:txBody>
-          <a:bodyPr wrap="square" lIns="0" tIns="0" rIns="0" bIns="0" rtlCol="0" anchor="ctr"/>
-          <a:lstStyle/>
-          <a:p>
-            <a:pPr algn="ctr" indent="0" marL="0">
-              <a:buNone/>
-            </a:pPr>
-            <a:r>
-              <a:rPr lang="en-US" sz="1600" b="1" dirty="0">
-                <a:solidFill>
-                  <a:srgbClr val="FFFFFF"/>
-                </a:solidFill>
-                <a:latin typeface="맑은 고딕" pitchFamily="34" charset="0"/>
-                <a:ea typeface="맑은 고딕" pitchFamily="34" charset="-122"/>
-                <a:cs typeface="맑은 고딕" pitchFamily="34" charset="-120"/>
-              </a:rPr>
-              <a:t>3</a:t>
-            </a:r>
-            <a:endParaRPr lang="en-US" sz="1600" dirty="0"/>
-          </a:p>
-        </p:txBody>
-      </p:sp>
-      <p:sp>
-        <p:nvSpPr>
-          <p:cNvPr id="5" name="card"/>
-          <p:cNvSpPr/>
-          <p:nvPr/>
-        </p:nvSpPr>
-        <p:spPr>
-          <a:xfrm>
-            <a:off x="548640" y="2103120"/>
-            <a:ext cx="3520440" cy="2743200"/>
-          </a:xfrm>
-          <a:prstGeom prst="roundRect">
-            <a:avLst>
-              <a:gd name="adj" fmla="val 2667"/>
-            </a:avLst>
-          </a:prstGeom>
-          <a:solidFill>
-            <a:srgbClr val="FBEAEA"/>
-          </a:solidFill>
-          <a:ln w="12700">
-            <a:solidFill>
-              <a:srgbClr val="FBEAEA"/>
-            </a:solidFill>
-            <a:prstDash val="solid"/>
-          </a:ln>
-        </p:spPr>
-      </p:sp>
-      <p:sp>
-        <p:nvSpPr>
-          <p:cNvPr id="6" name="Text 4"/>
-          <p:cNvSpPr txBox="1"/>
-          <p:nvPr/>
-        </p:nvSpPr>
-        <p:spPr>
-          <a:xfrm>
-            <a:off x="822960" y="2286000"/>
-            <a:ext cx="3017520" cy="411480"/>
-          </a:xfrm>
-          <a:prstGeom prst="rect">
-            <a:avLst/>
-          </a:prstGeom>
-          <a:noFill/>
-          <a:ln/>
-        </p:spPr>
-        <p:txBody>
-          <a:bodyPr wrap="square" lIns="0" tIns="0" rIns="0" bIns="0" rtlCol="0" anchor="t"/>
-          <a:lstStyle/>
-          <a:p>
-            <a:pPr indent="0" marL="0">
-              <a:buNone/>
-            </a:pPr>
-            <a:r>
-              <a:rPr lang="en-US" sz="1800" b="1" dirty="0">
-                <a:solidFill>
-                  <a:srgbClr val="D9534F"/>
-                </a:solidFill>
-                <a:latin typeface="맑은 고딕" pitchFamily="34" charset="0"/>
-                <a:ea typeface="맑은 고딕" pitchFamily="34" charset="-122"/>
-                <a:cs typeface="맑은 고딕" pitchFamily="34" charset="-120"/>
-              </a:rPr>
-              <a:t>증상</a:t>
-            </a:r>
-            <a:endParaRPr lang="en-US" sz="1800" dirty="0"/>
-          </a:p>
-        </p:txBody>
-      </p:sp>
-      <p:sp>
-        <p:nvSpPr>
-          <p:cNvPr id="7" name="Text 5"/>
-          <p:cNvSpPr txBox="1"/>
-          <p:nvPr/>
-        </p:nvSpPr>
-        <p:spPr>
-          <a:xfrm>
-            <a:off x="822960" y="2788920"/>
-            <a:ext cx="3017520" cy="1965960"/>
-          </a:xfrm>
-          <a:prstGeom prst="rect">
-            <a:avLst/>
-          </a:prstGeom>
-          <a:noFill/>
-          <a:ln/>
-        </p:spPr>
-        <p:txBody>
-          <a:bodyPr wrap="square" lIns="0" tIns="0" rIns="0" bIns="0" rtlCol="0" anchor="t"/>
-          <a:lstStyle/>
-          <a:p>
-            <a:pPr marL="342900" indent="-342900">
-              <a:spcAft>
-                <a:spcPts val="600"/>
-              </a:spcAft>
-              <a:buSzPct val="100000"/>
-              <a:buChar char="•"/>
-            </a:pPr>
-            <a:r>
-              <a:rPr lang="en-US" sz="1400" dirty="0">
-                <a:solidFill>
-                  <a:srgbClr val="1C2333"/>
-                </a:solidFill>
-                <a:latin typeface="맑은 고딕" pitchFamily="34" charset="0"/>
-                <a:ea typeface="맑은 고딕" pitchFamily="34" charset="-122"/>
-                <a:cs typeface="맑은 고딕" pitchFamily="34" charset="-120"/>
-              </a:rPr>
-              <a:t>일부 단계만 하고 끝난 회차</a:t>
-            </a:r>
-            <a:endParaRPr lang="en-US" sz="1400" dirty="0"/>
-          </a:p>
-          <a:p>
-            <a:pPr marL="342900" indent="-342900">
-              <a:spcAft>
-                <a:spcPts val="600"/>
-              </a:spcAft>
-              <a:buSzPct val="100000"/>
-              <a:buChar char="•"/>
-            </a:pPr>
-            <a:r>
-              <a:rPr lang="en-US" sz="1400" dirty="0">
-                <a:solidFill>
-                  <a:srgbClr val="1C2333"/>
-                </a:solidFill>
-                <a:latin typeface="맑은 고딕" pitchFamily="34" charset="0"/>
-                <a:ea typeface="맑은 고딕" pitchFamily="34" charset="-122"/>
-                <a:cs typeface="맑은 고딕" pitchFamily="34" charset="-120"/>
-              </a:rPr>
-              <a:t>주말에는 아무 작업도 결과가 없음</a:t>
-            </a:r>
-            <a:endParaRPr lang="en-US" sz="1400" dirty="0"/>
-          </a:p>
-          <a:p>
-            <a:pPr marL="342900" indent="-342900">
-              <a:spcAft>
-                <a:spcPts val="600"/>
-              </a:spcAft>
-              <a:buSzPct val="100000"/>
-              <a:buChar char="•"/>
-            </a:pPr>
-            <a:r>
-              <a:rPr lang="en-US" sz="1400" dirty="0">
-                <a:solidFill>
-                  <a:srgbClr val="1C2333"/>
-                </a:solidFill>
-                <a:latin typeface="맑은 고딕" pitchFamily="34" charset="0"/>
-                <a:ea typeface="맑은 고딕" pitchFamily="34" charset="-122"/>
-                <a:cs typeface="맑은 고딕" pitchFamily="34" charset="-120"/>
-              </a:rPr>
-              <a:t>「신규 0건」처럼 보고 — 실제로는 확인을 못 한 것</a:t>
-            </a:r>
-            <a:endParaRPr lang="en-US" sz="1400" dirty="0"/>
-          </a:p>
-        </p:txBody>
-      </p:sp>
-      <p:sp>
-        <p:nvSpPr>
-          <p:cNvPr id="8" name="card"/>
-          <p:cNvSpPr/>
-          <p:nvPr/>
-        </p:nvSpPr>
-        <p:spPr>
-          <a:xfrm>
-            <a:off x="4297680" y="2103120"/>
-            <a:ext cx="3520440" cy="2743200"/>
-          </a:xfrm>
-          <a:prstGeom prst="roundRect">
-            <a:avLst>
-              <a:gd name="adj" fmla="val 2667"/>
-            </a:avLst>
-          </a:prstGeom>
-          <a:solidFill>
-            <a:srgbClr val="FCF2E1"/>
-          </a:solidFill>
-          <a:ln w="12700">
-            <a:solidFill>
-              <a:srgbClr val="FCF2E1"/>
-            </a:solidFill>
-            <a:prstDash val="solid"/>
-          </a:ln>
-        </p:spPr>
-      </p:sp>
-      <p:sp>
-        <p:nvSpPr>
-          <p:cNvPr id="9" name="Text 7"/>
-          <p:cNvSpPr txBox="1"/>
-          <p:nvPr/>
-        </p:nvSpPr>
-        <p:spPr>
-          <a:xfrm>
-            <a:off x="4572000" y="2286000"/>
-            <a:ext cx="3017520" cy="411480"/>
-          </a:xfrm>
-          <a:prstGeom prst="rect">
-            <a:avLst/>
-          </a:prstGeom>
-          <a:noFill/>
-          <a:ln/>
-        </p:spPr>
-        <p:txBody>
-          <a:bodyPr wrap="square" lIns="0" tIns="0" rIns="0" bIns="0" rtlCol="0" anchor="t"/>
-          <a:lstStyle/>
-          <a:p>
-            <a:pPr indent="0" marL="0">
-              <a:buNone/>
-            </a:pPr>
-            <a:r>
-              <a:rPr lang="en-US" sz="1800" b="1" dirty="0">
-                <a:solidFill>
-                  <a:srgbClr val="B07316"/>
-                </a:solidFill>
-                <a:latin typeface="맑은 고딕" pitchFamily="34" charset="0"/>
-                <a:ea typeface="맑은 고딕" pitchFamily="34" charset="-122"/>
-                <a:cs typeface="맑은 고딕" pitchFamily="34" charset="-120"/>
-              </a:rPr>
-              <a:t>원인</a:t>
-            </a:r>
-            <a:endParaRPr lang="en-US" sz="1800" dirty="0"/>
-          </a:p>
-        </p:txBody>
-      </p:sp>
-      <p:sp>
-        <p:nvSpPr>
-          <p:cNvPr id="10" name="Text 8"/>
-          <p:cNvSpPr txBox="1"/>
-          <p:nvPr/>
-        </p:nvSpPr>
-        <p:spPr>
-          <a:xfrm>
-            <a:off x="4572000" y="2788920"/>
-            <a:ext cx="3017520" cy="1965960"/>
-          </a:xfrm>
-          <a:prstGeom prst="rect">
-            <a:avLst/>
-          </a:prstGeom>
-          <a:noFill/>
-          <a:ln/>
-        </p:spPr>
-        <p:txBody>
-          <a:bodyPr wrap="square" lIns="0" tIns="0" rIns="0" bIns="0" rtlCol="0" anchor="t"/>
-          <a:lstStyle/>
-          <a:p>
-            <a:pPr marL="342900" indent="-342900">
-              <a:spcAft>
-                <a:spcPts val="600"/>
-              </a:spcAft>
-              <a:buSzPct val="100000"/>
-              <a:buChar char="•"/>
-            </a:pPr>
-            <a:r>
-              <a:rPr lang="en-US" sz="1400" dirty="0">
-                <a:solidFill>
-                  <a:srgbClr val="1C2333"/>
-                </a:solidFill>
-                <a:latin typeface="맑은 고딕" pitchFamily="34" charset="0"/>
-                <a:ea typeface="맑은 고딕" pitchFamily="34" charset="-122"/>
-                <a:cs typeface="맑은 고딕" pitchFamily="34" charset="-120"/>
-              </a:rPr>
-              <a:t>클라우드 작업도 PC 도구·폴더·크롬은 데스크탑 앱을 거쳐야 닿음</a:t>
-            </a:r>
-            <a:endParaRPr lang="en-US" sz="1400" dirty="0"/>
-          </a:p>
-          <a:p>
-            <a:pPr marL="342900" indent="-342900">
-              <a:spcAft>
-                <a:spcPts val="600"/>
-              </a:spcAft>
-              <a:buSzPct val="100000"/>
-              <a:buChar char="•"/>
-            </a:pPr>
-            <a:r>
-              <a:rPr lang="en-US" sz="1400" dirty="0">
-                <a:solidFill>
-                  <a:srgbClr val="1C2333"/>
-                </a:solidFill>
-                <a:latin typeface="맑은 고딕" pitchFamily="34" charset="0"/>
-                <a:ea typeface="맑은 고딕" pitchFamily="34" charset="-122"/>
-                <a:cs typeface="맑은 고딕" pitchFamily="34" charset="-120"/>
-              </a:rPr>
-              <a:t>PC가 잠들거나 앱이 꺼지면 그 단계만 실패</a:t>
-            </a:r>
-            <a:endParaRPr lang="en-US" sz="1400" dirty="0"/>
-          </a:p>
-        </p:txBody>
-      </p:sp>
-      <p:sp>
-        <p:nvSpPr>
-          <p:cNvPr id="11" name="card"/>
-          <p:cNvSpPr/>
-          <p:nvPr/>
-        </p:nvSpPr>
-        <p:spPr>
-          <a:xfrm>
-            <a:off x="8046720" y="2103120"/>
-            <a:ext cx="3520440" cy="2743200"/>
-          </a:xfrm>
-          <a:prstGeom prst="roundRect">
-            <a:avLst>
-              <a:gd name="adj" fmla="val 2667"/>
-            </a:avLst>
-          </a:prstGeom>
-          <a:solidFill>
-            <a:srgbClr val="E4F3F1"/>
-          </a:solidFill>
-          <a:ln w="12700">
-            <a:solidFill>
-              <a:srgbClr val="E4F3F1"/>
-            </a:solidFill>
-            <a:prstDash val="solid"/>
-          </a:ln>
-        </p:spPr>
-      </p:sp>
-      <p:sp>
-        <p:nvSpPr>
-          <p:cNvPr id="12" name="Text 10"/>
-          <p:cNvSpPr txBox="1"/>
-          <p:nvPr/>
-        </p:nvSpPr>
-        <p:spPr>
-          <a:xfrm>
-            <a:off x="8321040" y="2286000"/>
-            <a:ext cx="3017520" cy="411480"/>
-          </a:xfrm>
-          <a:prstGeom prst="rect">
-            <a:avLst/>
-          </a:prstGeom>
-          <a:noFill/>
-          <a:ln/>
-        </p:spPr>
-        <p:txBody>
-          <a:bodyPr wrap="square" lIns="0" tIns="0" rIns="0" bIns="0" rtlCol="0" anchor="t"/>
-          <a:lstStyle/>
-          <a:p>
-            <a:pPr indent="0" marL="0">
-              <a:buNone/>
-            </a:pPr>
-            <a:r>
-              <a:rPr lang="en-US" sz="1800" b="1" dirty="0">
-                <a:solidFill>
-                  <a:srgbClr val="0F8C7E"/>
-                </a:solidFill>
-                <a:latin typeface="맑은 고딕" pitchFamily="34" charset="0"/>
-                <a:ea typeface="맑은 고딕" pitchFamily="34" charset="-122"/>
-                <a:cs typeface="맑은 고딕" pitchFamily="34" charset="-120"/>
-              </a:rPr>
-              <a:t>대응</a:t>
-            </a:r>
-            <a:endParaRPr lang="en-US" sz="1800" dirty="0"/>
-          </a:p>
-        </p:txBody>
-      </p:sp>
-      <p:sp>
-        <p:nvSpPr>
-          <p:cNvPr id="13" name="Text 11"/>
-          <p:cNvSpPr txBox="1"/>
-          <p:nvPr/>
-        </p:nvSpPr>
-        <p:spPr>
-          <a:xfrm>
-            <a:off x="8321040" y="2788920"/>
-            <a:ext cx="3017520" cy="1965960"/>
-          </a:xfrm>
-          <a:prstGeom prst="rect">
-            <a:avLst/>
-          </a:prstGeom>
-          <a:noFill/>
-          <a:ln/>
-        </p:spPr>
-        <p:txBody>
-          <a:bodyPr wrap="square" lIns="0" tIns="0" rIns="0" bIns="0" rtlCol="0" anchor="t"/>
-          <a:lstStyle/>
-          <a:p>
-            <a:pPr marL="342900" indent="-342900">
-              <a:spcAft>
-                <a:spcPts val="600"/>
-              </a:spcAft>
-              <a:buSzPct val="100000"/>
-              <a:buChar char="•"/>
-            </a:pPr>
-            <a:r>
-              <a:rPr lang="en-US" sz="1400" dirty="0">
-                <a:solidFill>
-                  <a:srgbClr val="1C2333"/>
-                </a:solidFill>
-                <a:latin typeface="맑은 고딕" pitchFamily="34" charset="0"/>
-                <a:ea typeface="맑은 고딕" pitchFamily="34" charset="-122"/>
-                <a:cs typeface="맑은 고딕" pitchFamily="34" charset="-120"/>
-              </a:rPr>
-              <a:t>시작 전 「사전 점검」: PC 도구를 하나씩 찔러 보고 실패하면 바로 중단</a:t>
-            </a:r>
-            <a:endParaRPr lang="en-US" sz="1400" dirty="0"/>
-          </a:p>
-          <a:p>
-            <a:pPr marL="342900" indent="-342900">
-              <a:spcAft>
-                <a:spcPts val="600"/>
-              </a:spcAft>
-              <a:buSzPct val="100000"/>
-              <a:buChar char="•"/>
-            </a:pPr>
-            <a:r>
-              <a:rPr lang="en-US" sz="1400" dirty="0">
-                <a:solidFill>
-                  <a:srgbClr val="1C2333"/>
-                </a:solidFill>
-                <a:latin typeface="맑은 고딕" pitchFamily="34" charset="0"/>
-                <a:ea typeface="맑은 고딕" pitchFamily="34" charset="-122"/>
-                <a:cs typeface="맑은 고딕" pitchFamily="34" charset="-120"/>
-              </a:rPr>
-              <a:t>중단하면 카톡으로 「PC 확인 필요」 알림</a:t>
-            </a:r>
-            <a:endParaRPr lang="en-US" sz="1400" dirty="0"/>
-          </a:p>
-          <a:p>
-            <a:pPr marL="342900" indent="-342900">
-              <a:spcAft>
-                <a:spcPts val="600"/>
-              </a:spcAft>
-              <a:buSzPct val="100000"/>
-              <a:buChar char="•"/>
-            </a:pPr>
-            <a:r>
-              <a:rPr lang="en-US" sz="1400" dirty="0">
-                <a:solidFill>
-                  <a:srgbClr val="1C2333"/>
-                </a:solidFill>
-                <a:latin typeface="맑은 고딕" pitchFamily="34" charset="0"/>
-                <a:ea typeface="맑은 고딕" pitchFamily="34" charset="-122"/>
-                <a:cs typeface="맑은 고딕" pitchFamily="34" charset="-120"/>
-              </a:rPr>
-              <a:t>「0건」과 「건너뜀」을 구분해 보고</a:t>
-            </a:r>
-            <a:endParaRPr lang="en-US" sz="1400" dirty="0"/>
-          </a:p>
-        </p:txBody>
-      </p:sp>
-      <p:sp>
-        <p:nvSpPr>
-          <p:cNvPr id="14" name="card"/>
-          <p:cNvSpPr/>
-          <p:nvPr/>
-        </p:nvSpPr>
-        <p:spPr>
-          <a:xfrm>
-            <a:off x="548640" y="5120640"/>
-            <a:ext cx="11064240" cy="868680"/>
-          </a:xfrm>
-          <a:prstGeom prst="roundRect">
-            <a:avLst>
-              <a:gd name="adj" fmla="val 8421"/>
-            </a:avLst>
-          </a:prstGeom>
-          <a:solidFill>
-            <a:srgbClr val="2B3A55"/>
-          </a:solidFill>
-          <a:ln w="12700">
-            <a:solidFill>
-              <a:srgbClr val="2B3A55"/>
-            </a:solidFill>
-            <a:prstDash val="solid"/>
-          </a:ln>
-        </p:spPr>
-      </p:sp>
-      <p:sp>
-        <p:nvSpPr>
-          <p:cNvPr id="15" name="Text 13"/>
-          <p:cNvSpPr txBox="1"/>
-          <p:nvPr/>
-        </p:nvSpPr>
-        <p:spPr>
-          <a:xfrm>
-            <a:off x="868680" y="5120640"/>
-            <a:ext cx="10515600" cy="868680"/>
-          </a:xfrm>
-          <a:prstGeom prst="rect">
-            <a:avLst/>
-          </a:prstGeom>
-          <a:noFill/>
-          <a:ln/>
-        </p:spPr>
-        <p:txBody>
-          <a:bodyPr wrap="square" lIns="0" tIns="0" rIns="0" bIns="0" rtlCol="0" anchor="ctr"/>
-          <a:lstStyle/>
-          <a:p>
-            <a:pPr indent="0" marL="0">
-              <a:buNone/>
-            </a:pPr>
-            <a:r>
-              <a:rPr lang="en-US" sz="1800" b="1" dirty="0">
-                <a:solidFill>
-                  <a:srgbClr val="FFFFFF"/>
-                </a:solidFill>
-                <a:latin typeface="맑은 고딕" pitchFamily="34" charset="0"/>
-                <a:ea typeface="맑은 고딕" pitchFamily="34" charset="-122"/>
-                <a:cs typeface="맑은 고딕" pitchFamily="34" charset="-120"/>
-              </a:rPr>
-              <a:t>교훈  클라우드 작업도 PC 도구를 쓰면 PC가 켜져 있어야 한다</a:t>
-            </a:r>
-            <a:endParaRPr lang="en-US" sz="1800" dirty="0"/>
-          </a:p>
-        </p:txBody>
-      </p:sp>
-      <p:sp>
-        <p:nvSpPr>
-          <p:cNvPr id="25" name="Slide Number Placeholder 0"/>
-          <p:cNvSpPr>
-            <a:spLocks noGrp="1"/>
-          </p:cNvSpPr>
-          <p:nvPr>
-            <p:ph type="sldNum" sz="quarter" idx="4294967295"/>
-          </p:nvPr>
-        </p:nvSpPr>
-        <p:spPr>
-          <a:xfrm>
-            <a:off x="11247120" y="6400800"/>
-            <a:ext cx="548640" cy="274320"/>
-          </a:xfrm>
-          <a:prstGeom prst="rect">
-            <a:avLst/>
-          </a:prstGeom>
-          <a:extLst>
-            <a:ext uri="{C572A759-6A51-4108-AA02-DFA0A04FC94B}">
-              <ma14:wrappingTextBoxFlag xmlns:ma14="http://schemas.microsoft.com/office/mac/drawingml/2011/main" val="0"/>
-            </a:ext>
-          </a:extLst>
-        </p:spPr>
-        <p:txBody>
-          <a:bodyPr/>
-          <a:lstStyle>
-            <a:lvl1pPr>
-              <a:defRPr sz="1000">
-                <a:solidFill>
-                  <a:srgbClr val="6B7A90"/>
-                </a:solidFill>
-                <a:latin typeface="맑은 고딕"/>
-                <a:ea typeface="맑은 고딕"/>
-                <a:cs typeface="맑은 고딕"/>
-              </a:defRPr>
-            </a:lvl1pPr>
-          </a:lstStyle>
-          <a:p>
-            <a:pPr algn="l"/>
-            <a:fld id="{F7021451-1387-4CA6-816F-3879F97B5CBC}" type="slidenum">
-              <a:rPr b="0" lang="en-US"/>
-              <a:t>8</a:t>
-            </a:fld>
-            <a:endParaRPr lang="en-US"/>
-          </a:p>
-        </p:txBody>
-      </p:sp>
-    </p:spTree>
-  </p:cSld>
-  <p:clrMapOvr>
-    <a:masterClrMapping/>
-  </p:clrMapOvr>
-</p:sld>
-</file>
-
-<file path=ppt/slides/slide9.xml><?xml version="1.0" encoding="utf-8"?>
-<p:sld xmlns:a="http://schemas.openxmlformats.org/drawingml/2006/main" xmlns:r="http://schemas.openxmlformats.org/officeDocument/2006/relationships" xmlns:p="http://schemas.openxmlformats.org/presentationml/2006/main">
-  <p:cSld name="Slide 9">
-    <p:spTree>
-      <p:nvGrpSpPr>
-        <p:cNvPr id="1" name=""/>
-        <p:cNvGrpSpPr/>
-        <p:nvPr/>
-      </p:nvGrpSpPr>
-      <p:grpSpPr>
-        <a:xfrm>
-          <a:off x="0" y="0"/>
-          <a:ext cx="0" cy="0"/>
-          <a:chOff x="0" y="0"/>
-          <a:chExt cx="0" cy="0"/>
-        </a:xfrm>
-      </p:grpSpPr>
-      <p:sp>
-        <p:nvSpPr>
-          <p:cNvPr id="2" name="Text 0"/>
-          <p:cNvSpPr/>
-          <p:nvPr>
-            <p:ph idx="100" type="title" hasCustomPrompt="1"/>
-          </p:nvPr>
-        </p:nvSpPr>
-        <p:spPr>
-          <a:xfrm>
-            <a:off x="548640" y="320040"/>
-            <a:ext cx="11064240" cy="822960"/>
-          </a:xfrm>
-          <a:prstGeom prst="rect">
-            <a:avLst/>
-          </a:prstGeom>
-          <a:noFill/>
-          <a:ln/>
-        </p:spPr>
-        <p:txBody>
-          <a:bodyPr wrap="square" rtlCol="0" anchor="ctr"/>
-          <a:lstStyle/>
-          <a:p>
-            <a:pPr indent="0" marL="0">
-              <a:buNone/>
-            </a:pPr>
-            <a:r>
-              <a:rPr lang="en-US" sz="2800" b="1" dirty="0">
-                <a:solidFill>
-                  <a:srgbClr val="1C2333"/>
-                </a:solidFill>
-                <a:latin typeface="맑은 고딕" pitchFamily="34" charset="0"/>
-                <a:ea typeface="맑은 고딕" pitchFamily="34" charset="-122"/>
-                <a:cs typeface="맑은 고딕" pitchFamily="34" charset="-120"/>
-              </a:rPr>
-              <a:t>문제 ④ 도구가 사라지거나 이름·경로가 바뀌었다</a:t>
-            </a:r>
-            <a:endParaRPr lang="en-US" sz="2800" dirty="0"/>
-          </a:p>
-        </p:txBody>
-      </p:sp>
-      <p:sp>
-        <p:nvSpPr>
-          <p:cNvPr id="3" name="Shape 1"/>
-          <p:cNvSpPr/>
-          <p:nvPr/>
-        </p:nvSpPr>
-        <p:spPr>
-          <a:xfrm>
-            <a:off x="548640" y="1325880"/>
-            <a:ext cx="548640" cy="548640"/>
-          </a:xfrm>
-          <a:prstGeom prst="ellipse">
-            <a:avLst/>
-          </a:prstGeom>
-          <a:solidFill>
-            <a:srgbClr val="D9534F"/>
-          </a:solidFill>
-          <a:ln w="12700">
-            <a:solidFill>
-              <a:srgbClr val="D9534F"/>
-            </a:solidFill>
-            <a:prstDash val="solid"/>
-          </a:ln>
-        </p:spPr>
-      </p:sp>
-      <p:sp>
-        <p:nvSpPr>
-          <p:cNvPr id="4" name="Text 2"/>
-          <p:cNvSpPr txBox="1"/>
-          <p:nvPr/>
-        </p:nvSpPr>
-        <p:spPr>
-          <a:xfrm>
-            <a:off x="548640" y="1325880"/>
-            <a:ext cx="548640" cy="548640"/>
-          </a:xfrm>
-          <a:prstGeom prst="rect">
-            <a:avLst/>
-          </a:prstGeom>
-          <a:noFill/>
-          <a:ln/>
-        </p:spPr>
-        <p:txBody>
-          <a:bodyPr wrap="square" lIns="0" tIns="0" rIns="0" bIns="0" rtlCol="0" anchor="ctr"/>
-          <a:lstStyle/>
-          <a:p>
-            <a:pPr algn="ctr" indent="0" marL="0">
-              <a:buNone/>
-            </a:pPr>
-            <a:r>
-              <a:rPr lang="en-US" sz="1600" b="1" dirty="0">
-                <a:solidFill>
-                  <a:srgbClr val="FFFFFF"/>
-                </a:solidFill>
-                <a:latin typeface="맑은 고딕" pitchFamily="34" charset="0"/>
-                <a:ea typeface="맑은 고딕" pitchFamily="34" charset="-122"/>
-                <a:cs typeface="맑은 고딕" pitchFamily="34" charset="-120"/>
-              </a:rPr>
-              <a:t>4</a:t>
-            </a:r>
-            <a:endParaRPr lang="en-US" sz="1600" dirty="0"/>
-          </a:p>
-        </p:txBody>
-      </p:sp>
-      <p:graphicFrame>
-        <p:nvGraphicFramePr>
-          <p:cNvPr id="10" name="Table 0"/>
-          <p:cNvGraphicFramePr>
-            <a:graphicFrameLocks noGrp="1"/>
-          </p:cNvGraphicFramePr>
-          <p:nvPr>
-            <p:extLst>
-              <p:ext uri="{D42A27DB-BD31-4B8C-83A1-F6EECF244321}">
-                <p14:modId xmlns:p14="http://schemas.microsoft.com/office/powerpoint/2010/main" val="1579011935"/>
-              </p:ext>
-            </p:extLst>
-          </p:nvPr>
-        </p:nvGraphicFramePr>
-        <p:xfrm>
-          <a:off x="1280160" y="1325880"/>
-          <a:ext cx="10332720" cy="914400"/>
-        </p:xfrm>
-        <a:graphic>
-          <a:graphicData uri="http://schemas.openxmlformats.org/drawingml/2006/table">
-            <a:tbl>
-              <a:tblPr/>
-              <a:tblGrid>
-                <a:gridCol w="2926080"/>
-                <a:gridCol w="3291840"/>
-                <a:gridCol w="4114800"/>
-              </a:tblGrid>
-              <a:tr h="566928">
-                <a:tc>
-                  <a:txBody>
-                    <a:bodyPr/>
-                    <a:lstStyle/>
-                    <a:p>
-                      <a:pPr indent="0" marL="0">
-                        <a:buNone/>
-                      </a:pPr>
-                      <a:r>
-                        <a:rPr lang="en-US" sz="1400" b="1" dirty="0">
-                          <a:solidFill>
-                            <a:srgbClr val="FFFFFF"/>
-                          </a:solidFill>
-                          <a:latin typeface="맑은 고딕" pitchFamily="34" charset="0"/>
-                          <a:ea typeface="맑은 고딕" pitchFamily="34" charset="-122"/>
-                          <a:cs typeface="맑은 고딕" pitchFamily="34" charset="-120"/>
-                        </a:rPr>
-                        <a:t>기능</a:t>
-                      </a:r>
-                      <a:endParaRPr lang="en-US" sz="1400" dirty="0">
-                        <a:latin typeface="맑은 고딕" charset="0"/>
-                        <a:ea typeface="맑은 고딕" charset="0"/>
-                        <a:cs typeface="맑은 고딕" charset="0"/>
-                      </a:endParaRPr>
-                    </a:p>
-                  </a:txBody>
-                  <a:tcPr marL="101600" marR="101600" marT="50800" marB="50800" anchor="ctr">
-                    <a:lnL w="6350" cap="flat" cmpd="sng" algn="ctr">
-                      <a:solidFill>
-                        <a:srgbClr val="D5DCE6"/>
-                      </a:solidFill>
-                      <a:prstDash val="solid"/>
-                      <a:round/>
-                      <a:headEnd type="none" w="med" len="med"/>
-                      <a:tailEnd type="none" w="med" len="med"/>
-                    </a:lnL>
-                    <a:lnR w="6350" cap="flat" cmpd="sng" algn="ctr">
-                      <a:solidFill>
-                        <a:srgbClr val="D5DCE6"/>
-                      </a:solidFill>
-                      <a:prstDash val="solid"/>
-                      <a:round/>
-                      <a:headEnd type="none" w="med" len="med"/>
-                      <a:tailEnd type="none" w="med" len="med"/>
-                    </a:lnR>
-                    <a:lnT w="6350" cap="flat" cmpd="sng" algn="ctr">
-                      <a:solidFill>
-                        <a:srgbClr val="D5DCE6"/>
-                      </a:solidFill>
-                      <a:prstDash val="solid"/>
-                      <a:round/>
-                      <a:headEnd type="none" w="med" len="med"/>
-                      <a:tailEnd type="none" w="med" len="med"/>
-                    </a:lnT>
-                    <a:lnB w="6350" cap="flat" cmpd="sng" algn="ctr">
-                      <a:solidFill>
-                        <a:srgbClr val="D5DCE6"/>
-                      </a:solidFill>
-                      <a:prstDash val="solid"/>
-                      <a:round/>
-                      <a:headEnd type="none" w="med" len="med"/>
-                      <a:tailEnd type="none" w="med" len="med"/>
-                    </a:lnB>
-                    <a:solidFill>
-                      <a:srgbClr val="2B3A55"/>
-                    </a:solidFill>
-                  </a:tcPr>
-                </a:tc>
-                <a:tc>
-                  <a:txBody>
-                    <a:bodyPr/>
-                    <a:lstStyle/>
-                    <a:p>
-                      <a:pPr indent="0" marL="0">
-                        <a:buNone/>
-                      </a:pPr>
-                      <a:r>
-                        <a:rPr lang="en-US" sz="1400" b="1" dirty="0">
-                          <a:solidFill>
-                            <a:srgbClr val="FFFFFF"/>
-                          </a:solidFill>
-                          <a:latin typeface="맑은 고딕" pitchFamily="34" charset="0"/>
-                          <a:ea typeface="맑은 고딕" pitchFamily="34" charset="-122"/>
-                          <a:cs typeface="맑은 고딕" pitchFamily="34" charset="-120"/>
-                        </a:rPr>
-                        <a:t>클라우드에서 실제로 본 것</a:t>
-                      </a:r>
-                      <a:endParaRPr lang="en-US" sz="1400" dirty="0">
-                        <a:latin typeface="맑은 고딕" charset="0"/>
-                        <a:ea typeface="맑은 고딕" charset="0"/>
-                        <a:cs typeface="맑은 고딕" charset="0"/>
-                      </a:endParaRPr>
-                    </a:p>
-                  </a:txBody>
-                  <a:tcPr marL="101600" marR="101600" marT="50800" marB="50800" anchor="ctr">
-                    <a:lnL w="6350" cap="flat" cmpd="sng" algn="ctr">
-                      <a:solidFill>
-                        <a:srgbClr val="D5DCE6"/>
-                      </a:solidFill>
-                      <a:prstDash val="solid"/>
-                      <a:round/>
-                      <a:headEnd type="none" w="med" len="med"/>
-                      <a:tailEnd type="none" w="med" len="med"/>
-                    </a:lnL>
-                    <a:lnR w="6350" cap="flat" cmpd="sng" algn="ctr">
-                      <a:solidFill>
-                        <a:srgbClr val="D5DCE6"/>
-                      </a:solidFill>
-                      <a:prstDash val="solid"/>
-                      <a:round/>
-                      <a:headEnd type="none" w="med" len="med"/>
-                      <a:tailEnd type="none" w="med" len="med"/>
-                    </a:lnR>
-                    <a:lnT w="6350" cap="flat" cmpd="sng" algn="ctr">
-                      <a:solidFill>
-                        <a:srgbClr val="D5DCE6"/>
-                      </a:solidFill>
-                      <a:prstDash val="solid"/>
-                      <a:round/>
-                      <a:headEnd type="none" w="med" len="med"/>
-                      <a:tailEnd type="none" w="med" len="med"/>
-                    </a:lnT>
-                    <a:lnB w="6350" cap="flat" cmpd="sng" algn="ctr">
-                      <a:solidFill>
-                        <a:srgbClr val="D5DCE6"/>
-                      </a:solidFill>
-                      <a:prstDash val="solid"/>
-                      <a:round/>
-                      <a:headEnd type="none" w="med" len="med"/>
-                      <a:tailEnd type="none" w="med" len="med"/>
-                    </a:lnB>
-                    <a:solidFill>
-                      <a:srgbClr val="2B3A55"/>
-                    </a:solidFill>
-                  </a:tcPr>
-                </a:tc>
-                <a:tc>
-                  <a:txBody>
-                    <a:bodyPr/>
-                    <a:lstStyle/>
-                    <a:p>
-                      <a:pPr indent="0" marL="0">
-                        <a:buNone/>
-                      </a:pPr>
-                      <a:r>
-                        <a:rPr lang="en-US" sz="1400" b="1" dirty="0">
-                          <a:solidFill>
-                            <a:srgbClr val="FFFFFF"/>
-                          </a:solidFill>
-                          <a:latin typeface="맑은 고딕" pitchFamily="34" charset="0"/>
-                          <a:ea typeface="맑은 고딕" pitchFamily="34" charset="-122"/>
-                          <a:cs typeface="맑은 고딕" pitchFamily="34" charset="-120"/>
-                        </a:rPr>
-                        <a:t>그래서 생긴 일</a:t>
-                      </a:r>
-                      <a:endParaRPr lang="en-US" sz="1400" dirty="0">
-                        <a:latin typeface="맑은 고딕" charset="0"/>
-                        <a:ea typeface="맑은 고딕" charset="0"/>
-                        <a:cs typeface="맑은 고딕" charset="0"/>
-                      </a:endParaRPr>
-                    </a:p>
-                  </a:txBody>
-                  <a:tcPr marL="101600" marR="101600" marT="50800" marB="50800" anchor="ctr">
-                    <a:lnL w="6350" cap="flat" cmpd="sng" algn="ctr">
-                      <a:solidFill>
-                        <a:srgbClr val="D5DCE6"/>
-                      </a:solidFill>
-                      <a:prstDash val="solid"/>
-                      <a:round/>
-                      <a:headEnd type="none" w="med" len="med"/>
-                      <a:tailEnd type="none" w="med" len="med"/>
-                    </a:lnL>
-                    <a:lnR w="6350" cap="flat" cmpd="sng" algn="ctr">
-                      <a:solidFill>
-                        <a:srgbClr val="D5DCE6"/>
-                      </a:solidFill>
-                      <a:prstDash val="solid"/>
-                      <a:round/>
-                      <a:headEnd type="none" w="med" len="med"/>
-                      <a:tailEnd type="none" w="med" len="med"/>
-                    </a:lnR>
-                    <a:lnT w="6350" cap="flat" cmpd="sng" algn="ctr">
-                      <a:solidFill>
-                        <a:srgbClr val="D5DCE6"/>
-                      </a:solidFill>
-                      <a:prstDash val="solid"/>
-                      <a:round/>
-                      <a:headEnd type="none" w="med" len="med"/>
-                      <a:tailEnd type="none" w="med" len="med"/>
-                    </a:lnT>
-                    <a:lnB w="6350" cap="flat" cmpd="sng" algn="ctr">
-                      <a:solidFill>
-                        <a:srgbClr val="D5DCE6"/>
-                      </a:solidFill>
-                      <a:prstDash val="solid"/>
-                      <a:round/>
-                      <a:headEnd type="none" w="med" len="med"/>
-                      <a:tailEnd type="none" w="med" len="med"/>
-                    </a:lnB>
-                    <a:solidFill>
-                      <a:srgbClr val="2B3A55"/>
-                    </a:solidFill>
-                  </a:tcPr>
-                </a:tc>
-              </a:tr>
-              <a:tr h="566928">
-                <a:tc>
-                  <a:txBody>
-                    <a:bodyPr/>
-                    <a:lstStyle/>
-                    <a:p>
-                      <a:pPr indent="0" marL="0">
-                        <a:buNone/>
-                      </a:pPr>
-                      <a:r>
-                        <a:rPr lang="en-US" sz="1400" dirty="0">
-                          <a:solidFill>
-                            <a:srgbClr val="1C2333"/>
-                          </a:solidFill>
-                          <a:latin typeface="맑은 고딕" pitchFamily="34" charset="0"/>
-                          <a:ea typeface="맑은 고딕" pitchFamily="34" charset="-122"/>
-                          <a:cs typeface="맑은 고딕" pitchFamily="34" charset="-120"/>
-                        </a:rPr>
-                        <a:t>스킬 저장(save_skill)</a:t>
-                      </a:r>
-                      <a:endParaRPr lang="en-US" sz="1400" dirty="0">
-                        <a:latin typeface="맑은 고딕" charset="0"/>
-                        <a:ea typeface="맑은 고딕" charset="0"/>
-                        <a:cs typeface="맑은 고딕" charset="0"/>
-                      </a:endParaRPr>
-                    </a:p>
-                  </a:txBody>
-                  <a:tcPr marL="101600" marR="101600" marT="50800" marB="50800" anchor="ctr">
-                    <a:lnL w="6350" cap="flat" cmpd="sng" algn="ctr">
-                      <a:solidFill>
-                        <a:srgbClr val="D5DCE6"/>
-                      </a:solidFill>
-                      <a:prstDash val="solid"/>
-                      <a:round/>
-                      <a:headEnd type="none" w="med" len="med"/>
-                      <a:tailEnd type="none" w="med" len="med"/>
-                    </a:lnL>
-                    <a:lnR w="6350" cap="flat" cmpd="sng" algn="ctr">
-                      <a:solidFill>
-                        <a:srgbClr val="D5DCE6"/>
-                      </a:solidFill>
-                      <a:prstDash val="solid"/>
-                      <a:round/>
-                      <a:headEnd type="none" w="med" len="med"/>
-                      <a:tailEnd type="none" w="med" len="med"/>
-                    </a:lnR>
-                    <a:lnT w="6350" cap="flat" cmpd="sng" algn="ctr">
-                      <a:solidFill>
-                        <a:srgbClr val="D5DCE6"/>
-                      </a:solidFill>
-                      <a:prstDash val="solid"/>
-                      <a:round/>
-                      <a:headEnd type="none" w="med" len="med"/>
-                      <a:tailEnd type="none" w="med" len="med"/>
-                    </a:lnT>
-                    <a:lnB w="6350" cap="flat" cmpd="sng" algn="ctr">
-                      <a:solidFill>
-                        <a:srgbClr val="D5DCE6"/>
-                      </a:solidFill>
-                      <a:prstDash val="solid"/>
-                      <a:round/>
-                      <a:headEnd type="none" w="med" len="med"/>
-                      <a:tailEnd type="none" w="med" len="med"/>
-                    </a:lnB>
-                    <a:solidFill>
-                      <a:srgbClr val="FFFFFF"/>
-                    </a:solidFill>
-                  </a:tcPr>
-                </a:tc>
-                <a:tc>
-                  <a:txBody>
-                    <a:bodyPr/>
-                    <a:lstStyle/>
-                    <a:p>
-                      <a:pPr indent="0" marL="0">
-                        <a:buNone/>
-                      </a:pPr>
-                      <a:r>
-                        <a:rPr lang="en-US" sz="1400" dirty="0">
-                          <a:solidFill>
-                            <a:srgbClr val="1C2333"/>
-                          </a:solidFill>
-                          <a:latin typeface="맑은 고딕" pitchFamily="34" charset="0"/>
-                          <a:ea typeface="맑은 고딕" pitchFamily="34" charset="-122"/>
-                          <a:cs typeface="맑은 고딕" pitchFamily="34" charset="-120"/>
-                        </a:rPr>
-                        <a:t>도구 자체가 없음</a:t>
-                      </a:r>
-                      <a:endParaRPr lang="en-US" sz="1400" dirty="0">
-                        <a:latin typeface="맑은 고딕" charset="0"/>
-                        <a:ea typeface="맑은 고딕" charset="0"/>
-                        <a:cs typeface="맑은 고딕" charset="0"/>
-                      </a:endParaRPr>
-                    </a:p>
-                  </a:txBody>
-                  <a:tcPr marL="101600" marR="101600" marT="50800" marB="50800" anchor="ctr">
-                    <a:lnL w="6350" cap="flat" cmpd="sng" algn="ctr">
-                      <a:solidFill>
-                        <a:srgbClr val="D5DCE6"/>
-                      </a:solidFill>
-                      <a:prstDash val="solid"/>
-                      <a:round/>
-                      <a:headEnd type="none" w="med" len="med"/>
-                      <a:tailEnd type="none" w="med" len="med"/>
-                    </a:lnL>
-                    <a:lnR w="6350" cap="flat" cmpd="sng" algn="ctr">
-                      <a:solidFill>
-                        <a:srgbClr val="D5DCE6"/>
-                      </a:solidFill>
-                      <a:prstDash val="solid"/>
-                      <a:round/>
-                      <a:headEnd type="none" w="med" len="med"/>
-                      <a:tailEnd type="none" w="med" len="med"/>
-                    </a:lnR>
-                    <a:lnT w="6350" cap="flat" cmpd="sng" algn="ctr">
-                      <a:solidFill>
-                        <a:srgbClr val="D5DCE6"/>
-                      </a:solidFill>
-                      <a:prstDash val="solid"/>
-                      <a:round/>
-                      <a:headEnd type="none" w="med" len="med"/>
-                      <a:tailEnd type="none" w="med" len="med"/>
-                    </a:lnT>
-                    <a:lnB w="6350" cap="flat" cmpd="sng" algn="ctr">
-                      <a:solidFill>
-                        <a:srgbClr val="D5DCE6"/>
-                      </a:solidFill>
-                      <a:prstDash val="solid"/>
-                      <a:round/>
-                      <a:headEnd type="none" w="med" len="med"/>
-                      <a:tailEnd type="none" w="med" len="med"/>
-                    </a:lnB>
-                    <a:solidFill>
-                      <a:srgbClr val="FFFFFF"/>
-                    </a:solidFill>
-                  </a:tcPr>
-                </a:tc>
-                <a:tc>
-                  <a:txBody>
-                    <a:bodyPr/>
-                    <a:lstStyle/>
-                    <a:p>
-                      <a:pPr indent="0" marL="0">
-                        <a:buNone/>
-                      </a:pPr>
-                      <a:r>
-                        <a:rPr lang="en-US" sz="1400" dirty="0">
-                          <a:solidFill>
-                            <a:srgbClr val="1C2333"/>
-                          </a:solidFill>
-                          <a:latin typeface="맑은 고딕" pitchFamily="34" charset="0"/>
-                          <a:ea typeface="맑은 고딕" pitchFamily="34" charset="-122"/>
-                          <a:cs typeface="맑은 고딕" pitchFamily="34" charset="-120"/>
-                        </a:rPr>
-                        <a:t>계수 자동 반영이 멈춰 사람이 파일을 직접 저장</a:t>
-                      </a:r>
-                      <a:endParaRPr lang="en-US" sz="1400" dirty="0">
-                        <a:latin typeface="맑은 고딕" charset="0"/>
-                        <a:ea typeface="맑은 고딕" charset="0"/>
-                        <a:cs typeface="맑은 고딕" charset="0"/>
-                      </a:endParaRPr>
-                    </a:p>
-                  </a:txBody>
-                  <a:tcPr marL="101600" marR="101600" marT="50800" marB="50800" anchor="ctr">
-                    <a:lnL w="6350" cap="flat" cmpd="sng" algn="ctr">
-                      <a:solidFill>
-                        <a:srgbClr val="D5DCE6"/>
-                      </a:solidFill>
-                      <a:prstDash val="solid"/>
-                      <a:round/>
-                      <a:headEnd type="none" w="med" len="med"/>
-                      <a:tailEnd type="none" w="med" len="med"/>
-                    </a:lnL>
-                    <a:lnR w="6350" cap="flat" cmpd="sng" algn="ctr">
-                      <a:solidFill>
-                        <a:srgbClr val="D5DCE6"/>
-                      </a:solidFill>
-                      <a:prstDash val="solid"/>
-                      <a:round/>
-                      <a:headEnd type="none" w="med" len="med"/>
-                      <a:tailEnd type="none" w="med" len="med"/>
-                    </a:lnR>
-                    <a:lnT w="6350" cap="flat" cmpd="sng" algn="ctr">
-                      <a:solidFill>
-                        <a:srgbClr val="D5DCE6"/>
-                      </a:solidFill>
-                      <a:prstDash val="solid"/>
-                      <a:round/>
-                      <a:headEnd type="none" w="med" len="med"/>
-                      <a:tailEnd type="none" w="med" len="med"/>
-                    </a:lnT>
-                    <a:lnB w="6350" cap="flat" cmpd="sng" algn="ctr">
-                      <a:solidFill>
-                        <a:srgbClr val="D5DCE6"/>
-                      </a:solidFill>
-                      <a:prstDash val="solid"/>
-                      <a:round/>
-                      <a:headEnd type="none" w="med" len="med"/>
-                      <a:tailEnd type="none" w="med" len="med"/>
-                    </a:lnB>
-                    <a:solidFill>
-                      <a:srgbClr val="FFFFFF"/>
-                    </a:solidFill>
-                  </a:tcPr>
-                </a:tc>
-              </a:tr>
-              <a:tr h="566928">
-                <a:tc>
-                  <a:txBody>
-                    <a:bodyPr/>
-                    <a:lstStyle/>
-                    <a:p>
-                      <a:pPr indent="0" marL="0">
-                        <a:buNone/>
-                      </a:pPr>
-                      <a:r>
-                        <a:rPr lang="en-US" sz="1400" dirty="0">
-                          <a:solidFill>
-                            <a:srgbClr val="1C2333"/>
-                          </a:solidFill>
-                          <a:latin typeface="맑은 고딕" pitchFamily="34" charset="0"/>
-                          <a:ea typeface="맑은 고딕" pitchFamily="34" charset="-122"/>
-                          <a:cs typeface="맑은 고딕" pitchFamily="34" charset="-120"/>
-                        </a:rPr>
-                        <a:t>다른 세션 보고 읽기</a:t>
-                      </a:r>
-                      <a:endParaRPr lang="en-US" sz="1400" dirty="0">
-                        <a:latin typeface="맑은 고딕" charset="0"/>
-                        <a:ea typeface="맑은 고딕" charset="0"/>
-                        <a:cs typeface="맑은 고딕" charset="0"/>
-                      </a:endParaRPr>
-                    </a:p>
-                  </a:txBody>
-                  <a:tcPr marL="101600" marR="101600" marT="50800" marB="50800" anchor="ctr">
-                    <a:lnL w="6350" cap="flat" cmpd="sng" algn="ctr">
-                      <a:solidFill>
-                        <a:srgbClr val="D5DCE6"/>
-                      </a:solidFill>
-                      <a:prstDash val="solid"/>
-                      <a:round/>
-                      <a:headEnd type="none" w="med" len="med"/>
-                      <a:tailEnd type="none" w="med" len="med"/>
-                    </a:lnL>
-                    <a:lnR w="6350" cap="flat" cmpd="sng" algn="ctr">
-                      <a:solidFill>
-                        <a:srgbClr val="D5DCE6"/>
-                      </a:solidFill>
-                      <a:prstDash val="solid"/>
-                      <a:round/>
-                      <a:headEnd type="none" w="med" len="med"/>
-                      <a:tailEnd type="none" w="med" len="med"/>
-                    </a:lnR>
-                    <a:lnT w="6350" cap="flat" cmpd="sng" algn="ctr">
-                      <a:solidFill>
-                        <a:srgbClr val="D5DCE6"/>
-                      </a:solidFill>
-                      <a:prstDash val="solid"/>
-                      <a:round/>
-                      <a:headEnd type="none" w="med" len="med"/>
-                      <a:tailEnd type="none" w="med" len="med"/>
-                    </a:lnT>
-                    <a:lnB w="6350" cap="flat" cmpd="sng" algn="ctr">
-                      <a:solidFill>
-                        <a:srgbClr val="D5DCE6"/>
-                      </a:solidFill>
-                      <a:prstDash val="solid"/>
-                      <a:round/>
-                      <a:headEnd type="none" w="med" len="med"/>
-                      <a:tailEnd type="none" w="med" len="med"/>
-                    </a:lnB>
-                    <a:solidFill>
-                      <a:srgbClr val="EEF2F7"/>
-                    </a:solidFill>
-                  </a:tcPr>
-                </a:tc>
-                <a:tc>
-                  <a:txBody>
-                    <a:bodyPr/>
-                    <a:lstStyle/>
-                    <a:p>
-                      <a:pPr indent="0" marL="0">
-                        <a:buNone/>
-                      </a:pPr>
-                      <a:r>
-                        <a:rPr lang="en-US" sz="1400" dirty="0">
-                          <a:solidFill>
-                            <a:srgbClr val="1C2333"/>
-                          </a:solidFill>
-                          <a:latin typeface="맑은 고딕" pitchFamily="34" charset="0"/>
-                          <a:ea typeface="맑은 고딕" pitchFamily="34" charset="-122"/>
-                          <a:cs typeface="맑은 고딕" pitchFamily="34" charset="-120"/>
-                        </a:rPr>
-                        <a:t>도구 없음</a:t>
-                      </a:r>
-                      <a:endParaRPr lang="en-US" sz="1400" dirty="0">
-                        <a:latin typeface="맑은 고딕" charset="0"/>
-                        <a:ea typeface="맑은 고딕" charset="0"/>
-                        <a:cs typeface="맑은 고딕" charset="0"/>
-                      </a:endParaRPr>
-                    </a:p>
-                  </a:txBody>
-                  <a:tcPr marL="101600" marR="101600" marT="50800" marB="50800" anchor="ctr">
-                    <a:lnL w="6350" cap="flat" cmpd="sng" algn="ctr">
-                      <a:solidFill>
-                        <a:srgbClr val="D5DCE6"/>
-                      </a:solidFill>
-                      <a:prstDash val="solid"/>
-                      <a:round/>
-                      <a:headEnd type="none" w="med" len="med"/>
-                      <a:tailEnd type="none" w="med" len="med"/>
-                    </a:lnL>
-                    <a:lnR w="6350" cap="flat" cmpd="sng" algn="ctr">
-                      <a:solidFill>
-                        <a:srgbClr val="D5DCE6"/>
-                      </a:solidFill>
-                      <a:prstDash val="solid"/>
-                      <a:round/>
-                      <a:headEnd type="none" w="med" len="med"/>
-                      <a:tailEnd type="none" w="med" len="med"/>
-                    </a:lnR>
-                    <a:lnT w="6350" cap="flat" cmpd="sng" algn="ctr">
-                      <a:solidFill>
-                        <a:srgbClr val="D5DCE6"/>
-                      </a:solidFill>
-                      <a:prstDash val="solid"/>
-                      <a:round/>
-                      <a:headEnd type="none" w="med" len="med"/>
-                      <a:tailEnd type="none" w="med" len="med"/>
-                    </a:lnT>
-                    <a:lnB w="6350" cap="flat" cmpd="sng" algn="ctr">
-                      <a:solidFill>
-                        <a:srgbClr val="D5DCE6"/>
-                      </a:solidFill>
-                      <a:prstDash val="solid"/>
-                      <a:round/>
-                      <a:headEnd type="none" w="med" len="med"/>
-                      <a:tailEnd type="none" w="med" len="med"/>
-                    </a:lnB>
-                    <a:solidFill>
-                      <a:srgbClr val="EEF2F7"/>
-                    </a:solidFill>
-                  </a:tcPr>
-                </a:tc>
-                <a:tc>
-                  <a:txBody>
-                    <a:bodyPr/>
-                    <a:lstStyle/>
-                    <a:p>
-                      <a:pPr indent="0" marL="0">
-                        <a:buNone/>
-                      </a:pPr>
-                      <a:r>
-                        <a:rPr lang="en-US" sz="1400" dirty="0">
-                          <a:solidFill>
-                            <a:srgbClr val="1C2333"/>
-                          </a:solidFill>
-                          <a:latin typeface="맑은 고딕" pitchFamily="34" charset="0"/>
-                          <a:ea typeface="맑은 고딕" pitchFamily="34" charset="-122"/>
-                          <a:cs typeface="맑은 고딕" pitchFamily="34" charset="-120"/>
-                        </a:rPr>
-                        <a:t>주간 점검이 각 작업 보고를 못 읽음</a:t>
-                      </a:r>
-                      <a:endParaRPr lang="en-US" sz="1400" dirty="0">
-                        <a:latin typeface="맑은 고딕" charset="0"/>
-                        <a:ea typeface="맑은 고딕" charset="0"/>
-                        <a:cs typeface="맑은 고딕" charset="0"/>
-                      </a:endParaRPr>
-                    </a:p>
-                  </a:txBody>
-                  <a:tcPr marL="101600" marR="101600" marT="50800" marB="50800" anchor="ctr">
-                    <a:lnL w="6350" cap="flat" cmpd="sng" algn="ctr">
-                      <a:solidFill>
-                        <a:srgbClr val="D5DCE6"/>
-                      </a:solidFill>
-                      <a:prstDash val="solid"/>
-                      <a:round/>
-                      <a:headEnd type="none" w="med" len="med"/>
-                      <a:tailEnd type="none" w="med" len="med"/>
-                    </a:lnL>
-                    <a:lnR w="6350" cap="flat" cmpd="sng" algn="ctr">
-                      <a:solidFill>
-                        <a:srgbClr val="D5DCE6"/>
-                      </a:solidFill>
-                      <a:prstDash val="solid"/>
-                      <a:round/>
-                      <a:headEnd type="none" w="med" len="med"/>
-                      <a:tailEnd type="none" w="med" len="med"/>
-                    </a:lnR>
-                    <a:lnT w="6350" cap="flat" cmpd="sng" algn="ctr">
-                      <a:solidFill>
-                        <a:srgbClr val="D5DCE6"/>
-                      </a:solidFill>
-                      <a:prstDash val="solid"/>
-                      <a:round/>
-                      <a:headEnd type="none" w="med" len="med"/>
-                      <a:tailEnd type="none" w="med" len="med"/>
-                    </a:lnT>
-                    <a:lnB w="6350" cap="flat" cmpd="sng" algn="ctr">
-                      <a:solidFill>
-                        <a:srgbClr val="D5DCE6"/>
-                      </a:solidFill>
-                      <a:prstDash val="solid"/>
-                      <a:round/>
-                      <a:headEnd type="none" w="med" len="med"/>
-                      <a:tailEnd type="none" w="med" len="med"/>
-                    </a:lnB>
-                    <a:solidFill>
-                      <a:srgbClr val="EEF2F7"/>
-                    </a:solidFill>
-                  </a:tcPr>
-                </a:tc>
-              </a:tr>
-              <a:tr h="566928">
-                <a:tc>
-                  <a:txBody>
-                    <a:bodyPr/>
-                    <a:lstStyle/>
-                    <a:p>
-                      <a:pPr indent="0" marL="0">
-                        <a:buNone/>
-                      </a:pPr>
-                      <a:r>
-                        <a:rPr lang="en-US" sz="1400" dirty="0">
-                          <a:solidFill>
-                            <a:srgbClr val="1C2333"/>
-                          </a:solidFill>
-                          <a:latin typeface="맑은 고딕" pitchFamily="34" charset="0"/>
-                          <a:ea typeface="맑은 고딕" pitchFamily="34" charset="-122"/>
-                          <a:cs typeface="맑은 고딕" pitchFamily="34" charset="-120"/>
-                        </a:rPr>
-                        <a:t>대시보드(라이브 아티팩트) 수정</a:t>
-                      </a:r>
-                      <a:endParaRPr lang="en-US" sz="1400" dirty="0">
-                        <a:latin typeface="맑은 고딕" charset="0"/>
-                        <a:ea typeface="맑은 고딕" charset="0"/>
-                        <a:cs typeface="맑은 고딕" charset="0"/>
-                      </a:endParaRPr>
-                    </a:p>
-                  </a:txBody>
-                  <a:tcPr marL="101600" marR="101600" marT="50800" marB="50800" anchor="ctr">
-                    <a:lnL w="6350" cap="flat" cmpd="sng" algn="ctr">
-                      <a:solidFill>
-                        <a:srgbClr val="D5DCE6"/>
-                      </a:solidFill>
-                      <a:prstDash val="solid"/>
-                      <a:round/>
-                      <a:headEnd type="none" w="med" len="med"/>
-                      <a:tailEnd type="none" w="med" len="med"/>
-                    </a:lnL>
-                    <a:lnR w="6350" cap="flat" cmpd="sng" algn="ctr">
-                      <a:solidFill>
-                        <a:srgbClr val="D5DCE6"/>
-                      </a:solidFill>
-                      <a:prstDash val="solid"/>
-                      <a:round/>
-                      <a:headEnd type="none" w="med" len="med"/>
-                      <a:tailEnd type="none" w="med" len="med"/>
-                    </a:lnR>
-                    <a:lnT w="6350" cap="flat" cmpd="sng" algn="ctr">
-                      <a:solidFill>
-                        <a:srgbClr val="D5DCE6"/>
-                      </a:solidFill>
-                      <a:prstDash val="solid"/>
-                      <a:round/>
-                      <a:headEnd type="none" w="med" len="med"/>
-                      <a:tailEnd type="none" w="med" len="med"/>
-                    </a:lnT>
-                    <a:lnB w="6350" cap="flat" cmpd="sng" algn="ctr">
-                      <a:solidFill>
-                        <a:srgbClr val="D5DCE6"/>
-                      </a:solidFill>
-                      <a:prstDash val="solid"/>
-                      <a:round/>
-                      <a:headEnd type="none" w="med" len="med"/>
-                      <a:tailEnd type="none" w="med" len="med"/>
-                    </a:lnB>
-                    <a:solidFill>
-                      <a:srgbClr val="FFFFFF"/>
-                    </a:solidFill>
-                  </a:tcPr>
-                </a:tc>
-                <a:tc>
-                  <a:txBody>
-                    <a:bodyPr/>
-                    <a:lstStyle/>
-                    <a:p>
-                      <a:pPr indent="0" marL="0">
-                        <a:buNone/>
-                      </a:pPr>
-                      <a:r>
-                        <a:rPr lang="en-US" sz="1400" dirty="0">
-                          <a:solidFill>
-                            <a:srgbClr val="1C2333"/>
-                          </a:solidFill>
-                          <a:latin typeface="맑은 고딕" pitchFamily="34" charset="0"/>
-                          <a:ea typeface="맑은 고딕" pitchFamily="34" charset="-122"/>
-                          <a:cs typeface="맑은 고딕" pitchFamily="34" charset="-120"/>
-                        </a:rPr>
-                        <a:t>수정 불가</a:t>
-                      </a:r>
-                      <a:endParaRPr lang="en-US" sz="1400" dirty="0">
-                        <a:latin typeface="맑은 고딕" charset="0"/>
-                        <a:ea typeface="맑은 고딕" charset="0"/>
-                        <a:cs typeface="맑은 고딕" charset="0"/>
-                      </a:endParaRPr>
-                    </a:p>
-                  </a:txBody>
-                  <a:tcPr marL="101600" marR="101600" marT="50800" marB="50800" anchor="ctr">
-                    <a:lnL w="6350" cap="flat" cmpd="sng" algn="ctr">
-                      <a:solidFill>
-                        <a:srgbClr val="D5DCE6"/>
-                      </a:solidFill>
-                      <a:prstDash val="solid"/>
-                      <a:round/>
-                      <a:headEnd type="none" w="med" len="med"/>
-                      <a:tailEnd type="none" w="med" len="med"/>
-                    </a:lnL>
-                    <a:lnR w="6350" cap="flat" cmpd="sng" algn="ctr">
-                      <a:solidFill>
-                        <a:srgbClr val="D5DCE6"/>
-                      </a:solidFill>
-                      <a:prstDash val="solid"/>
-                      <a:round/>
-                      <a:headEnd type="none" w="med" len="med"/>
-                      <a:tailEnd type="none" w="med" len="med"/>
-                    </a:lnR>
-                    <a:lnT w="6350" cap="flat" cmpd="sng" algn="ctr">
-                      <a:solidFill>
-                        <a:srgbClr val="D5DCE6"/>
-                      </a:solidFill>
-                      <a:prstDash val="solid"/>
-                      <a:round/>
-                      <a:headEnd type="none" w="med" len="med"/>
-                      <a:tailEnd type="none" w="med" len="med"/>
-                    </a:lnT>
-                    <a:lnB w="6350" cap="flat" cmpd="sng" algn="ctr">
-                      <a:solidFill>
-                        <a:srgbClr val="D5DCE6"/>
-                      </a:solidFill>
-                      <a:prstDash val="solid"/>
-                      <a:round/>
-                      <a:headEnd type="none" w="med" len="med"/>
-                      <a:tailEnd type="none" w="med" len="med"/>
-                    </a:lnB>
-                    <a:solidFill>
-                      <a:srgbClr val="FFFFFF"/>
-                    </a:solidFill>
-                  </a:tcPr>
-                </a:tc>
-                <a:tc>
-                  <a:txBody>
-                    <a:bodyPr/>
-                    <a:lstStyle/>
-                    <a:p>
-                      <a:pPr indent="0" marL="0">
-                        <a:buNone/>
-                      </a:pPr>
-                      <a:r>
-                        <a:rPr lang="en-US" sz="1400" dirty="0">
-                          <a:solidFill>
-                            <a:srgbClr val="1C2333"/>
-                          </a:solidFill>
-                          <a:latin typeface="맑은 고딕" pitchFamily="34" charset="0"/>
-                          <a:ea typeface="맑은 고딕" pitchFamily="34" charset="-122"/>
-                          <a:cs typeface="맑은 고딕" pitchFamily="34" charset="-120"/>
-                        </a:rPr>
-                        <a:t>대시보드를 PC 로컬 HTML로 옮김</a:t>
-                      </a:r>
-                      <a:endParaRPr lang="en-US" sz="1400" dirty="0">
-                        <a:latin typeface="맑은 고딕" charset="0"/>
-                        <a:ea typeface="맑은 고딕" charset="0"/>
-                        <a:cs typeface="맑은 고딕" charset="0"/>
-                      </a:endParaRPr>
-                    </a:p>
-                  </a:txBody>
-                  <a:tcPr marL="101600" marR="101600" marT="50800" marB="50800" anchor="ctr">
-                    <a:lnL w="6350" cap="flat" cmpd="sng" algn="ctr">
-                      <a:solidFill>
-                        <a:srgbClr val="D5DCE6"/>
-                      </a:solidFill>
-                      <a:prstDash val="solid"/>
-                      <a:round/>
-                      <a:headEnd type="none" w="med" len="med"/>
-                      <a:tailEnd type="none" w="med" len="med"/>
-                    </a:lnL>
-                    <a:lnR w="6350" cap="flat" cmpd="sng" algn="ctr">
-                      <a:solidFill>
-                        <a:srgbClr val="D5DCE6"/>
-                      </a:solidFill>
-                      <a:prstDash val="solid"/>
-                      <a:round/>
-                      <a:headEnd type="none" w="med" len="med"/>
-                      <a:tailEnd type="none" w="med" len="med"/>
-                    </a:lnR>
-                    <a:lnT w="6350" cap="flat" cmpd="sng" algn="ctr">
-                      <a:solidFill>
-                        <a:srgbClr val="D5DCE6"/>
-                      </a:solidFill>
-                      <a:prstDash val="solid"/>
-                      <a:round/>
-                      <a:headEnd type="none" w="med" len="med"/>
-                      <a:tailEnd type="none" w="med" len="med"/>
-                    </a:lnT>
-                    <a:lnB w="6350" cap="flat" cmpd="sng" algn="ctr">
-                      <a:solidFill>
-                        <a:srgbClr val="D5DCE6"/>
-                      </a:solidFill>
-                      <a:prstDash val="solid"/>
-                      <a:round/>
-                      <a:headEnd type="none" w="med" len="med"/>
-                      <a:tailEnd type="none" w="med" len="med"/>
-                    </a:lnB>
-                    <a:solidFill>
-                      <a:srgbClr val="FFFFFF"/>
-                    </a:solidFill>
-                  </a:tcPr>
-                </a:tc>
-              </a:tr>
-              <a:tr h="566928">
-                <a:tc>
-                  <a:txBody>
-                    <a:bodyPr/>
-                    <a:lstStyle/>
-                    <a:p>
-                      <a:pPr indent="0" marL="0">
-                        <a:buNone/>
-                      </a:pPr>
-                      <a:r>
-                        <a:rPr lang="en-US" sz="1400" dirty="0">
-                          <a:solidFill>
-                            <a:srgbClr val="1C2333"/>
-                          </a:solidFill>
-                          <a:latin typeface="맑은 고딕" pitchFamily="34" charset="0"/>
-                          <a:ea typeface="맑은 고딕" pitchFamily="34" charset="-122"/>
-                          <a:cs typeface="맑은 고딕" pitchFamily="34" charset="-120"/>
-                        </a:rPr>
-                        <a:t>PC의 로컬 서버(localhost)</a:t>
-                      </a:r>
-                      <a:endParaRPr lang="en-US" sz="1400" dirty="0">
-                        <a:latin typeface="맑은 고딕" charset="0"/>
-                        <a:ea typeface="맑은 고딕" charset="0"/>
-                        <a:cs typeface="맑은 고딕" charset="0"/>
-                      </a:endParaRPr>
-                    </a:p>
-                  </a:txBody>
-                  <a:tcPr marL="101600" marR="101600" marT="50800" marB="50800" anchor="ctr">
-                    <a:lnL w="6350" cap="flat" cmpd="sng" algn="ctr">
-                      <a:solidFill>
-                        <a:srgbClr val="D5DCE6"/>
-                      </a:solidFill>
-                      <a:prstDash val="solid"/>
-                      <a:round/>
-                      <a:headEnd type="none" w="med" len="med"/>
-                      <a:tailEnd type="none" w="med" len="med"/>
-                    </a:lnL>
-                    <a:lnR w="6350" cap="flat" cmpd="sng" algn="ctr">
-                      <a:solidFill>
-                        <a:srgbClr val="D5DCE6"/>
-                      </a:solidFill>
-                      <a:prstDash val="solid"/>
-                      <a:round/>
-                      <a:headEnd type="none" w="med" len="med"/>
-                      <a:tailEnd type="none" w="med" len="med"/>
-                    </a:lnR>
-                    <a:lnT w="6350" cap="flat" cmpd="sng" algn="ctr">
-                      <a:solidFill>
-                        <a:srgbClr val="D5DCE6"/>
-                      </a:solidFill>
-                      <a:prstDash val="solid"/>
-                      <a:round/>
-                      <a:headEnd type="none" w="med" len="med"/>
-                      <a:tailEnd type="none" w="med" len="med"/>
-                    </a:lnT>
-                    <a:lnB w="6350" cap="flat" cmpd="sng" algn="ctr">
-                      <a:solidFill>
-                        <a:srgbClr val="D5DCE6"/>
-                      </a:solidFill>
-                      <a:prstDash val="solid"/>
-                      <a:round/>
-                      <a:headEnd type="none" w="med" len="med"/>
-                      <a:tailEnd type="none" w="med" len="med"/>
-                    </a:lnB>
-                    <a:solidFill>
-                      <a:srgbClr val="EEF2F7"/>
-                    </a:solidFill>
-                  </a:tcPr>
-                </a:tc>
-                <a:tc>
-                  <a:txBody>
-                    <a:bodyPr/>
-                    <a:lstStyle/>
-                    <a:p>
-                      <a:pPr indent="0" marL="0">
-                        <a:buNone/>
-                      </a:pPr>
-                      <a:r>
-                        <a:rPr lang="en-US" sz="1400" dirty="0">
-                          <a:solidFill>
-                            <a:srgbClr val="1C2333"/>
-                          </a:solidFill>
-                          <a:latin typeface="맑은 고딕" pitchFamily="34" charset="0"/>
-                          <a:ea typeface="맑은 고딕" pitchFamily="34" charset="-122"/>
-                          <a:cs typeface="맑은 고딕" pitchFamily="34" charset="-120"/>
-                        </a:rPr>
-                        <a:t>클라우드 셸에서 접속 안 됨</a:t>
-                      </a:r>
-                      <a:endParaRPr lang="en-US" sz="1400" dirty="0">
-                        <a:latin typeface="맑은 고딕" charset="0"/>
-                        <a:ea typeface="맑은 고딕" charset="0"/>
-                        <a:cs typeface="맑은 고딕" charset="0"/>
-                      </a:endParaRPr>
-                    </a:p>
-                  </a:txBody>
-                  <a:tcPr marL="101600" marR="101600" marT="50800" marB="50800" anchor="ctr">
-                    <a:lnL w="6350" cap="flat" cmpd="sng" algn="ctr">
-                      <a:solidFill>
-                        <a:srgbClr val="D5DCE6"/>
-                      </a:solidFill>
-                      <a:prstDash val="solid"/>
-                      <a:round/>
-                      <a:headEnd type="none" w="med" len="med"/>
-                      <a:tailEnd type="none" w="med" len="med"/>
-                    </a:lnL>
-                    <a:lnR w="6350" cap="flat" cmpd="sng" algn="ctr">
-                      <a:solidFill>
-                        <a:srgbClr val="D5DCE6"/>
-                      </a:solidFill>
-                      <a:prstDash val="solid"/>
-                      <a:round/>
-                      <a:headEnd type="none" w="med" len="med"/>
-                      <a:tailEnd type="none" w="med" len="med"/>
-                    </a:lnR>
-                    <a:lnT w="6350" cap="flat" cmpd="sng" algn="ctr">
-                      <a:solidFill>
-                        <a:srgbClr val="D5DCE6"/>
-                      </a:solidFill>
-                      <a:prstDash val="solid"/>
-                      <a:round/>
-                      <a:headEnd type="none" w="med" len="med"/>
-                      <a:tailEnd type="none" w="med" len="med"/>
-                    </a:lnT>
-                    <a:lnB w="6350" cap="flat" cmpd="sng" algn="ctr">
-                      <a:solidFill>
-                        <a:srgbClr val="D5DCE6"/>
-                      </a:solidFill>
-                      <a:prstDash val="solid"/>
-                      <a:round/>
-                      <a:headEnd type="none" w="med" len="med"/>
-                      <a:tailEnd type="none" w="med" len="med"/>
-                    </a:lnB>
-                    <a:solidFill>
-                      <a:srgbClr val="EEF2F7"/>
-                    </a:solidFill>
-                  </a:tcPr>
-                </a:tc>
-                <a:tc>
-                  <a:txBody>
-                    <a:bodyPr/>
-                    <a:lstStyle/>
-                    <a:p>
-                      <a:pPr indent="0" marL="0">
-                        <a:buNone/>
-                      </a:pPr>
-                      <a:r>
-                        <a:rPr lang="en-US" sz="1400" dirty="0">
-                          <a:solidFill>
-                            <a:srgbClr val="1C2333"/>
-                          </a:solidFill>
-                          <a:latin typeface="맑은 고딕" pitchFamily="34" charset="0"/>
-                          <a:ea typeface="맑은 고딕" pitchFamily="34" charset="-122"/>
-                          <a:cs typeface="맑은 고딕" pitchFamily="34" charset="-120"/>
-                        </a:rPr>
-                        <a:t>화면 확인 단계를 다른 도구로 우회</a:t>
-                      </a:r>
-                      <a:endParaRPr lang="en-US" sz="1400" dirty="0">
-                        <a:latin typeface="맑은 고딕" charset="0"/>
-                        <a:ea typeface="맑은 고딕" charset="0"/>
-                        <a:cs typeface="맑은 고딕" charset="0"/>
-                      </a:endParaRPr>
-                    </a:p>
-                  </a:txBody>
-                  <a:tcPr marL="101600" marR="101600" marT="50800" marB="50800" anchor="ctr">
-                    <a:lnL w="6350" cap="flat" cmpd="sng" algn="ctr">
-                      <a:solidFill>
-                        <a:srgbClr val="D5DCE6"/>
-                      </a:solidFill>
-                      <a:prstDash val="solid"/>
-                      <a:round/>
-                      <a:headEnd type="none" w="med" len="med"/>
-                      <a:tailEnd type="none" w="med" len="med"/>
-                    </a:lnL>
-                    <a:lnR w="6350" cap="flat" cmpd="sng" algn="ctr">
-                      <a:solidFill>
-                        <a:srgbClr val="D5DCE6"/>
-                      </a:solidFill>
-                      <a:prstDash val="solid"/>
-                      <a:round/>
-                      <a:headEnd type="none" w="med" len="med"/>
-                      <a:tailEnd type="none" w="med" len="med"/>
-                    </a:lnR>
-                    <a:lnT w="6350" cap="flat" cmpd="sng" algn="ctr">
-                      <a:solidFill>
-                        <a:srgbClr val="D5DCE6"/>
-                      </a:solidFill>
-                      <a:prstDash val="solid"/>
-                      <a:round/>
-                      <a:headEnd type="none" w="med" len="med"/>
-                      <a:tailEnd type="none" w="med" len="med"/>
-                    </a:lnT>
-                    <a:lnB w="6350" cap="flat" cmpd="sng" algn="ctr">
-                      <a:solidFill>
-                        <a:srgbClr val="D5DCE6"/>
-                      </a:solidFill>
-                      <a:prstDash val="solid"/>
-                      <a:round/>
-                      <a:headEnd type="none" w="med" len="med"/>
-                      <a:tailEnd type="none" w="med" len="med"/>
-                    </a:lnB>
-                    <a:solidFill>
-                      <a:srgbClr val="EEF2F7"/>
-                    </a:solidFill>
-                  </a:tcPr>
-                </a:tc>
-              </a:tr>
-              <a:tr h="566928">
-                <a:tc>
-                  <a:txBody>
-                    <a:bodyPr/>
-                    <a:lstStyle/>
-                    <a:p>
-                      <a:pPr indent="0" marL="0">
-                        <a:buNone/>
-                      </a:pPr>
-                      <a:r>
-                        <a:rPr lang="en-US" sz="1400" dirty="0">
-                          <a:solidFill>
-                            <a:srgbClr val="1C2333"/>
-                          </a:solidFill>
-                          <a:latin typeface="맑은 고딕" pitchFamily="34" charset="0"/>
-                          <a:ea typeface="맑은 고딕" pitchFamily="34" charset="-122"/>
-                          <a:cs typeface="맑은 고딕" pitchFamily="34" charset="-120"/>
-                        </a:rPr>
-                        <a:t>폴더 경로</a:t>
-                      </a:r>
-                      <a:endParaRPr lang="en-US" sz="1400" dirty="0">
-                        <a:latin typeface="맑은 고딕" charset="0"/>
-                        <a:ea typeface="맑은 고딕" charset="0"/>
-                        <a:cs typeface="맑은 고딕" charset="0"/>
-                      </a:endParaRPr>
-                    </a:p>
-                  </a:txBody>
-                  <a:tcPr marL="101600" marR="101600" marT="50800" marB="50800" anchor="ctr">
-                    <a:lnL w="6350" cap="flat" cmpd="sng" algn="ctr">
-                      <a:solidFill>
-                        <a:srgbClr val="D5DCE6"/>
-                      </a:solidFill>
-                      <a:prstDash val="solid"/>
-                      <a:round/>
-                      <a:headEnd type="none" w="med" len="med"/>
-                      <a:tailEnd type="none" w="med" len="med"/>
-                    </a:lnL>
-                    <a:lnR w="6350" cap="flat" cmpd="sng" algn="ctr">
-                      <a:solidFill>
-                        <a:srgbClr val="D5DCE6"/>
-                      </a:solidFill>
-                      <a:prstDash val="solid"/>
-                      <a:round/>
-                      <a:headEnd type="none" w="med" len="med"/>
-                      <a:tailEnd type="none" w="med" len="med"/>
-                    </a:lnR>
-                    <a:lnT w="6350" cap="flat" cmpd="sng" algn="ctr">
-                      <a:solidFill>
-                        <a:srgbClr val="D5DCE6"/>
-                      </a:solidFill>
-                      <a:prstDash val="solid"/>
-                      <a:round/>
-                      <a:headEnd type="none" w="med" len="med"/>
-                      <a:tailEnd type="none" w="med" len="med"/>
-                    </a:lnT>
-                    <a:lnB w="6350" cap="flat" cmpd="sng" algn="ctr">
-                      <a:solidFill>
-                        <a:srgbClr val="D5DCE6"/>
-                      </a:solidFill>
-                      <a:prstDash val="solid"/>
-                      <a:round/>
-                      <a:headEnd type="none" w="med" len="med"/>
-                      <a:tailEnd type="none" w="med" len="med"/>
-                    </a:lnB>
-                    <a:solidFill>
-                      <a:srgbClr val="FFFFFF"/>
-                    </a:solidFill>
-                  </a:tcPr>
-                </a:tc>
-                <a:tc>
-                  <a:txBody>
-                    <a:bodyPr/>
-                    <a:lstStyle/>
-                    <a:p>
-                      <a:pPr indent="0" marL="0">
-                        <a:buNone/>
-                      </a:pPr>
-                      <a:r>
-                        <a:rPr lang="en-US" sz="1400" dirty="0">
-                          <a:solidFill>
-                            <a:srgbClr val="1C2333"/>
-                          </a:solidFill>
-                          <a:latin typeface="맑은 고딕" pitchFamily="34" charset="0"/>
-                          <a:ea typeface="맑은 고딕" pitchFamily="34" charset="-122"/>
-                          <a:cs typeface="맑은 고딕" pitchFamily="34" charset="-120"/>
-                        </a:rPr>
-                        <a:t>/sessions/… → $HOME/mnt/…</a:t>
-                      </a:r>
-                      <a:endParaRPr lang="en-US" sz="1400" dirty="0">
-                        <a:latin typeface="맑은 고딕" charset="0"/>
-                        <a:ea typeface="맑은 고딕" charset="0"/>
-                        <a:cs typeface="맑은 고딕" charset="0"/>
-                      </a:endParaRPr>
-                    </a:p>
-                  </a:txBody>
-                  <a:tcPr marL="101600" marR="101600" marT="50800" marB="50800" anchor="ctr">
-                    <a:lnL w="6350" cap="flat" cmpd="sng" algn="ctr">
-                      <a:solidFill>
-                        <a:srgbClr val="D5DCE6"/>
-                      </a:solidFill>
-                      <a:prstDash val="solid"/>
-                      <a:round/>
-                      <a:headEnd type="none" w="med" len="med"/>
-                      <a:tailEnd type="none" w="med" len="med"/>
-                    </a:lnL>
-                    <a:lnR w="6350" cap="flat" cmpd="sng" algn="ctr">
-                      <a:solidFill>
-                        <a:srgbClr val="D5DCE6"/>
-                      </a:solidFill>
-                      <a:prstDash val="solid"/>
-                      <a:round/>
-                      <a:headEnd type="none" w="med" len="med"/>
-                      <a:tailEnd type="none" w="med" len="med"/>
-                    </a:lnR>
-                    <a:lnT w="6350" cap="flat" cmpd="sng" algn="ctr">
-                      <a:solidFill>
-                        <a:srgbClr val="D5DCE6"/>
-                      </a:solidFill>
-                      <a:prstDash val="solid"/>
-                      <a:round/>
-                      <a:headEnd type="none" w="med" len="med"/>
-                      <a:tailEnd type="none" w="med" len="med"/>
-                    </a:lnT>
-                    <a:lnB w="6350" cap="flat" cmpd="sng" algn="ctr">
-                      <a:solidFill>
-                        <a:srgbClr val="D5DCE6"/>
-                      </a:solidFill>
-                      <a:prstDash val="solid"/>
-                      <a:round/>
-                      <a:headEnd type="none" w="med" len="med"/>
-                      <a:tailEnd type="none" w="med" len="med"/>
-                    </a:lnB>
-                    <a:solidFill>
-                      <a:srgbClr val="FFFFFF"/>
-                    </a:solidFill>
-                  </a:tcPr>
-                </a:tc>
-                <a:tc>
-                  <a:txBody>
-                    <a:bodyPr/>
-                    <a:lstStyle/>
-                    <a:p>
-                      <a:pPr indent="0" marL="0">
-                        <a:buNone/>
-                      </a:pPr>
-                      <a:r>
-                        <a:rPr lang="en-US" sz="1400" dirty="0">
-                          <a:solidFill>
-                            <a:srgbClr val="1C2333"/>
-                          </a:solidFill>
-                          <a:latin typeface="맑은 고딕" pitchFamily="34" charset="0"/>
-                          <a:ea typeface="맑은 고딕" pitchFamily="34" charset="-122"/>
-                          <a:cs typeface="맑은 고딕" pitchFamily="34" charset="-120"/>
-                        </a:rPr>
-                        <a:t>옛 경로를 쓴 단계가 「파일 없음」</a:t>
-                      </a:r>
-                      <a:endParaRPr lang="en-US" sz="1400" dirty="0">
-                        <a:latin typeface="맑은 고딕" charset="0"/>
-                        <a:ea typeface="맑은 고딕" charset="0"/>
-                        <a:cs typeface="맑은 고딕" charset="0"/>
-                      </a:endParaRPr>
-                    </a:p>
-                  </a:txBody>
-                  <a:tcPr marL="101600" marR="101600" marT="50800" marB="50800" anchor="ctr">
-                    <a:lnL w="6350" cap="flat" cmpd="sng" algn="ctr">
-                      <a:solidFill>
-                        <a:srgbClr val="D5DCE6"/>
-                      </a:solidFill>
-                      <a:prstDash val="solid"/>
-                      <a:round/>
-                      <a:headEnd type="none" w="med" len="med"/>
-                      <a:tailEnd type="none" w="med" len="med"/>
-                    </a:lnL>
-                    <a:lnR w="6350" cap="flat" cmpd="sng" algn="ctr">
-                      <a:solidFill>
-                        <a:srgbClr val="D5DCE6"/>
-                      </a:solidFill>
-                      <a:prstDash val="solid"/>
-                      <a:round/>
-                      <a:headEnd type="none" w="med" len="med"/>
-                      <a:tailEnd type="none" w="med" len="med"/>
-                    </a:lnR>
-                    <a:lnT w="6350" cap="flat" cmpd="sng" algn="ctr">
-                      <a:solidFill>
-                        <a:srgbClr val="D5DCE6"/>
-                      </a:solidFill>
-                      <a:prstDash val="solid"/>
-                      <a:round/>
-                      <a:headEnd type="none" w="med" len="med"/>
-                      <a:tailEnd type="none" w="med" len="med"/>
-                    </a:lnT>
-                    <a:lnB w="6350" cap="flat" cmpd="sng" algn="ctr">
-                      <a:solidFill>
-                        <a:srgbClr val="D5DCE6"/>
-                      </a:solidFill>
-                      <a:prstDash val="solid"/>
-                      <a:round/>
-                      <a:headEnd type="none" w="med" len="med"/>
-                      <a:tailEnd type="none" w="med" len="med"/>
-                    </a:lnB>
-                    <a:solidFill>
-                      <a:srgbClr val="FFFFFF"/>
-                    </a:solidFill>
-                  </a:tcPr>
-                </a:tc>
-              </a:tr>
-              <a:tr h="566928">
-                <a:tc>
-                  <a:txBody>
-                    <a:bodyPr/>
-                    <a:lstStyle/>
-                    <a:p>
-                      <a:pPr indent="0" marL="0">
-                        <a:buNone/>
-                      </a:pPr>
-                      <a:r>
-                        <a:rPr lang="en-US" sz="1400" dirty="0">
-                          <a:solidFill>
-                            <a:srgbClr val="1C2333"/>
-                          </a:solidFill>
-                          <a:latin typeface="맑은 고딕" pitchFamily="34" charset="0"/>
-                          <a:ea typeface="맑은 고딕" pitchFamily="34" charset="-122"/>
-                          <a:cs typeface="맑은 고딕" pitchFamily="34" charset="-120"/>
-                        </a:rPr>
-                        <a:t>같은 이름 파일 재전송</a:t>
-                      </a:r>
-                      <a:endParaRPr lang="en-US" sz="1400" dirty="0">
-                        <a:latin typeface="맑은 고딕" charset="0"/>
-                        <a:ea typeface="맑은 고딕" charset="0"/>
-                        <a:cs typeface="맑은 고딕" charset="0"/>
-                      </a:endParaRPr>
-                    </a:p>
-                  </a:txBody>
-                  <a:tcPr marL="101600" marR="101600" marT="50800" marB="50800" anchor="ctr">
-                    <a:lnL w="6350" cap="flat" cmpd="sng" algn="ctr">
-                      <a:solidFill>
-                        <a:srgbClr val="D5DCE6"/>
-                      </a:solidFill>
-                      <a:prstDash val="solid"/>
-                      <a:round/>
-                      <a:headEnd type="none" w="med" len="med"/>
-                      <a:tailEnd type="none" w="med" len="med"/>
-                    </a:lnL>
-                    <a:lnR w="6350" cap="flat" cmpd="sng" algn="ctr">
-                      <a:solidFill>
-                        <a:srgbClr val="D5DCE6"/>
-                      </a:solidFill>
-                      <a:prstDash val="solid"/>
-                      <a:round/>
-                      <a:headEnd type="none" w="med" len="med"/>
-                      <a:tailEnd type="none" w="med" len="med"/>
-                    </a:lnR>
-                    <a:lnT w="6350" cap="flat" cmpd="sng" algn="ctr">
-                      <a:solidFill>
-                        <a:srgbClr val="D5DCE6"/>
-                      </a:solidFill>
-                      <a:prstDash val="solid"/>
-                      <a:round/>
-                      <a:headEnd type="none" w="med" len="med"/>
-                      <a:tailEnd type="none" w="med" len="med"/>
-                    </a:lnT>
-                    <a:lnB w="6350" cap="flat" cmpd="sng" algn="ctr">
-                      <a:solidFill>
-                        <a:srgbClr val="D5DCE6"/>
-                      </a:solidFill>
-                      <a:prstDash val="solid"/>
-                      <a:round/>
-                      <a:headEnd type="none" w="med" len="med"/>
-                      <a:tailEnd type="none" w="med" len="med"/>
-                    </a:lnB>
-                    <a:solidFill>
-                      <a:srgbClr val="EEF2F7"/>
-                    </a:solidFill>
-                  </a:tcPr>
-                </a:tc>
-                <a:tc>
-                  <a:txBody>
-                    <a:bodyPr/>
-                    <a:lstStyle/>
-                    <a:p>
-                      <a:pPr indent="0" marL="0">
-                        <a:buNone/>
-                      </a:pPr>
-                      <a:r>
-                        <a:rPr lang="en-US" sz="1400" dirty="0">
-                          <a:solidFill>
-                            <a:srgbClr val="1C2333"/>
-                          </a:solidFill>
-                          <a:latin typeface="맑은 고딕" pitchFamily="34" charset="0"/>
-                          <a:ea typeface="맑은 고딕" pitchFamily="34" charset="-122"/>
-                          <a:cs typeface="맑은 고딕" pitchFamily="34" charset="-120"/>
-                        </a:rPr>
-                        <a:t>옛 내용이 그대로 써짐</a:t>
-                      </a:r>
-                      <a:endParaRPr lang="en-US" sz="1400" dirty="0">
-                        <a:latin typeface="맑은 고딕" charset="0"/>
-                        <a:ea typeface="맑은 고딕" charset="0"/>
-                        <a:cs typeface="맑은 고딕" charset="0"/>
-                      </a:endParaRPr>
-                    </a:p>
-                  </a:txBody>
-                  <a:tcPr marL="101600" marR="101600" marT="50800" marB="50800" anchor="ctr">
-                    <a:lnL w="6350" cap="flat" cmpd="sng" algn="ctr">
-                      <a:solidFill>
-                        <a:srgbClr val="D5DCE6"/>
-                      </a:solidFill>
-                      <a:prstDash val="solid"/>
-                      <a:round/>
-                      <a:headEnd type="none" w="med" len="med"/>
-                      <a:tailEnd type="none" w="med" len="med"/>
-                    </a:lnL>
-                    <a:lnR w="6350" cap="flat" cmpd="sng" algn="ctr">
-                      <a:solidFill>
-                        <a:srgbClr val="D5DCE6"/>
-                      </a:solidFill>
-                      <a:prstDash val="solid"/>
-                      <a:round/>
-                      <a:headEnd type="none" w="med" len="med"/>
-                      <a:tailEnd type="none" w="med" len="med"/>
-                    </a:lnR>
-                    <a:lnT w="6350" cap="flat" cmpd="sng" algn="ctr">
-                      <a:solidFill>
-                        <a:srgbClr val="D5DCE6"/>
-                      </a:solidFill>
-                      <a:prstDash val="solid"/>
-                      <a:round/>
-                      <a:headEnd type="none" w="med" len="med"/>
-                      <a:tailEnd type="none" w="med" len="med"/>
-                    </a:lnT>
-                    <a:lnB w="6350" cap="flat" cmpd="sng" algn="ctr">
-                      <a:solidFill>
-                        <a:srgbClr val="D5DCE6"/>
-                      </a:solidFill>
-                      <a:prstDash val="solid"/>
-                      <a:round/>
-                      <a:headEnd type="none" w="med" len="med"/>
-                      <a:tailEnd type="none" w="med" len="med"/>
-                    </a:lnB>
-                    <a:solidFill>
-                      <a:srgbClr val="EEF2F7"/>
-                    </a:solidFill>
-                  </a:tcPr>
-                </a:tc>
-                <a:tc>
-                  <a:txBody>
-                    <a:bodyPr/>
-                    <a:lstStyle/>
-                    <a:p>
-                      <a:pPr indent="0" marL="0">
-                        <a:buNone/>
-                      </a:pPr>
-                      <a:r>
-                        <a:rPr lang="en-US" sz="1400" dirty="0">
-                          <a:solidFill>
-                            <a:srgbClr val="1C2333"/>
-                          </a:solidFill>
-                          <a:latin typeface="맑은 고딕" pitchFamily="34" charset="0"/>
-                          <a:ea typeface="맑은 고딕" pitchFamily="34" charset="-122"/>
-                          <a:cs typeface="맑은 고딕" pitchFamily="34" charset="-120"/>
-                        </a:rPr>
-                        <a:t>보낼 때마다 시각을 붙인 새 이름 + 대조</a:t>
-                      </a:r>
-                      <a:endParaRPr lang="en-US" sz="1400" dirty="0">
-                        <a:latin typeface="맑은 고딕" charset="0"/>
-                        <a:ea typeface="맑은 고딕" charset="0"/>
-                        <a:cs typeface="맑은 고딕" charset="0"/>
-                      </a:endParaRPr>
-                    </a:p>
-                  </a:txBody>
-                  <a:tcPr marL="101600" marR="101600" marT="50800" marB="50800" anchor="ctr">
-                    <a:lnL w="6350" cap="flat" cmpd="sng" algn="ctr">
-                      <a:solidFill>
-                        <a:srgbClr val="D5DCE6"/>
-                      </a:solidFill>
-                      <a:prstDash val="solid"/>
-                      <a:round/>
-                      <a:headEnd type="none" w="med" len="med"/>
-                      <a:tailEnd type="none" w="med" len="med"/>
-                    </a:lnL>
-                    <a:lnR w="6350" cap="flat" cmpd="sng" algn="ctr">
-                      <a:solidFill>
-                        <a:srgbClr val="D5DCE6"/>
-                      </a:solidFill>
-                      <a:prstDash val="solid"/>
-                      <a:round/>
-                      <a:headEnd type="none" w="med" len="med"/>
-                      <a:tailEnd type="none" w="med" len="med"/>
-                    </a:lnR>
-                    <a:lnT w="6350" cap="flat" cmpd="sng" algn="ctr">
-                      <a:solidFill>
-                        <a:srgbClr val="D5DCE6"/>
-                      </a:solidFill>
-                      <a:prstDash val="solid"/>
-                      <a:round/>
-                      <a:headEnd type="none" w="med" len="med"/>
-                      <a:tailEnd type="none" w="med" len="med"/>
-                    </a:lnT>
-                    <a:lnB w="6350" cap="flat" cmpd="sng" algn="ctr">
-                      <a:solidFill>
-                        <a:srgbClr val="D5DCE6"/>
-                      </a:solidFill>
-                      <a:prstDash val="solid"/>
-                      <a:round/>
-                      <a:headEnd type="none" w="med" len="med"/>
-                      <a:tailEnd type="none" w="med" len="med"/>
-                    </a:lnB>
-                    <a:solidFill>
-                      <a:srgbClr val="EEF2F7"/>
-                    </a:solidFill>
-                  </a:tcPr>
-                </a:tc>
-              </a:tr>
-            </a:tbl>
-          </a:graphicData>
-        </a:graphic>
-      </p:graphicFrame>
-      <p:sp>
-        <p:nvSpPr>
-          <p:cNvPr id="6" name="Text 3"/>
-          <p:cNvSpPr txBox="1"/>
-          <p:nvPr/>
-        </p:nvSpPr>
-        <p:spPr>
-          <a:xfrm>
-            <a:off x="548640" y="6263640"/>
-            <a:ext cx="10424160" cy="320040"/>
-          </a:xfrm>
-          <a:prstGeom prst="rect">
-            <a:avLst/>
-          </a:prstGeom>
-          <a:noFill/>
-          <a:ln/>
-        </p:spPr>
-        <p:txBody>
-          <a:bodyPr wrap="square" lIns="0" tIns="0" rIns="0" bIns="0" rtlCol="0" anchor="t"/>
-          <a:lstStyle/>
-          <a:p>
-            <a:pPr indent="0" marL="0">
-              <a:buNone/>
-            </a:pPr>
-            <a:r>
-              <a:rPr lang="en-US" sz="1100" dirty="0">
-                <a:solidFill>
-                  <a:srgbClr val="6B7A90"/>
-                </a:solidFill>
-                <a:latin typeface="맑은 고딕" pitchFamily="34" charset="0"/>
-                <a:ea typeface="맑은 고딕" pitchFamily="34" charset="-122"/>
-                <a:cs typeface="맑은 고딕" pitchFamily="34" charset="-120"/>
-              </a:rPr>
-              <a:t>설명문이 「이 도구를 써라」라고 적혀 있으면, 그 도구가 없는 곳에서는 그 단계가 조용히 빠지거나 멈춘다</a:t>
-            </a:r>
-            <a:endParaRPr lang="en-US" sz="1100" dirty="0"/>
           </a:p>
         </p:txBody>
       </p:sp>
